--- a/SEATN Symposium/2026_SEATN_Tutorial_KirtisChristensen_AI-Driven Bayesian Templates - OPEN.pptx
+++ b/SEATN Symposium/2026_SEATN_Tutorial_KirtisChristensen_AI-Driven Bayesian Templates - OPEN.pptx
@@ -6,10 +6,10 @@
     <p:sldMasterId id="2147483648" r:id="rId7"/>
   </p:sldMasterIdLst>
   <p:notesMasterIdLst>
-    <p:notesMasterId r:id="rId25"/>
+    <p:notesMasterId r:id="rId30"/>
   </p:notesMasterIdLst>
   <p:handoutMasterIdLst>
-    <p:handoutMasterId r:id="rId26"/>
+    <p:handoutMasterId r:id="rId31"/>
   </p:handoutMasterIdLst>
   <p:sldIdLst>
     <p:sldId id="362" r:id="rId8"/>
@@ -20,15 +20,20 @@
     <p:sldId id="372" r:id="rId13"/>
     <p:sldId id="373" r:id="rId14"/>
     <p:sldId id="374" r:id="rId15"/>
-    <p:sldId id="375" r:id="rId16"/>
-    <p:sldId id="376" r:id="rId17"/>
-    <p:sldId id="377" r:id="rId18"/>
-    <p:sldId id="378" r:id="rId19"/>
-    <p:sldId id="349" r:id="rId20"/>
-    <p:sldId id="304" r:id="rId21"/>
-    <p:sldId id="370" r:id="rId22"/>
-    <p:sldId id="285" r:id="rId23"/>
-    <p:sldId id="315" r:id="rId24"/>
+    <p:sldId id="379" r:id="rId16"/>
+    <p:sldId id="375" r:id="rId17"/>
+    <p:sldId id="380" r:id="rId18"/>
+    <p:sldId id="381" r:id="rId19"/>
+    <p:sldId id="382" r:id="rId20"/>
+    <p:sldId id="383" r:id="rId21"/>
+    <p:sldId id="376" r:id="rId22"/>
+    <p:sldId id="377" r:id="rId23"/>
+    <p:sldId id="378" r:id="rId24"/>
+    <p:sldId id="349" r:id="rId25"/>
+    <p:sldId id="304" r:id="rId26"/>
+    <p:sldId id="370" r:id="rId27"/>
+    <p:sldId id="285" r:id="rId28"/>
+    <p:sldId id="315" r:id="rId29"/>
   </p:sldIdLst>
   <p:sldSz cx="12192000" cy="6858000"/>
   <p:notesSz cx="6858000" cy="9144000"/>
@@ -144,7 +149,12 @@
             <p14:sldId id="372"/>
             <p14:sldId id="373"/>
             <p14:sldId id="374"/>
+            <p14:sldId id="379"/>
             <p14:sldId id="375"/>
+            <p14:sldId id="380"/>
+            <p14:sldId id="381"/>
+            <p14:sldId id="382"/>
+            <p14:sldId id="383"/>
             <p14:sldId id="376"/>
             <p14:sldId id="377"/>
             <p14:sldId id="378"/>
@@ -709,6 +719,571 @@
         <p:cNvPr id="1" name="">
           <a:extLst>
             <a:ext uri="{FF2B5EF4-FFF2-40B4-BE49-F238E27FC236}">
+              <a16:creationId xmlns:a16="http://schemas.microsoft.com/office/drawing/2014/main" id="{7DFD0D68-1119-F07D-5EAE-24BEF23FCA1D}"/>
+            </a:ext>
+          </a:extLst>
+        </p:cNvPr>
+        <p:cNvGrpSpPr/>
+        <p:nvPr/>
+      </p:nvGrpSpPr>
+      <p:grpSpPr>
+        <a:xfrm>
+          <a:off x="0" y="0"/>
+          <a:ext cx="0" cy="0"/>
+          <a:chOff x="0" y="0"/>
+          <a:chExt cx="0" cy="0"/>
+        </a:xfrm>
+      </p:grpSpPr>
+      <p:sp>
+        <p:nvSpPr>
+          <p:cNvPr id="2" name="Slide Image Placeholder 1">
+            <a:extLst>
+              <a:ext uri="{FF2B5EF4-FFF2-40B4-BE49-F238E27FC236}">
+                <a16:creationId xmlns:a16="http://schemas.microsoft.com/office/drawing/2014/main" id="{512BB931-180C-3572-DD6F-161835B1E516}"/>
+              </a:ext>
+            </a:extLst>
+          </p:cNvPr>
+          <p:cNvSpPr>
+            <a:spLocks noGrp="1" noRot="1" noChangeAspect="1"/>
+          </p:cNvSpPr>
+          <p:nvPr>
+            <p:ph type="sldImg"/>
+          </p:nvPr>
+        </p:nvSpPr>
+        <p:spPr>
+          <a:xfrm>
+            <a:off x="692150" y="692150"/>
+            <a:ext cx="5518150" cy="3103563"/>
+          </a:xfrm>
+        </p:spPr>
+      </p:sp>
+      <p:sp>
+        <p:nvSpPr>
+          <p:cNvPr id="3" name="Notes Placeholder 2">
+            <a:extLst>
+              <a:ext uri="{FF2B5EF4-FFF2-40B4-BE49-F238E27FC236}">
+                <a16:creationId xmlns:a16="http://schemas.microsoft.com/office/drawing/2014/main" id="{B50BE975-F159-45B4-2906-DE07B282EC1B}"/>
+              </a:ext>
+            </a:extLst>
+          </p:cNvPr>
+          <p:cNvSpPr>
+            <a:spLocks noGrp="1"/>
+          </p:cNvSpPr>
+          <p:nvPr>
+            <p:ph type="body" idx="1"/>
+          </p:nvPr>
+        </p:nvSpPr>
+        <p:spPr/>
+        <p:txBody>
+          <a:bodyPr/>
+          <a:lstStyle/>
+          <a:p>
+            <a:endParaRPr lang="en-US"/>
+          </a:p>
+        </p:txBody>
+      </p:sp>
+      <p:sp>
+        <p:nvSpPr>
+          <p:cNvPr id="5" name="Slide Number Placeholder 4">
+            <a:extLst>
+              <a:ext uri="{FF2B5EF4-FFF2-40B4-BE49-F238E27FC236}">
+                <a16:creationId xmlns:a16="http://schemas.microsoft.com/office/drawing/2014/main" id="{441E052D-4F60-B999-0CB5-4245D5D0B4F1}"/>
+              </a:ext>
+            </a:extLst>
+          </p:cNvPr>
+          <p:cNvSpPr>
+            <a:spLocks noGrp="1"/>
+          </p:cNvSpPr>
+          <p:nvPr>
+            <p:ph type="sldNum" sz="quarter" idx="5"/>
+          </p:nvPr>
+        </p:nvSpPr>
+        <p:spPr/>
+        <p:txBody>
+          <a:bodyPr/>
+          <a:lstStyle/>
+          <a:p>
+            <a:fld id="{56AF3A09-0EB5-429E-B7D0-FB28A7726D23}" type="slidenum">
+              <a:rPr lang="en-US" smtClean="0"/>
+              <a:t>10</a:t>
+            </a:fld>
+            <a:endParaRPr lang="en-US"/>
+          </a:p>
+        </p:txBody>
+      </p:sp>
+    </p:spTree>
+    <p:extLst>
+      <p:ext uri="{BB962C8B-B14F-4D97-AF65-F5344CB8AC3E}">
+        <p14:creationId xmlns:p14="http://schemas.microsoft.com/office/powerpoint/2010/main" val="3144559376"/>
+      </p:ext>
+    </p:extLst>
+  </p:cSld>
+  <p:clrMapOvr>
+    <a:masterClrMapping/>
+  </p:clrMapOvr>
+</p:notes>
+</file>
+
+<file path=ppt/notesSlides/notesSlide11.xml><?xml version="1.0" encoding="utf-8"?>
+<p:notes xmlns:a="http://schemas.openxmlformats.org/drawingml/2006/main" xmlns:r="http://schemas.openxmlformats.org/officeDocument/2006/relationships" xmlns:p="http://schemas.openxmlformats.org/presentationml/2006/main">
+  <p:cSld>
+    <p:spTree>
+      <p:nvGrpSpPr>
+        <p:cNvPr id="1" name="">
+          <a:extLst>
+            <a:ext uri="{FF2B5EF4-FFF2-40B4-BE49-F238E27FC236}">
+              <a16:creationId xmlns:a16="http://schemas.microsoft.com/office/drawing/2014/main" id="{274E75F7-4ACB-8942-CE48-5BDA838AD603}"/>
+            </a:ext>
+          </a:extLst>
+        </p:cNvPr>
+        <p:cNvGrpSpPr/>
+        <p:nvPr/>
+      </p:nvGrpSpPr>
+      <p:grpSpPr>
+        <a:xfrm>
+          <a:off x="0" y="0"/>
+          <a:ext cx="0" cy="0"/>
+          <a:chOff x="0" y="0"/>
+          <a:chExt cx="0" cy="0"/>
+        </a:xfrm>
+      </p:grpSpPr>
+      <p:sp>
+        <p:nvSpPr>
+          <p:cNvPr id="2" name="Slide Image Placeholder 1">
+            <a:extLst>
+              <a:ext uri="{FF2B5EF4-FFF2-40B4-BE49-F238E27FC236}">
+                <a16:creationId xmlns:a16="http://schemas.microsoft.com/office/drawing/2014/main" id="{231E64CF-9503-7965-AD40-5F2E66DF6B3C}"/>
+              </a:ext>
+            </a:extLst>
+          </p:cNvPr>
+          <p:cNvSpPr>
+            <a:spLocks noGrp="1" noRot="1" noChangeAspect="1"/>
+          </p:cNvSpPr>
+          <p:nvPr>
+            <p:ph type="sldImg"/>
+          </p:nvPr>
+        </p:nvSpPr>
+        <p:spPr>
+          <a:xfrm>
+            <a:off x="692150" y="692150"/>
+            <a:ext cx="5518150" cy="3103563"/>
+          </a:xfrm>
+        </p:spPr>
+      </p:sp>
+      <p:sp>
+        <p:nvSpPr>
+          <p:cNvPr id="3" name="Notes Placeholder 2">
+            <a:extLst>
+              <a:ext uri="{FF2B5EF4-FFF2-40B4-BE49-F238E27FC236}">
+                <a16:creationId xmlns:a16="http://schemas.microsoft.com/office/drawing/2014/main" id="{E4618A44-B7CD-3C00-F4FD-9C6A8BBC80F2}"/>
+              </a:ext>
+            </a:extLst>
+          </p:cNvPr>
+          <p:cNvSpPr>
+            <a:spLocks noGrp="1"/>
+          </p:cNvSpPr>
+          <p:nvPr>
+            <p:ph type="body" idx="1"/>
+          </p:nvPr>
+        </p:nvSpPr>
+        <p:spPr/>
+        <p:txBody>
+          <a:bodyPr/>
+          <a:lstStyle/>
+          <a:p>
+            <a:endParaRPr lang="en-US"/>
+          </a:p>
+        </p:txBody>
+      </p:sp>
+      <p:sp>
+        <p:nvSpPr>
+          <p:cNvPr id="5" name="Slide Number Placeholder 4">
+            <a:extLst>
+              <a:ext uri="{FF2B5EF4-FFF2-40B4-BE49-F238E27FC236}">
+                <a16:creationId xmlns:a16="http://schemas.microsoft.com/office/drawing/2014/main" id="{106A4F56-40D6-31D7-6EE1-45404FA6AB0A}"/>
+              </a:ext>
+            </a:extLst>
+          </p:cNvPr>
+          <p:cNvSpPr>
+            <a:spLocks noGrp="1"/>
+          </p:cNvSpPr>
+          <p:nvPr>
+            <p:ph type="sldNum" sz="quarter" idx="5"/>
+          </p:nvPr>
+        </p:nvSpPr>
+        <p:spPr/>
+        <p:txBody>
+          <a:bodyPr/>
+          <a:lstStyle/>
+          <a:p>
+            <a:fld id="{56AF3A09-0EB5-429E-B7D0-FB28A7726D23}" type="slidenum">
+              <a:rPr lang="en-US" smtClean="0"/>
+              <a:t>11</a:t>
+            </a:fld>
+            <a:endParaRPr lang="en-US"/>
+          </a:p>
+        </p:txBody>
+      </p:sp>
+    </p:spTree>
+    <p:extLst>
+      <p:ext uri="{BB962C8B-B14F-4D97-AF65-F5344CB8AC3E}">
+        <p14:creationId xmlns:p14="http://schemas.microsoft.com/office/powerpoint/2010/main" val="3132377637"/>
+      </p:ext>
+    </p:extLst>
+  </p:cSld>
+  <p:clrMapOvr>
+    <a:masterClrMapping/>
+  </p:clrMapOvr>
+</p:notes>
+</file>
+
+<file path=ppt/notesSlides/notesSlide12.xml><?xml version="1.0" encoding="utf-8"?>
+<p:notes xmlns:a="http://schemas.openxmlformats.org/drawingml/2006/main" xmlns:r="http://schemas.openxmlformats.org/officeDocument/2006/relationships" xmlns:p="http://schemas.openxmlformats.org/presentationml/2006/main">
+  <p:cSld>
+    <p:spTree>
+      <p:nvGrpSpPr>
+        <p:cNvPr id="1" name="">
+          <a:extLst>
+            <a:ext uri="{FF2B5EF4-FFF2-40B4-BE49-F238E27FC236}">
+              <a16:creationId xmlns:a16="http://schemas.microsoft.com/office/drawing/2014/main" id="{A47BA1B2-55D8-B6C6-46B9-A165C3BEDF1E}"/>
+            </a:ext>
+          </a:extLst>
+        </p:cNvPr>
+        <p:cNvGrpSpPr/>
+        <p:nvPr/>
+      </p:nvGrpSpPr>
+      <p:grpSpPr>
+        <a:xfrm>
+          <a:off x="0" y="0"/>
+          <a:ext cx="0" cy="0"/>
+          <a:chOff x="0" y="0"/>
+          <a:chExt cx="0" cy="0"/>
+        </a:xfrm>
+      </p:grpSpPr>
+      <p:sp>
+        <p:nvSpPr>
+          <p:cNvPr id="2" name="Slide Image Placeholder 1">
+            <a:extLst>
+              <a:ext uri="{FF2B5EF4-FFF2-40B4-BE49-F238E27FC236}">
+                <a16:creationId xmlns:a16="http://schemas.microsoft.com/office/drawing/2014/main" id="{D2996D99-49A7-BFA3-C33E-152EED3710EB}"/>
+              </a:ext>
+            </a:extLst>
+          </p:cNvPr>
+          <p:cNvSpPr>
+            <a:spLocks noGrp="1" noRot="1" noChangeAspect="1"/>
+          </p:cNvSpPr>
+          <p:nvPr>
+            <p:ph type="sldImg"/>
+          </p:nvPr>
+        </p:nvSpPr>
+        <p:spPr>
+          <a:xfrm>
+            <a:off x="692150" y="692150"/>
+            <a:ext cx="5518150" cy="3103563"/>
+          </a:xfrm>
+        </p:spPr>
+      </p:sp>
+      <p:sp>
+        <p:nvSpPr>
+          <p:cNvPr id="3" name="Notes Placeholder 2">
+            <a:extLst>
+              <a:ext uri="{FF2B5EF4-FFF2-40B4-BE49-F238E27FC236}">
+                <a16:creationId xmlns:a16="http://schemas.microsoft.com/office/drawing/2014/main" id="{808B7197-203B-E26F-3984-32F0FC0AFF0F}"/>
+              </a:ext>
+            </a:extLst>
+          </p:cNvPr>
+          <p:cNvSpPr>
+            <a:spLocks noGrp="1"/>
+          </p:cNvSpPr>
+          <p:nvPr>
+            <p:ph type="body" idx="1"/>
+          </p:nvPr>
+        </p:nvSpPr>
+        <p:spPr/>
+        <p:txBody>
+          <a:bodyPr/>
+          <a:lstStyle/>
+          <a:p>
+            <a:endParaRPr lang="en-US"/>
+          </a:p>
+        </p:txBody>
+      </p:sp>
+      <p:sp>
+        <p:nvSpPr>
+          <p:cNvPr id="5" name="Slide Number Placeholder 4">
+            <a:extLst>
+              <a:ext uri="{FF2B5EF4-FFF2-40B4-BE49-F238E27FC236}">
+                <a16:creationId xmlns:a16="http://schemas.microsoft.com/office/drawing/2014/main" id="{28AC42E5-0732-88B2-0D58-0D916169440A}"/>
+              </a:ext>
+            </a:extLst>
+          </p:cNvPr>
+          <p:cNvSpPr>
+            <a:spLocks noGrp="1"/>
+          </p:cNvSpPr>
+          <p:nvPr>
+            <p:ph type="sldNum" sz="quarter" idx="5"/>
+          </p:nvPr>
+        </p:nvSpPr>
+        <p:spPr/>
+        <p:txBody>
+          <a:bodyPr/>
+          <a:lstStyle/>
+          <a:p>
+            <a:fld id="{56AF3A09-0EB5-429E-B7D0-FB28A7726D23}" type="slidenum">
+              <a:rPr lang="en-US" smtClean="0"/>
+              <a:t>12</a:t>
+            </a:fld>
+            <a:endParaRPr lang="en-US"/>
+          </a:p>
+        </p:txBody>
+      </p:sp>
+    </p:spTree>
+    <p:extLst>
+      <p:ext uri="{BB962C8B-B14F-4D97-AF65-F5344CB8AC3E}">
+        <p14:creationId xmlns:p14="http://schemas.microsoft.com/office/powerpoint/2010/main" val="574389448"/>
+      </p:ext>
+    </p:extLst>
+  </p:cSld>
+  <p:clrMapOvr>
+    <a:masterClrMapping/>
+  </p:clrMapOvr>
+</p:notes>
+</file>
+
+<file path=ppt/notesSlides/notesSlide13.xml><?xml version="1.0" encoding="utf-8"?>
+<p:notes xmlns:a="http://schemas.openxmlformats.org/drawingml/2006/main" xmlns:r="http://schemas.openxmlformats.org/officeDocument/2006/relationships" xmlns:p="http://schemas.openxmlformats.org/presentationml/2006/main">
+  <p:cSld>
+    <p:spTree>
+      <p:nvGrpSpPr>
+        <p:cNvPr id="1" name="">
+          <a:extLst>
+            <a:ext uri="{FF2B5EF4-FFF2-40B4-BE49-F238E27FC236}">
+              <a16:creationId xmlns:a16="http://schemas.microsoft.com/office/drawing/2014/main" id="{77181B34-D764-7850-67E7-282510F919D8}"/>
+            </a:ext>
+          </a:extLst>
+        </p:cNvPr>
+        <p:cNvGrpSpPr/>
+        <p:nvPr/>
+      </p:nvGrpSpPr>
+      <p:grpSpPr>
+        <a:xfrm>
+          <a:off x="0" y="0"/>
+          <a:ext cx="0" cy="0"/>
+          <a:chOff x="0" y="0"/>
+          <a:chExt cx="0" cy="0"/>
+        </a:xfrm>
+      </p:grpSpPr>
+      <p:sp>
+        <p:nvSpPr>
+          <p:cNvPr id="2" name="Slide Image Placeholder 1">
+            <a:extLst>
+              <a:ext uri="{FF2B5EF4-FFF2-40B4-BE49-F238E27FC236}">
+                <a16:creationId xmlns:a16="http://schemas.microsoft.com/office/drawing/2014/main" id="{A6F79270-DA80-5D2F-E808-860F92DA5AF0}"/>
+              </a:ext>
+            </a:extLst>
+          </p:cNvPr>
+          <p:cNvSpPr>
+            <a:spLocks noGrp="1" noRot="1" noChangeAspect="1"/>
+          </p:cNvSpPr>
+          <p:nvPr>
+            <p:ph type="sldImg"/>
+          </p:nvPr>
+        </p:nvSpPr>
+        <p:spPr>
+          <a:xfrm>
+            <a:off x="692150" y="692150"/>
+            <a:ext cx="5518150" cy="3103563"/>
+          </a:xfrm>
+        </p:spPr>
+      </p:sp>
+      <p:sp>
+        <p:nvSpPr>
+          <p:cNvPr id="3" name="Notes Placeholder 2">
+            <a:extLst>
+              <a:ext uri="{FF2B5EF4-FFF2-40B4-BE49-F238E27FC236}">
+                <a16:creationId xmlns:a16="http://schemas.microsoft.com/office/drawing/2014/main" id="{2D036C92-0F94-4745-B19B-0F31ACFBA08E}"/>
+              </a:ext>
+            </a:extLst>
+          </p:cNvPr>
+          <p:cNvSpPr>
+            <a:spLocks noGrp="1"/>
+          </p:cNvSpPr>
+          <p:nvPr>
+            <p:ph type="body" idx="1"/>
+          </p:nvPr>
+        </p:nvSpPr>
+        <p:spPr/>
+        <p:txBody>
+          <a:bodyPr/>
+          <a:lstStyle/>
+          <a:p>
+            <a:endParaRPr lang="en-US"/>
+          </a:p>
+        </p:txBody>
+      </p:sp>
+      <p:sp>
+        <p:nvSpPr>
+          <p:cNvPr id="5" name="Slide Number Placeholder 4">
+            <a:extLst>
+              <a:ext uri="{FF2B5EF4-FFF2-40B4-BE49-F238E27FC236}">
+                <a16:creationId xmlns:a16="http://schemas.microsoft.com/office/drawing/2014/main" id="{ED8EDA28-D09D-3D7B-5A6A-15F4EA716372}"/>
+              </a:ext>
+            </a:extLst>
+          </p:cNvPr>
+          <p:cNvSpPr>
+            <a:spLocks noGrp="1"/>
+          </p:cNvSpPr>
+          <p:nvPr>
+            <p:ph type="sldNum" sz="quarter" idx="5"/>
+          </p:nvPr>
+        </p:nvSpPr>
+        <p:spPr/>
+        <p:txBody>
+          <a:bodyPr/>
+          <a:lstStyle/>
+          <a:p>
+            <a:fld id="{56AF3A09-0EB5-429E-B7D0-FB28A7726D23}" type="slidenum">
+              <a:rPr lang="en-US" smtClean="0"/>
+              <a:t>13</a:t>
+            </a:fld>
+            <a:endParaRPr lang="en-US"/>
+          </a:p>
+        </p:txBody>
+      </p:sp>
+    </p:spTree>
+    <p:extLst>
+      <p:ext uri="{BB962C8B-B14F-4D97-AF65-F5344CB8AC3E}">
+        <p14:creationId xmlns:p14="http://schemas.microsoft.com/office/powerpoint/2010/main" val="2872048325"/>
+      </p:ext>
+    </p:extLst>
+  </p:cSld>
+  <p:clrMapOvr>
+    <a:masterClrMapping/>
+  </p:clrMapOvr>
+</p:notes>
+</file>
+
+<file path=ppt/notesSlides/notesSlide14.xml><?xml version="1.0" encoding="utf-8"?>
+<p:notes xmlns:a="http://schemas.openxmlformats.org/drawingml/2006/main" xmlns:r="http://schemas.openxmlformats.org/officeDocument/2006/relationships" xmlns:p="http://schemas.openxmlformats.org/presentationml/2006/main">
+  <p:cSld>
+    <p:spTree>
+      <p:nvGrpSpPr>
+        <p:cNvPr id="1" name="">
+          <a:extLst>
+            <a:ext uri="{FF2B5EF4-FFF2-40B4-BE49-F238E27FC236}">
+              <a16:creationId xmlns:a16="http://schemas.microsoft.com/office/drawing/2014/main" id="{4B6BEA3E-A7F8-D23F-3F0E-6E3D6CA9B7BF}"/>
+            </a:ext>
+          </a:extLst>
+        </p:cNvPr>
+        <p:cNvGrpSpPr/>
+        <p:nvPr/>
+      </p:nvGrpSpPr>
+      <p:grpSpPr>
+        <a:xfrm>
+          <a:off x="0" y="0"/>
+          <a:ext cx="0" cy="0"/>
+          <a:chOff x="0" y="0"/>
+          <a:chExt cx="0" cy="0"/>
+        </a:xfrm>
+      </p:grpSpPr>
+      <p:sp>
+        <p:nvSpPr>
+          <p:cNvPr id="2" name="Slide Image Placeholder 1">
+            <a:extLst>
+              <a:ext uri="{FF2B5EF4-FFF2-40B4-BE49-F238E27FC236}">
+                <a16:creationId xmlns:a16="http://schemas.microsoft.com/office/drawing/2014/main" id="{03276F4A-B2B5-486C-FDE9-18D2B5411F70}"/>
+              </a:ext>
+            </a:extLst>
+          </p:cNvPr>
+          <p:cNvSpPr>
+            <a:spLocks noGrp="1" noRot="1" noChangeAspect="1"/>
+          </p:cNvSpPr>
+          <p:nvPr>
+            <p:ph type="sldImg"/>
+          </p:nvPr>
+        </p:nvSpPr>
+        <p:spPr>
+          <a:xfrm>
+            <a:off x="692150" y="692150"/>
+            <a:ext cx="5518150" cy="3103563"/>
+          </a:xfrm>
+        </p:spPr>
+      </p:sp>
+      <p:sp>
+        <p:nvSpPr>
+          <p:cNvPr id="3" name="Notes Placeholder 2">
+            <a:extLst>
+              <a:ext uri="{FF2B5EF4-FFF2-40B4-BE49-F238E27FC236}">
+                <a16:creationId xmlns:a16="http://schemas.microsoft.com/office/drawing/2014/main" id="{83728A1F-96B9-EEEE-7064-BB8895BFBAEA}"/>
+              </a:ext>
+            </a:extLst>
+          </p:cNvPr>
+          <p:cNvSpPr>
+            <a:spLocks noGrp="1"/>
+          </p:cNvSpPr>
+          <p:nvPr>
+            <p:ph type="body" idx="1"/>
+          </p:nvPr>
+        </p:nvSpPr>
+        <p:spPr/>
+        <p:txBody>
+          <a:bodyPr/>
+          <a:lstStyle/>
+          <a:p>
+            <a:endParaRPr lang="en-US"/>
+          </a:p>
+        </p:txBody>
+      </p:sp>
+      <p:sp>
+        <p:nvSpPr>
+          <p:cNvPr id="5" name="Slide Number Placeholder 4">
+            <a:extLst>
+              <a:ext uri="{FF2B5EF4-FFF2-40B4-BE49-F238E27FC236}">
+                <a16:creationId xmlns:a16="http://schemas.microsoft.com/office/drawing/2014/main" id="{F926F2F7-7B01-1E98-2335-1EEABD4B6280}"/>
+              </a:ext>
+            </a:extLst>
+          </p:cNvPr>
+          <p:cNvSpPr>
+            <a:spLocks noGrp="1"/>
+          </p:cNvSpPr>
+          <p:nvPr>
+            <p:ph type="sldNum" sz="quarter" idx="5"/>
+          </p:nvPr>
+        </p:nvSpPr>
+        <p:spPr/>
+        <p:txBody>
+          <a:bodyPr/>
+          <a:lstStyle/>
+          <a:p>
+            <a:fld id="{56AF3A09-0EB5-429E-B7D0-FB28A7726D23}" type="slidenum">
+              <a:rPr lang="en-US" smtClean="0"/>
+              <a:t>14</a:t>
+            </a:fld>
+            <a:endParaRPr lang="en-US"/>
+          </a:p>
+        </p:txBody>
+      </p:sp>
+    </p:spTree>
+    <p:extLst>
+      <p:ext uri="{BB962C8B-B14F-4D97-AF65-F5344CB8AC3E}">
+        <p14:creationId xmlns:p14="http://schemas.microsoft.com/office/powerpoint/2010/main" val="4195303496"/>
+      </p:ext>
+    </p:extLst>
+  </p:cSld>
+  <p:clrMapOvr>
+    <a:masterClrMapping/>
+  </p:clrMapOvr>
+</p:notes>
+</file>
+
+<file path=ppt/notesSlides/notesSlide15.xml><?xml version="1.0" encoding="utf-8"?>
+<p:notes xmlns:a="http://schemas.openxmlformats.org/drawingml/2006/main" xmlns:r="http://schemas.openxmlformats.org/officeDocument/2006/relationships" xmlns:p="http://schemas.openxmlformats.org/presentationml/2006/main">
+  <p:cSld>
+    <p:spTree>
+      <p:nvGrpSpPr>
+        <p:cNvPr id="1" name="">
+          <a:extLst>
+            <a:ext uri="{FF2B5EF4-FFF2-40B4-BE49-F238E27FC236}">
               <a16:creationId xmlns:a16="http://schemas.microsoft.com/office/drawing/2014/main" id="{909C6DE0-501A-4359-E526-C6B932FE5319}"/>
             </a:ext>
           </a:extLst>
@@ -795,7 +1370,7 @@
           <a:p>
             <a:fld id="{56AF3A09-0EB5-429E-B7D0-FB28A7726D23}" type="slidenum">
               <a:rPr lang="en-US" smtClean="0"/>
-              <a:t>10</a:t>
+              <a:t>15</a:t>
             </a:fld>
             <a:endParaRPr lang="en-US"/>
           </a:p>
@@ -814,7 +1389,7 @@
 </p:notes>
 </file>
 
-<file path=ppt/notesSlides/notesSlide11.xml><?xml version="1.0" encoding="utf-8"?>
+<file path=ppt/notesSlides/notesSlide16.xml><?xml version="1.0" encoding="utf-8"?>
 <p:notes xmlns:a="http://schemas.openxmlformats.org/drawingml/2006/main" xmlns:r="http://schemas.openxmlformats.org/officeDocument/2006/relationships" xmlns:p="http://schemas.openxmlformats.org/presentationml/2006/main">
   <p:cSld>
     <p:spTree>
@@ -908,7 +1483,7 @@
           <a:p>
             <a:fld id="{56AF3A09-0EB5-429E-B7D0-FB28A7726D23}" type="slidenum">
               <a:rPr lang="en-US" smtClean="0"/>
-              <a:t>11</a:t>
+              <a:t>16</a:t>
             </a:fld>
             <a:endParaRPr lang="en-US"/>
           </a:p>
@@ -927,7 +1502,7 @@
 </p:notes>
 </file>
 
-<file path=ppt/notesSlides/notesSlide12.xml><?xml version="1.0" encoding="utf-8"?>
+<file path=ppt/notesSlides/notesSlide17.xml><?xml version="1.0" encoding="utf-8"?>
 <p:notes xmlns:a="http://schemas.openxmlformats.org/drawingml/2006/main" xmlns:r="http://schemas.openxmlformats.org/officeDocument/2006/relationships" xmlns:p="http://schemas.openxmlformats.org/presentationml/2006/main">
   <p:cSld>
     <p:spTree>
@@ -1021,7 +1596,7 @@
           <a:p>
             <a:fld id="{56AF3A09-0EB5-429E-B7D0-FB28A7726D23}" type="slidenum">
               <a:rPr lang="en-US" smtClean="0"/>
-              <a:t>12</a:t>
+              <a:t>17</a:t>
             </a:fld>
             <a:endParaRPr lang="en-US"/>
           </a:p>
@@ -1040,7 +1615,7 @@
 </p:notes>
 </file>
 
-<file path=ppt/notesSlides/notesSlide13.xml><?xml version="1.0" encoding="utf-8"?>
+<file path=ppt/notesSlides/notesSlide18.xml><?xml version="1.0" encoding="utf-8"?>
 <p:notes xmlns:a="http://schemas.openxmlformats.org/drawingml/2006/main" xmlns:r="http://schemas.openxmlformats.org/officeDocument/2006/relationships" xmlns:p="http://schemas.openxmlformats.org/presentationml/2006/main">
   <p:cSld>
     <p:spTree>
@@ -1110,7 +1685,7 @@
           <a:p>
             <a:fld id="{56AF3A09-0EB5-429E-B7D0-FB28A7726D23}" type="slidenum">
               <a:rPr lang="en-US" smtClean="0"/>
-              <a:t>13</a:t>
+              <a:t>18</a:t>
             </a:fld>
             <a:endParaRPr lang="en-US"/>
           </a:p>
@@ -1129,7 +1704,7 @@
 </p:notes>
 </file>
 
-<file path=ppt/notesSlides/notesSlide14.xml><?xml version="1.0" encoding="utf-8"?>
+<file path=ppt/notesSlides/notesSlide19.xml><?xml version="1.0" encoding="utf-8"?>
 <p:notes xmlns:a="http://schemas.openxmlformats.org/drawingml/2006/main" xmlns:r="http://schemas.openxmlformats.org/officeDocument/2006/relationships" xmlns:p="http://schemas.openxmlformats.org/presentationml/2006/main">
   <p:cSld>
     <p:spTree>
@@ -1199,7 +1774,7 @@
           <a:p>
             <a:fld id="{56AF3A09-0EB5-429E-B7D0-FB28A7726D23}" type="slidenum">
               <a:rPr lang="en-US" smtClean="0"/>
-              <a:t>14</a:t>
+              <a:t>19</a:t>
             </a:fld>
             <a:endParaRPr lang="en-US"/>
           </a:p>
@@ -1209,348 +1784,6 @@
     <p:extLst>
       <p:ext uri="{BB962C8B-B14F-4D97-AF65-F5344CB8AC3E}">
         <p14:creationId xmlns:p14="http://schemas.microsoft.com/office/powerpoint/2010/main" val="1368206604"/>
-      </p:ext>
-    </p:extLst>
-  </p:cSld>
-  <p:clrMapOvr>
-    <a:masterClrMapping/>
-  </p:clrMapOvr>
-</p:notes>
-</file>
-
-<file path=ppt/notesSlides/notesSlide15.xml><?xml version="1.0" encoding="utf-8"?>
-<p:notes xmlns:a="http://schemas.openxmlformats.org/drawingml/2006/main" xmlns:r="http://schemas.openxmlformats.org/officeDocument/2006/relationships" xmlns:p="http://schemas.openxmlformats.org/presentationml/2006/main">
-  <p:cSld>
-    <p:spTree>
-      <p:nvGrpSpPr>
-        <p:cNvPr id="1" name=""/>
-        <p:cNvGrpSpPr/>
-        <p:nvPr/>
-      </p:nvGrpSpPr>
-      <p:grpSpPr>
-        <a:xfrm>
-          <a:off x="0" y="0"/>
-          <a:ext cx="0" cy="0"/>
-          <a:chOff x="0" y="0"/>
-          <a:chExt cx="0" cy="0"/>
-        </a:xfrm>
-      </p:grpSpPr>
-      <p:sp>
-        <p:nvSpPr>
-          <p:cNvPr id="2" name="Slide Image Placeholder 1"/>
-          <p:cNvSpPr>
-            <a:spLocks noGrp="1" noRot="1" noChangeAspect="1"/>
-          </p:cNvSpPr>
-          <p:nvPr>
-            <p:ph type="sldImg"/>
-          </p:nvPr>
-        </p:nvSpPr>
-        <p:spPr>
-          <a:xfrm>
-            <a:off x="692150" y="692150"/>
-            <a:ext cx="5518150" cy="3103563"/>
-          </a:xfrm>
-        </p:spPr>
-      </p:sp>
-      <p:sp>
-        <p:nvSpPr>
-          <p:cNvPr id="3" name="Notes Placeholder 2"/>
-          <p:cNvSpPr>
-            <a:spLocks noGrp="1"/>
-          </p:cNvSpPr>
-          <p:nvPr>
-            <p:ph type="body" idx="1"/>
-          </p:nvPr>
-        </p:nvSpPr>
-        <p:spPr/>
-        <p:txBody>
-          <a:bodyPr/>
-          <a:lstStyle/>
-          <a:p>
-            <a:endParaRPr lang="en-US"/>
-          </a:p>
-        </p:txBody>
-      </p:sp>
-      <p:sp>
-        <p:nvSpPr>
-          <p:cNvPr id="4" name="Slide Number Placeholder 3"/>
-          <p:cNvSpPr>
-            <a:spLocks noGrp="1"/>
-          </p:cNvSpPr>
-          <p:nvPr>
-            <p:ph type="sldNum" sz="quarter" idx="5"/>
-          </p:nvPr>
-        </p:nvSpPr>
-        <p:spPr/>
-        <p:txBody>
-          <a:bodyPr/>
-          <a:lstStyle/>
-          <a:p>
-            <a:fld id="{56AF3A09-0EB5-429E-B7D0-FB28A7726D23}" type="slidenum">
-              <a:rPr lang="en-US" smtClean="0"/>
-              <a:t>15</a:t>
-            </a:fld>
-            <a:endParaRPr lang="en-US"/>
-          </a:p>
-        </p:txBody>
-      </p:sp>
-    </p:spTree>
-    <p:extLst>
-      <p:ext uri="{BB962C8B-B14F-4D97-AF65-F5344CB8AC3E}">
-        <p14:creationId xmlns:p14="http://schemas.microsoft.com/office/powerpoint/2010/main" val="2015998511"/>
-      </p:ext>
-    </p:extLst>
-  </p:cSld>
-  <p:clrMapOvr>
-    <a:masterClrMapping/>
-  </p:clrMapOvr>
-</p:notes>
-</file>
-
-<file path=ppt/notesSlides/notesSlide16.xml><?xml version="1.0" encoding="utf-8"?>
-<p:notes xmlns:a="http://schemas.openxmlformats.org/drawingml/2006/main" xmlns:r="http://schemas.openxmlformats.org/officeDocument/2006/relationships" xmlns:p="http://schemas.openxmlformats.org/presentationml/2006/main">
-  <p:cSld>
-    <p:spTree>
-      <p:nvGrpSpPr>
-        <p:cNvPr id="1" name=""/>
-        <p:cNvGrpSpPr/>
-        <p:nvPr/>
-      </p:nvGrpSpPr>
-      <p:grpSpPr>
-        <a:xfrm>
-          <a:off x="0" y="0"/>
-          <a:ext cx="0" cy="0"/>
-          <a:chOff x="0" y="0"/>
-          <a:chExt cx="0" cy="0"/>
-        </a:xfrm>
-      </p:grpSpPr>
-      <p:sp>
-        <p:nvSpPr>
-          <p:cNvPr id="2" name="Slide Image Placeholder 1"/>
-          <p:cNvSpPr>
-            <a:spLocks noGrp="1" noRot="1" noChangeAspect="1"/>
-          </p:cNvSpPr>
-          <p:nvPr>
-            <p:ph type="sldImg"/>
-          </p:nvPr>
-        </p:nvSpPr>
-        <p:spPr>
-          <a:xfrm>
-            <a:off x="685800" y="692150"/>
-            <a:ext cx="5486400" cy="3086100"/>
-          </a:xfrm>
-        </p:spPr>
-      </p:sp>
-      <p:sp>
-        <p:nvSpPr>
-          <p:cNvPr id="3" name="Notes Placeholder 2"/>
-          <p:cNvSpPr>
-            <a:spLocks noGrp="1"/>
-          </p:cNvSpPr>
-          <p:nvPr>
-            <p:ph type="body" idx="1"/>
-          </p:nvPr>
-        </p:nvSpPr>
-        <p:spPr/>
-        <p:txBody>
-          <a:bodyPr/>
-          <a:lstStyle/>
-          <a:p>
-            <a:endParaRPr lang="en-US"/>
-          </a:p>
-        </p:txBody>
-      </p:sp>
-      <p:sp>
-        <p:nvSpPr>
-          <p:cNvPr id="4" name="Header Placeholder 3"/>
-          <p:cNvSpPr>
-            <a:spLocks noGrp="1"/>
-          </p:cNvSpPr>
-          <p:nvPr>
-            <p:ph type="hdr" sz="quarter" idx="10"/>
-          </p:nvPr>
-        </p:nvSpPr>
-        <p:spPr>
-          <a:xfrm>
-            <a:off x="0" y="0"/>
-            <a:ext cx="2971800" cy="458788"/>
-          </a:xfrm>
-          <a:prstGeom prst="rect">
-            <a:avLst/>
-          </a:prstGeom>
-        </p:spPr>
-        <p:txBody>
-          <a:bodyPr/>
-          <a:lstStyle/>
-          <a:p>
-            <a:endParaRPr lang="en-US"/>
-          </a:p>
-        </p:txBody>
-      </p:sp>
-      <p:sp>
-        <p:nvSpPr>
-          <p:cNvPr id="5" name="Footer Placeholder 4"/>
-          <p:cNvSpPr>
-            <a:spLocks noGrp="1"/>
-          </p:cNvSpPr>
-          <p:nvPr>
-            <p:ph type="ftr" sz="quarter" idx="11"/>
-            <p:custDataLst>
-              <p:tags r:id="rId1"/>
-            </p:custDataLst>
-          </p:nvPr>
-        </p:nvSpPr>
-        <p:spPr>
-          <a:xfrm>
-            <a:off x="0" y="8928556"/>
-            <a:ext cx="6858000" cy="215444"/>
-          </a:xfrm>
-          <a:prstGeom prst="rect">
-            <a:avLst/>
-          </a:prstGeom>
-        </p:spPr>
-        <p:txBody>
-          <a:bodyPr/>
-          <a:lstStyle/>
-          <a:p>
-            <a:pPr algn="ctr"/>
-            <a:r>
-              <a:rPr lang="en-US" sz="800">
-                <a:solidFill>
-                  <a:srgbClr val="000000"/>
-                </a:solidFill>
-                <a:latin typeface="Arial" panose="020B0604020202020204" pitchFamily="34" charset="0"/>
-              </a:rPr>
-              <a:t>RTX Corporation (Corporate) - Company Use
-This document does not contain any export controlled technical material/data/information.</a:t>
-            </a:r>
-          </a:p>
-        </p:txBody>
-      </p:sp>
-      <p:sp>
-        <p:nvSpPr>
-          <p:cNvPr id="6" name="Slide Number Placeholder 5"/>
-          <p:cNvSpPr>
-            <a:spLocks noGrp="1"/>
-          </p:cNvSpPr>
-          <p:nvPr>
-            <p:ph type="sldNum" sz="quarter" idx="12"/>
-          </p:nvPr>
-        </p:nvSpPr>
-        <p:spPr>
-          <a:xfrm>
-            <a:off x="3884613" y="8685213"/>
-            <a:ext cx="2971800" cy="458787"/>
-          </a:xfrm>
-          <a:prstGeom prst="rect">
-            <a:avLst/>
-          </a:prstGeom>
-        </p:spPr>
-        <p:txBody>
-          <a:bodyPr/>
-          <a:lstStyle/>
-          <a:p>
-            <a:fld id="{5E1E3BB0-C8FD-40D9-9F39-577D7A163298}" type="slidenum">
-              <a:rPr lang="en-US" smtClean="0"/>
-              <a:t>16</a:t>
-            </a:fld>
-            <a:endParaRPr lang="en-US"/>
-          </a:p>
-        </p:txBody>
-      </p:sp>
-    </p:spTree>
-    <p:extLst>
-      <p:ext uri="{BB962C8B-B14F-4D97-AF65-F5344CB8AC3E}">
-        <p14:creationId xmlns:p14="http://schemas.microsoft.com/office/powerpoint/2010/main" val="2297623188"/>
-      </p:ext>
-    </p:extLst>
-  </p:cSld>
-  <p:clrMapOvr>
-    <a:masterClrMapping/>
-  </p:clrMapOvr>
-</p:notes>
-</file>
-
-<file path=ppt/notesSlides/notesSlide17.xml><?xml version="1.0" encoding="utf-8"?>
-<p:notes xmlns:a="http://schemas.openxmlformats.org/drawingml/2006/main" xmlns:r="http://schemas.openxmlformats.org/officeDocument/2006/relationships" xmlns:p="http://schemas.openxmlformats.org/presentationml/2006/main">
-  <p:cSld>
-    <p:spTree>
-      <p:nvGrpSpPr>
-        <p:cNvPr id="1" name=""/>
-        <p:cNvGrpSpPr/>
-        <p:nvPr/>
-      </p:nvGrpSpPr>
-      <p:grpSpPr>
-        <a:xfrm>
-          <a:off x="0" y="0"/>
-          <a:ext cx="0" cy="0"/>
-          <a:chOff x="0" y="0"/>
-          <a:chExt cx="0" cy="0"/>
-        </a:xfrm>
-      </p:grpSpPr>
-      <p:sp>
-        <p:nvSpPr>
-          <p:cNvPr id="2" name="Slide Image Placeholder 1"/>
-          <p:cNvSpPr>
-            <a:spLocks noGrp="1" noRot="1" noChangeAspect="1"/>
-          </p:cNvSpPr>
-          <p:nvPr>
-            <p:ph type="sldImg"/>
-          </p:nvPr>
-        </p:nvSpPr>
-        <p:spPr>
-          <a:xfrm>
-            <a:off x="692150" y="692150"/>
-            <a:ext cx="5518150" cy="3103563"/>
-          </a:xfrm>
-        </p:spPr>
-      </p:sp>
-      <p:sp>
-        <p:nvSpPr>
-          <p:cNvPr id="3" name="Notes Placeholder 2"/>
-          <p:cNvSpPr>
-            <a:spLocks noGrp="1"/>
-          </p:cNvSpPr>
-          <p:nvPr>
-            <p:ph type="body" idx="1"/>
-          </p:nvPr>
-        </p:nvSpPr>
-        <p:spPr/>
-        <p:txBody>
-          <a:bodyPr/>
-          <a:lstStyle/>
-          <a:p>
-            <a:endParaRPr lang="en-US"/>
-          </a:p>
-        </p:txBody>
-      </p:sp>
-      <p:sp>
-        <p:nvSpPr>
-          <p:cNvPr id="5" name="Slide Number Placeholder 4"/>
-          <p:cNvSpPr>
-            <a:spLocks noGrp="1"/>
-          </p:cNvSpPr>
-          <p:nvPr>
-            <p:ph type="sldNum" sz="quarter" idx="11"/>
-          </p:nvPr>
-        </p:nvSpPr>
-        <p:spPr/>
-        <p:txBody>
-          <a:bodyPr/>
-          <a:lstStyle/>
-          <a:p>
-            <a:fld id="{56AF3A09-0EB5-429E-B7D0-FB28A7726D23}" type="slidenum">
-              <a:rPr lang="en-US" smtClean="0"/>
-              <a:t>17</a:t>
-            </a:fld>
-            <a:endParaRPr lang="en-US"/>
-          </a:p>
-        </p:txBody>
-      </p:sp>
-    </p:spTree>
-    <p:extLst>
-      <p:ext uri="{BB962C8B-B14F-4D97-AF65-F5344CB8AC3E}">
-        <p14:creationId xmlns:p14="http://schemas.microsoft.com/office/powerpoint/2010/main" val="4005484703"/>
       </p:ext>
     </p:extLst>
   </p:cSld>
@@ -1640,6 +1873,348 @@
     <p:extLst>
       <p:ext uri="{BB962C8B-B14F-4D97-AF65-F5344CB8AC3E}">
         <p14:creationId xmlns:p14="http://schemas.microsoft.com/office/powerpoint/2010/main" val="3036179515"/>
+      </p:ext>
+    </p:extLst>
+  </p:cSld>
+  <p:clrMapOvr>
+    <a:masterClrMapping/>
+  </p:clrMapOvr>
+</p:notes>
+</file>
+
+<file path=ppt/notesSlides/notesSlide20.xml><?xml version="1.0" encoding="utf-8"?>
+<p:notes xmlns:a="http://schemas.openxmlformats.org/drawingml/2006/main" xmlns:r="http://schemas.openxmlformats.org/officeDocument/2006/relationships" xmlns:p="http://schemas.openxmlformats.org/presentationml/2006/main">
+  <p:cSld>
+    <p:spTree>
+      <p:nvGrpSpPr>
+        <p:cNvPr id="1" name=""/>
+        <p:cNvGrpSpPr/>
+        <p:nvPr/>
+      </p:nvGrpSpPr>
+      <p:grpSpPr>
+        <a:xfrm>
+          <a:off x="0" y="0"/>
+          <a:ext cx="0" cy="0"/>
+          <a:chOff x="0" y="0"/>
+          <a:chExt cx="0" cy="0"/>
+        </a:xfrm>
+      </p:grpSpPr>
+      <p:sp>
+        <p:nvSpPr>
+          <p:cNvPr id="2" name="Slide Image Placeholder 1"/>
+          <p:cNvSpPr>
+            <a:spLocks noGrp="1" noRot="1" noChangeAspect="1"/>
+          </p:cNvSpPr>
+          <p:nvPr>
+            <p:ph type="sldImg"/>
+          </p:nvPr>
+        </p:nvSpPr>
+        <p:spPr>
+          <a:xfrm>
+            <a:off x="692150" y="692150"/>
+            <a:ext cx="5518150" cy="3103563"/>
+          </a:xfrm>
+        </p:spPr>
+      </p:sp>
+      <p:sp>
+        <p:nvSpPr>
+          <p:cNvPr id="3" name="Notes Placeholder 2"/>
+          <p:cNvSpPr>
+            <a:spLocks noGrp="1"/>
+          </p:cNvSpPr>
+          <p:nvPr>
+            <p:ph type="body" idx="1"/>
+          </p:nvPr>
+        </p:nvSpPr>
+        <p:spPr/>
+        <p:txBody>
+          <a:bodyPr/>
+          <a:lstStyle/>
+          <a:p>
+            <a:endParaRPr lang="en-US"/>
+          </a:p>
+        </p:txBody>
+      </p:sp>
+      <p:sp>
+        <p:nvSpPr>
+          <p:cNvPr id="4" name="Slide Number Placeholder 3"/>
+          <p:cNvSpPr>
+            <a:spLocks noGrp="1"/>
+          </p:cNvSpPr>
+          <p:nvPr>
+            <p:ph type="sldNum" sz="quarter" idx="5"/>
+          </p:nvPr>
+        </p:nvSpPr>
+        <p:spPr/>
+        <p:txBody>
+          <a:bodyPr/>
+          <a:lstStyle/>
+          <a:p>
+            <a:fld id="{56AF3A09-0EB5-429E-B7D0-FB28A7726D23}" type="slidenum">
+              <a:rPr lang="en-US" smtClean="0"/>
+              <a:t>20</a:t>
+            </a:fld>
+            <a:endParaRPr lang="en-US"/>
+          </a:p>
+        </p:txBody>
+      </p:sp>
+    </p:spTree>
+    <p:extLst>
+      <p:ext uri="{BB962C8B-B14F-4D97-AF65-F5344CB8AC3E}">
+        <p14:creationId xmlns:p14="http://schemas.microsoft.com/office/powerpoint/2010/main" val="2015998511"/>
+      </p:ext>
+    </p:extLst>
+  </p:cSld>
+  <p:clrMapOvr>
+    <a:masterClrMapping/>
+  </p:clrMapOvr>
+</p:notes>
+</file>
+
+<file path=ppt/notesSlides/notesSlide21.xml><?xml version="1.0" encoding="utf-8"?>
+<p:notes xmlns:a="http://schemas.openxmlformats.org/drawingml/2006/main" xmlns:r="http://schemas.openxmlformats.org/officeDocument/2006/relationships" xmlns:p="http://schemas.openxmlformats.org/presentationml/2006/main">
+  <p:cSld>
+    <p:spTree>
+      <p:nvGrpSpPr>
+        <p:cNvPr id="1" name=""/>
+        <p:cNvGrpSpPr/>
+        <p:nvPr/>
+      </p:nvGrpSpPr>
+      <p:grpSpPr>
+        <a:xfrm>
+          <a:off x="0" y="0"/>
+          <a:ext cx="0" cy="0"/>
+          <a:chOff x="0" y="0"/>
+          <a:chExt cx="0" cy="0"/>
+        </a:xfrm>
+      </p:grpSpPr>
+      <p:sp>
+        <p:nvSpPr>
+          <p:cNvPr id="2" name="Slide Image Placeholder 1"/>
+          <p:cNvSpPr>
+            <a:spLocks noGrp="1" noRot="1" noChangeAspect="1"/>
+          </p:cNvSpPr>
+          <p:nvPr>
+            <p:ph type="sldImg"/>
+          </p:nvPr>
+        </p:nvSpPr>
+        <p:spPr>
+          <a:xfrm>
+            <a:off x="685800" y="692150"/>
+            <a:ext cx="5486400" cy="3086100"/>
+          </a:xfrm>
+        </p:spPr>
+      </p:sp>
+      <p:sp>
+        <p:nvSpPr>
+          <p:cNvPr id="3" name="Notes Placeholder 2"/>
+          <p:cNvSpPr>
+            <a:spLocks noGrp="1"/>
+          </p:cNvSpPr>
+          <p:nvPr>
+            <p:ph type="body" idx="1"/>
+          </p:nvPr>
+        </p:nvSpPr>
+        <p:spPr/>
+        <p:txBody>
+          <a:bodyPr/>
+          <a:lstStyle/>
+          <a:p>
+            <a:endParaRPr lang="en-US"/>
+          </a:p>
+        </p:txBody>
+      </p:sp>
+      <p:sp>
+        <p:nvSpPr>
+          <p:cNvPr id="4" name="Header Placeholder 3"/>
+          <p:cNvSpPr>
+            <a:spLocks noGrp="1"/>
+          </p:cNvSpPr>
+          <p:nvPr>
+            <p:ph type="hdr" sz="quarter" idx="10"/>
+          </p:nvPr>
+        </p:nvSpPr>
+        <p:spPr>
+          <a:xfrm>
+            <a:off x="0" y="0"/>
+            <a:ext cx="2971800" cy="458788"/>
+          </a:xfrm>
+          <a:prstGeom prst="rect">
+            <a:avLst/>
+          </a:prstGeom>
+        </p:spPr>
+        <p:txBody>
+          <a:bodyPr/>
+          <a:lstStyle/>
+          <a:p>
+            <a:endParaRPr lang="en-US"/>
+          </a:p>
+        </p:txBody>
+      </p:sp>
+      <p:sp>
+        <p:nvSpPr>
+          <p:cNvPr id="5" name="Footer Placeholder 4"/>
+          <p:cNvSpPr>
+            <a:spLocks noGrp="1"/>
+          </p:cNvSpPr>
+          <p:nvPr>
+            <p:ph type="ftr" sz="quarter" idx="11"/>
+            <p:custDataLst>
+              <p:tags r:id="rId1"/>
+            </p:custDataLst>
+          </p:nvPr>
+        </p:nvSpPr>
+        <p:spPr>
+          <a:xfrm>
+            <a:off x="0" y="8928556"/>
+            <a:ext cx="6858000" cy="215444"/>
+          </a:xfrm>
+          <a:prstGeom prst="rect">
+            <a:avLst/>
+          </a:prstGeom>
+        </p:spPr>
+        <p:txBody>
+          <a:bodyPr/>
+          <a:lstStyle/>
+          <a:p>
+            <a:pPr algn="ctr"/>
+            <a:r>
+              <a:rPr lang="en-US" sz="800">
+                <a:solidFill>
+                  <a:srgbClr val="000000"/>
+                </a:solidFill>
+                <a:latin typeface="Arial" panose="020B0604020202020204" pitchFamily="34" charset="0"/>
+              </a:rPr>
+              <a:t>RTX Corporation (Corporate) - Company Use
+This document does not contain any export controlled technical material/data/information.</a:t>
+            </a:r>
+          </a:p>
+        </p:txBody>
+      </p:sp>
+      <p:sp>
+        <p:nvSpPr>
+          <p:cNvPr id="6" name="Slide Number Placeholder 5"/>
+          <p:cNvSpPr>
+            <a:spLocks noGrp="1"/>
+          </p:cNvSpPr>
+          <p:nvPr>
+            <p:ph type="sldNum" sz="quarter" idx="12"/>
+          </p:nvPr>
+        </p:nvSpPr>
+        <p:spPr>
+          <a:xfrm>
+            <a:off x="3884613" y="8685213"/>
+            <a:ext cx="2971800" cy="458787"/>
+          </a:xfrm>
+          <a:prstGeom prst="rect">
+            <a:avLst/>
+          </a:prstGeom>
+        </p:spPr>
+        <p:txBody>
+          <a:bodyPr/>
+          <a:lstStyle/>
+          <a:p>
+            <a:fld id="{5E1E3BB0-C8FD-40D9-9F39-577D7A163298}" type="slidenum">
+              <a:rPr lang="en-US" smtClean="0"/>
+              <a:t>21</a:t>
+            </a:fld>
+            <a:endParaRPr lang="en-US"/>
+          </a:p>
+        </p:txBody>
+      </p:sp>
+    </p:spTree>
+    <p:extLst>
+      <p:ext uri="{BB962C8B-B14F-4D97-AF65-F5344CB8AC3E}">
+        <p14:creationId xmlns:p14="http://schemas.microsoft.com/office/powerpoint/2010/main" val="2297623188"/>
+      </p:ext>
+    </p:extLst>
+  </p:cSld>
+  <p:clrMapOvr>
+    <a:masterClrMapping/>
+  </p:clrMapOvr>
+</p:notes>
+</file>
+
+<file path=ppt/notesSlides/notesSlide22.xml><?xml version="1.0" encoding="utf-8"?>
+<p:notes xmlns:a="http://schemas.openxmlformats.org/drawingml/2006/main" xmlns:r="http://schemas.openxmlformats.org/officeDocument/2006/relationships" xmlns:p="http://schemas.openxmlformats.org/presentationml/2006/main">
+  <p:cSld>
+    <p:spTree>
+      <p:nvGrpSpPr>
+        <p:cNvPr id="1" name=""/>
+        <p:cNvGrpSpPr/>
+        <p:nvPr/>
+      </p:nvGrpSpPr>
+      <p:grpSpPr>
+        <a:xfrm>
+          <a:off x="0" y="0"/>
+          <a:ext cx="0" cy="0"/>
+          <a:chOff x="0" y="0"/>
+          <a:chExt cx="0" cy="0"/>
+        </a:xfrm>
+      </p:grpSpPr>
+      <p:sp>
+        <p:nvSpPr>
+          <p:cNvPr id="2" name="Slide Image Placeholder 1"/>
+          <p:cNvSpPr>
+            <a:spLocks noGrp="1" noRot="1" noChangeAspect="1"/>
+          </p:cNvSpPr>
+          <p:nvPr>
+            <p:ph type="sldImg"/>
+          </p:nvPr>
+        </p:nvSpPr>
+        <p:spPr>
+          <a:xfrm>
+            <a:off x="692150" y="692150"/>
+            <a:ext cx="5518150" cy="3103563"/>
+          </a:xfrm>
+        </p:spPr>
+      </p:sp>
+      <p:sp>
+        <p:nvSpPr>
+          <p:cNvPr id="3" name="Notes Placeholder 2"/>
+          <p:cNvSpPr>
+            <a:spLocks noGrp="1"/>
+          </p:cNvSpPr>
+          <p:nvPr>
+            <p:ph type="body" idx="1"/>
+          </p:nvPr>
+        </p:nvSpPr>
+        <p:spPr/>
+        <p:txBody>
+          <a:bodyPr/>
+          <a:lstStyle/>
+          <a:p>
+            <a:endParaRPr lang="en-US"/>
+          </a:p>
+        </p:txBody>
+      </p:sp>
+      <p:sp>
+        <p:nvSpPr>
+          <p:cNvPr id="5" name="Slide Number Placeholder 4"/>
+          <p:cNvSpPr>
+            <a:spLocks noGrp="1"/>
+          </p:cNvSpPr>
+          <p:nvPr>
+            <p:ph type="sldNum" sz="quarter" idx="11"/>
+          </p:nvPr>
+        </p:nvSpPr>
+        <p:spPr/>
+        <p:txBody>
+          <a:bodyPr/>
+          <a:lstStyle/>
+          <a:p>
+            <a:fld id="{56AF3A09-0EB5-429E-B7D0-FB28A7726D23}" type="slidenum">
+              <a:rPr lang="en-US" smtClean="0"/>
+              <a:t>22</a:t>
+            </a:fld>
+            <a:endParaRPr lang="en-US"/>
+          </a:p>
+        </p:txBody>
+      </p:sp>
+    </p:spTree>
+    <p:extLst>
+      <p:ext uri="{BB962C8B-B14F-4D97-AF65-F5344CB8AC3E}">
+        <p14:creationId xmlns:p14="http://schemas.microsoft.com/office/powerpoint/2010/main" val="4005484703"/>
       </p:ext>
     </p:extLst>
   </p:cSld>
@@ -2287,7 +2862,7 @@
         <p:cNvPr id="1" name="">
           <a:extLst>
             <a:ext uri="{FF2B5EF4-FFF2-40B4-BE49-F238E27FC236}">
-              <a16:creationId xmlns:a16="http://schemas.microsoft.com/office/drawing/2014/main" id="{7DFD0D68-1119-F07D-5EAE-24BEF23FCA1D}"/>
+              <a16:creationId xmlns:a16="http://schemas.microsoft.com/office/drawing/2014/main" id="{82B21FFE-81BA-DADC-5FDF-95F910F4CB1F}"/>
             </a:ext>
           </a:extLst>
         </p:cNvPr>
@@ -2307,7 +2882,7 @@
           <p:cNvPr id="2" name="Slide Image Placeholder 1">
             <a:extLst>
               <a:ext uri="{FF2B5EF4-FFF2-40B4-BE49-F238E27FC236}">
-                <a16:creationId xmlns:a16="http://schemas.microsoft.com/office/drawing/2014/main" id="{512BB931-180C-3572-DD6F-161835B1E516}"/>
+                <a16:creationId xmlns:a16="http://schemas.microsoft.com/office/drawing/2014/main" id="{4D688167-428B-016A-AA60-FF8AA9C7378A}"/>
               </a:ext>
             </a:extLst>
           </p:cNvPr>
@@ -2330,7 +2905,7 @@
           <p:cNvPr id="3" name="Notes Placeholder 2">
             <a:extLst>
               <a:ext uri="{FF2B5EF4-FFF2-40B4-BE49-F238E27FC236}">
-                <a16:creationId xmlns:a16="http://schemas.microsoft.com/office/drawing/2014/main" id="{B50BE975-F159-45B4-2906-DE07B282EC1B}"/>
+                <a16:creationId xmlns:a16="http://schemas.microsoft.com/office/drawing/2014/main" id="{81507B1C-477E-6177-89D2-9C28BFFA1A3F}"/>
               </a:ext>
             </a:extLst>
           </p:cNvPr>
@@ -2355,7 +2930,7 @@
           <p:cNvPr id="5" name="Slide Number Placeholder 4">
             <a:extLst>
               <a:ext uri="{FF2B5EF4-FFF2-40B4-BE49-F238E27FC236}">
-                <a16:creationId xmlns:a16="http://schemas.microsoft.com/office/drawing/2014/main" id="{441E052D-4F60-B999-0CB5-4245D5D0B4F1}"/>
+                <a16:creationId xmlns:a16="http://schemas.microsoft.com/office/drawing/2014/main" id="{8FEFB916-5982-36B1-6EC3-D816B47331FF}"/>
               </a:ext>
             </a:extLst>
           </p:cNvPr>
@@ -2382,7 +2957,7 @@
     </p:spTree>
     <p:extLst>
       <p:ext uri="{BB962C8B-B14F-4D97-AF65-F5344CB8AC3E}">
-        <p14:creationId xmlns:p14="http://schemas.microsoft.com/office/powerpoint/2010/main" val="3144559376"/>
+        <p14:creationId xmlns:p14="http://schemas.microsoft.com/office/powerpoint/2010/main" val="1024668906"/>
       </p:ext>
     </p:extLst>
   </p:cSld>
@@ -7829,14 +8404,14 @@
           </a:ln>
           <a:extLst>
             <a:ext uri="{909E8E84-426E-40dd-AFC4-6F175D3DCCD1}">
-              <a14:hiddenFill xmlns="" xmlns:a14="http://schemas.microsoft.com/office/drawing/2010/main">
+              <a14:hiddenFill xmlns:a14="http://schemas.microsoft.com/office/drawing/2010/main" xmlns="">
                 <a:solidFill>
                   <a:srgbClr val="FFFFFF"/>
                 </a:solidFill>
               </a14:hiddenFill>
             </a:ext>
             <a:ext uri="{91240B29-F687-4f45-9708-019B960494DF}">
-              <a14:hiddenLine xmlns="" xmlns:a14="http://schemas.microsoft.com/office/drawing/2010/main" w="9525">
+              <a14:hiddenLine xmlns:a14="http://schemas.microsoft.com/office/drawing/2010/main" xmlns="" w="9525">
                 <a:solidFill>
                   <a:srgbClr val="000000"/>
                 </a:solidFill>
@@ -8022,14 +8597,14 @@
           </a:ln>
           <a:extLst>
             <a:ext uri="{909E8E84-426E-40dd-AFC4-6F175D3DCCD1}">
-              <a14:hiddenFill xmlns="" xmlns:a14="http://schemas.microsoft.com/office/drawing/2010/main">
+              <a14:hiddenFill xmlns:a14="http://schemas.microsoft.com/office/drawing/2010/main" xmlns="">
                 <a:solidFill>
                   <a:srgbClr val="FFFFFF"/>
                 </a:solidFill>
               </a14:hiddenFill>
             </a:ext>
             <a:ext uri="{91240B29-F687-4f45-9708-019B960494DF}">
-              <a14:hiddenLine xmlns="" xmlns:a14="http://schemas.microsoft.com/office/drawing/2010/main" w="9525">
+              <a14:hiddenLine xmlns:a14="http://schemas.microsoft.com/office/drawing/2010/main" xmlns="" w="9525">
                 <a:solidFill>
                   <a:srgbClr val="000000"/>
                 </a:solidFill>
@@ -9687,6 +10262,2237 @@
         <p:cNvPr id="1" name="">
           <a:extLst>
             <a:ext uri="{FF2B5EF4-FFF2-40B4-BE49-F238E27FC236}">
+              <a16:creationId xmlns:a16="http://schemas.microsoft.com/office/drawing/2014/main" id="{808C81DB-1F87-6E78-D79F-C9AC1B330FBD}"/>
+            </a:ext>
+          </a:extLst>
+        </p:cNvPr>
+        <p:cNvGrpSpPr/>
+        <p:nvPr/>
+      </p:nvGrpSpPr>
+      <p:grpSpPr>
+        <a:xfrm>
+          <a:off x="0" y="0"/>
+          <a:ext cx="0" cy="0"/>
+          <a:chOff x="0" y="0"/>
+          <a:chExt cx="0" cy="0"/>
+        </a:xfrm>
+      </p:grpSpPr>
+      <p:sp>
+        <p:nvSpPr>
+          <p:cNvPr id="449" name="Title 448">
+            <a:extLst>
+              <a:ext uri="{FF2B5EF4-FFF2-40B4-BE49-F238E27FC236}">
+                <a16:creationId xmlns:a16="http://schemas.microsoft.com/office/drawing/2014/main" id="{3CD6CC17-F17B-C7A5-3599-64B03924F598}"/>
+              </a:ext>
+            </a:extLst>
+          </p:cNvPr>
+          <p:cNvSpPr>
+            <a:spLocks noGrp="1"/>
+          </p:cNvSpPr>
+          <p:nvPr>
+            <p:ph type="title"/>
+          </p:nvPr>
+        </p:nvSpPr>
+        <p:spPr>
+          <a:xfrm>
+            <a:off x="694944" y="466347"/>
+            <a:ext cx="3545076" cy="1676960"/>
+          </a:xfrm>
+        </p:spPr>
+        <p:txBody>
+          <a:bodyPr/>
+          <a:lstStyle/>
+          <a:p>
+            <a:r>
+              <a:rPr lang="en-US" dirty="0"/>
+              <a:t>Section 6: </a:t>
+            </a:r>
+            <a:br>
+              <a:rPr lang="en-US" dirty="0"/>
+            </a:br>
+            <a:r>
+              <a:rPr lang="en-US" dirty="0"/>
+              <a:t>Step 4 - Calibrated Priors (Two Paths)</a:t>
+            </a:r>
+            <a:br>
+              <a:rPr lang="en-US" dirty="0"/>
+            </a:br>
+            <a:br>
+              <a:rPr lang="en-US" dirty="0"/>
+            </a:br>
+            <a:br>
+              <a:rPr lang="en-US" dirty="0"/>
+            </a:br>
+            <a:br>
+              <a:rPr lang="en-US" dirty="0"/>
+            </a:br>
+            <a:br>
+              <a:rPr lang="en-US" dirty="0"/>
+            </a:br>
+            <a:endParaRPr lang="en-US" dirty="0"/>
+          </a:p>
+        </p:txBody>
+      </p:sp>
+      <p:sp>
+        <p:nvSpPr>
+          <p:cNvPr id="451" name="Text Placeholder 450">
+            <a:extLst>
+              <a:ext uri="{FF2B5EF4-FFF2-40B4-BE49-F238E27FC236}">
+                <a16:creationId xmlns:a16="http://schemas.microsoft.com/office/drawing/2014/main" id="{AF0D26D8-AEA4-E042-A762-803B33C3A7B7}"/>
+              </a:ext>
+            </a:extLst>
+          </p:cNvPr>
+          <p:cNvSpPr>
+            <a:spLocks noGrp="1"/>
+          </p:cNvSpPr>
+          <p:nvPr>
+            <p:ph type="body" sz="quarter" idx="15"/>
+          </p:nvPr>
+        </p:nvSpPr>
+        <p:spPr>
+          <a:xfrm>
+            <a:off x="65930" y="4707219"/>
+            <a:ext cx="5519481" cy="1585421"/>
+          </a:xfrm>
+        </p:spPr>
+        <p:txBody>
+          <a:bodyPr/>
+          <a:lstStyle/>
+          <a:p>
+            <a:pPr algn="l"/>
+            <a:r>
+              <a:rPr lang="en-US" b="0" dirty="0"/>
+              <a:t>Hubbard emphasizes the importance of calibrated priors in </a:t>
+            </a:r>
+            <a:r>
+              <a:rPr lang="en-US" b="0" i="1" dirty="0"/>
+              <a:t>How to Measure Anything</a:t>
+            </a:r>
+            <a:r>
+              <a:rPr lang="en-US" b="0" dirty="0"/>
+              <a:t> (Chapter 5: "The Measurement Process"). The two-path approach here demonstrates both expert elicitation (Path A) and data-driven calibration (Path B) methods.</a:t>
+            </a:r>
+            <a:endParaRPr lang="en-US" dirty="0"/>
+          </a:p>
+        </p:txBody>
+      </p:sp>
+      <p:sp>
+        <p:nvSpPr>
+          <p:cNvPr id="3" name="Slide Number Placeholder 2">
+            <a:extLst>
+              <a:ext uri="{FF2B5EF4-FFF2-40B4-BE49-F238E27FC236}">
+                <a16:creationId xmlns:a16="http://schemas.microsoft.com/office/drawing/2014/main" id="{FED8B3B4-E6FD-4662-ED85-C1E922D067D8}"/>
+              </a:ext>
+            </a:extLst>
+          </p:cNvPr>
+          <p:cNvSpPr>
+            <a:spLocks noGrp="1"/>
+          </p:cNvSpPr>
+          <p:nvPr>
+            <p:ph type="sldNum" sz="quarter" idx="4"/>
+          </p:nvPr>
+        </p:nvSpPr>
+        <p:spPr>
+          <a:xfrm>
+            <a:off x="10983397" y="6433754"/>
+            <a:ext cx="531946" cy="365125"/>
+          </a:xfrm>
+        </p:spPr>
+        <p:txBody>
+          <a:bodyPr/>
+          <a:lstStyle/>
+          <a:p>
+            <a:fld id="{07165E6F-54ED-4977-A15E-D44BE7238A65}" type="slidenum">
+              <a:rPr lang="en-US" smtClean="0"/>
+              <a:pPr/>
+              <a:t>10</a:t>
+            </a:fld>
+            <a:endParaRPr lang="en-US"/>
+          </a:p>
+        </p:txBody>
+      </p:sp>
+      <p:sp>
+        <p:nvSpPr>
+          <p:cNvPr id="10" name="TextBox 9">
+            <a:extLst>
+              <a:ext uri="{FF2B5EF4-FFF2-40B4-BE49-F238E27FC236}">
+                <a16:creationId xmlns:a16="http://schemas.microsoft.com/office/drawing/2014/main" id="{A55757F6-F117-DB5F-A782-72995F7C5D20}"/>
+              </a:ext>
+            </a:extLst>
+          </p:cNvPr>
+          <p:cNvSpPr txBox="1"/>
+          <p:nvPr/>
+        </p:nvSpPr>
+        <p:spPr>
+          <a:xfrm>
+            <a:off x="380960" y="2271101"/>
+            <a:ext cx="4273510" cy="2308324"/>
+          </a:xfrm>
+          <a:prstGeom prst="rect">
+            <a:avLst/>
+          </a:prstGeom>
+          <a:noFill/>
+        </p:spPr>
+        <p:txBody>
+          <a:bodyPr wrap="square">
+            <a:spAutoFit/>
+          </a:bodyPr>
+          <a:lstStyle/>
+          <a:p>
+            <a:r>
+              <a:rPr lang="en-US" b="1" dirty="0"/>
+              <a:t>Key Insight</a:t>
+            </a:r>
+            <a:r>
+              <a:rPr lang="en-US" dirty="0"/>
+              <a:t>:</a:t>
+            </a:r>
+          </a:p>
+          <a:p>
+            <a:r>
+              <a:rPr lang="en-US" dirty="0"/>
+              <a:t>Weibull shape parameter (k) reveals failure mechanism:</a:t>
+            </a:r>
+          </a:p>
+          <a:p>
+            <a:pPr lvl="1"/>
+            <a:r>
+              <a:rPr lang="en-US" dirty="0"/>
+              <a:t>k &lt; 1: Infant mortality (decreasing hazard)</a:t>
+            </a:r>
+          </a:p>
+          <a:p>
+            <a:pPr lvl="1"/>
+            <a:r>
+              <a:rPr lang="en-US" dirty="0"/>
+              <a:t>k = 1: Random failures (constant hazard)</a:t>
+            </a:r>
+          </a:p>
+          <a:p>
+            <a:pPr lvl="1"/>
+            <a:r>
+              <a:rPr lang="en-US" dirty="0"/>
+              <a:t>k &gt; 1: Wear-out (increasing hazard</a:t>
+            </a:r>
+          </a:p>
+        </p:txBody>
+      </p:sp>
+      <p:sp>
+        <p:nvSpPr>
+          <p:cNvPr id="6" name="TextBox 5">
+            <a:extLst>
+              <a:ext uri="{FF2B5EF4-FFF2-40B4-BE49-F238E27FC236}">
+                <a16:creationId xmlns:a16="http://schemas.microsoft.com/office/drawing/2014/main" id="{855EDC02-BA05-2096-A91A-435CD20B531C}"/>
+              </a:ext>
+            </a:extLst>
+          </p:cNvPr>
+          <p:cNvSpPr txBox="1"/>
+          <p:nvPr/>
+        </p:nvSpPr>
+        <p:spPr>
+          <a:xfrm>
+            <a:off x="5565183" y="181683"/>
+            <a:ext cx="6560887" cy="6617196"/>
+          </a:xfrm>
+          <a:prstGeom prst="rect">
+            <a:avLst/>
+          </a:prstGeom>
+          <a:noFill/>
+        </p:spPr>
+        <p:txBody>
+          <a:bodyPr wrap="square">
+            <a:spAutoFit/>
+          </a:bodyPr>
+          <a:lstStyle/>
+          <a:p>
+            <a:pPr algn="l">
+              <a:spcBef>
+                <a:spcPts val="1800"/>
+              </a:spcBef>
+              <a:spcAft>
+                <a:spcPts val="1200"/>
+              </a:spcAft>
+              <a:buNone/>
+            </a:pPr>
+            <a:r>
+              <a:rPr lang="en-US" b="1" i="0" dirty="0">
+                <a:effectLst/>
+                <a:latin typeface="-apple-system"/>
+              </a:rPr>
+              <a:t>Objective - </a:t>
+            </a:r>
+            <a:r>
+              <a:rPr lang="en-US" b="0" i="0" dirty="0">
+                <a:effectLst/>
+                <a:latin typeface="-apple-system"/>
+              </a:rPr>
+              <a:t>Establish well-calibrated prior beliefs about uncertain quantities. </a:t>
+            </a:r>
+          </a:p>
+          <a:p>
+            <a:r>
+              <a:rPr lang="en-US" b="1" dirty="0"/>
+              <a:t>Path A: Expert Calibrated Prior</a:t>
+            </a:r>
+          </a:p>
+          <a:p>
+            <a:r>
+              <a:rPr lang="en-US" b="1" dirty="0"/>
+              <a:t>Process</a:t>
+            </a:r>
+            <a:r>
+              <a:rPr lang="en-US" dirty="0"/>
+              <a:t>:</a:t>
+            </a:r>
+          </a:p>
+          <a:p>
+            <a:pPr marL="342900" indent="-342900">
+              <a:buFont typeface="+mj-lt"/>
+              <a:buAutoNum type="arabicPeriod"/>
+            </a:pPr>
+            <a:r>
+              <a:rPr lang="en-US" dirty="0"/>
+              <a:t>Elicit expert's 90% confidence interval on MTBF (Mean Time Between Failures)</a:t>
+            </a:r>
+          </a:p>
+          <a:p>
+            <a:pPr marL="342900" indent="-342900">
+              <a:buFont typeface="+mj-lt"/>
+              <a:buAutoNum type="arabicPeriod"/>
+            </a:pPr>
+            <a:r>
+              <a:rPr lang="en-US" dirty="0"/>
+              <a:t>Convert to failure rate (λ = 1/MTBF) 90% CI</a:t>
+            </a:r>
+          </a:p>
+          <a:p>
+            <a:pPr marL="342900" indent="-342900">
+              <a:buFont typeface="+mj-lt"/>
+              <a:buAutoNum type="arabicPeriod"/>
+            </a:pPr>
+            <a:r>
+              <a:rPr lang="en-US" dirty="0"/>
+              <a:t>Fit Gamma distribution to match the CI</a:t>
+            </a:r>
+          </a:p>
+          <a:p>
+            <a:r>
+              <a:rPr lang="en-US" b="1" dirty="0"/>
+              <a:t>Why Gamma?</a:t>
+            </a:r>
+            <a:endParaRPr lang="en-US" dirty="0"/>
+          </a:p>
+          <a:p>
+            <a:pPr marL="285750" indent="-285750">
+              <a:buFont typeface="Arial" panose="020B0604020202020204" pitchFamily="34" charset="0"/>
+              <a:buChar char="•"/>
+            </a:pPr>
+            <a:r>
+              <a:rPr lang="en-US" dirty="0"/>
+              <a:t>Conjugate prior for Poisson failure processes</a:t>
+            </a:r>
+          </a:p>
+          <a:p>
+            <a:pPr marL="285750" indent="-285750">
+              <a:buFont typeface="Arial" panose="020B0604020202020204" pitchFamily="34" charset="0"/>
+              <a:buChar char="•"/>
+            </a:pPr>
+            <a:r>
+              <a:rPr lang="en-US" dirty="0"/>
+              <a:t>Natural for rate parameters</a:t>
+            </a:r>
+          </a:p>
+          <a:p>
+            <a:pPr marL="285750" indent="-285750">
+              <a:buFont typeface="Arial" panose="020B0604020202020204" pitchFamily="34" charset="0"/>
+              <a:buChar char="•"/>
+            </a:pPr>
+            <a:r>
+              <a:rPr lang="en-US" dirty="0"/>
+              <a:t>Flexible shape to match expert beliefs</a:t>
+            </a:r>
+          </a:p>
+          <a:p>
+            <a:pPr algn="l"/>
+            <a:endParaRPr lang="en-US" b="0" i="0" dirty="0">
+              <a:effectLst/>
+              <a:latin typeface="-apple-system"/>
+            </a:endParaRPr>
+          </a:p>
+          <a:p>
+            <a:r>
+              <a:rPr lang="en-US" b="1" dirty="0"/>
+              <a:t>Path B: Data-Fitted Prior</a:t>
+            </a:r>
+          </a:p>
+          <a:p>
+            <a:r>
+              <a:rPr lang="en-US" b="1" dirty="0"/>
+              <a:t>Process</a:t>
+            </a:r>
+            <a:r>
+              <a:rPr lang="en-US" dirty="0"/>
+              <a:t>:</a:t>
+            </a:r>
+          </a:p>
+          <a:p>
+            <a:pPr marL="342900" indent="-342900">
+              <a:buFont typeface="+mj-lt"/>
+              <a:buAutoNum type="arabicPeriod"/>
+            </a:pPr>
+            <a:r>
+              <a:rPr lang="en-US" dirty="0"/>
+              <a:t>Input observed time-to-failure (TTF) data</a:t>
+            </a:r>
+          </a:p>
+          <a:p>
+            <a:pPr marL="342900" indent="-342900">
+              <a:buFont typeface="+mj-lt"/>
+              <a:buAutoNum type="arabicPeriod"/>
+            </a:pPr>
+            <a:r>
+              <a:rPr lang="en-US" dirty="0"/>
+              <a:t>Fit descriptive distributions (Exponential/Weibull)</a:t>
+            </a:r>
+          </a:p>
+          <a:p>
+            <a:pPr marL="342900" indent="-342900">
+              <a:buFont typeface="+mj-lt"/>
+              <a:buAutoNum type="arabicPeriod"/>
+            </a:pPr>
+            <a:r>
+              <a:rPr lang="en-US" dirty="0"/>
+              <a:t>Derive Gamma prior via conjugate update from flat prior</a:t>
+            </a:r>
+          </a:p>
+          <a:p>
+            <a:pPr marL="342900" indent="-342900">
+              <a:buFont typeface="+mj-lt"/>
+              <a:buAutoNum type="arabicPeriod"/>
+            </a:pPr>
+            <a:endParaRPr lang="en-US" dirty="0"/>
+          </a:p>
+          <a:p>
+            <a:r>
+              <a:rPr lang="en-US" b="1" dirty="0"/>
+              <a:t>Comparison</a:t>
+            </a:r>
+          </a:p>
+          <a:p>
+            <a:r>
+              <a:rPr lang="en-US" dirty="0"/>
+              <a:t>Both paths produce Gamma priors on failure rate λ that compete in the three-way sensitivity analysis.</a:t>
+            </a:r>
+          </a:p>
+          <a:p>
+            <a:pPr algn="l">
+              <a:buFont typeface="Arial" panose="020B0604020202020204" pitchFamily="34" charset="0"/>
+              <a:buChar char="•"/>
+            </a:pPr>
+            <a:endParaRPr lang="en-US" b="0" i="0" dirty="0">
+              <a:effectLst/>
+              <a:latin typeface="-apple-system"/>
+            </a:endParaRPr>
+          </a:p>
+        </p:txBody>
+      </p:sp>
+      <p:sp>
+        <p:nvSpPr>
+          <p:cNvPr id="14" name="BJPseudoFooter">
+            <a:extLst>
+              <a:ext uri="{FF2B5EF4-FFF2-40B4-BE49-F238E27FC236}">
+                <a16:creationId xmlns:a16="http://schemas.microsoft.com/office/drawing/2014/main" id="{8CD4DB4A-AACD-15A5-51F6-29CC8D314CD5}"/>
+              </a:ext>
+            </a:extLst>
+          </p:cNvPr>
+          <p:cNvSpPr txBox="1"/>
+          <p:nvPr>
+            <p:custDataLst>
+              <p:tags r:id="rId1"/>
+            </p:custDataLst>
+          </p:nvPr>
+        </p:nvSpPr>
+        <p:spPr>
+          <a:xfrm>
+            <a:off x="3963044" y="6519446"/>
+            <a:ext cx="4265911" cy="338554"/>
+          </a:xfrm>
+          <a:prstGeom prst="rect">
+            <a:avLst/>
+          </a:prstGeom>
+          <a:noFill/>
+        </p:spPr>
+        <p:txBody>
+          <a:bodyPr vert="horz" wrap="none" rtlCol="0">
+            <a:spAutoFit/>
+          </a:bodyPr>
+          <a:lstStyle/>
+          <a:p>
+            <a:pPr algn="ctr"/>
+            <a:r>
+              <a:rPr lang="en-US" sz="800">
+                <a:solidFill>
+                  <a:srgbClr val="000000"/>
+                </a:solidFill>
+              </a:rPr>
+              <a:t>RTX Corporation (Corporate) - Company Use
+This document does not contain any export controlled technical material/data/information.</a:t>
+            </a:r>
+          </a:p>
+        </p:txBody>
+      </p:sp>
+    </p:spTree>
+    <p:extLst>
+      <p:ext uri="{BB962C8B-B14F-4D97-AF65-F5344CB8AC3E}">
+        <p14:creationId xmlns:p14="http://schemas.microsoft.com/office/powerpoint/2010/main" val="721752110"/>
+      </p:ext>
+    </p:extLst>
+  </p:cSld>
+  <p:clrMapOvr>
+    <a:masterClrMapping/>
+  </p:clrMapOvr>
+</p:sld>
+</file>
+
+<file path=ppt/slides/slide11.xml><?xml version="1.0" encoding="utf-8"?>
+<p:sld xmlns:a="http://schemas.openxmlformats.org/drawingml/2006/main" xmlns:r="http://schemas.openxmlformats.org/officeDocument/2006/relationships" xmlns:p="http://schemas.openxmlformats.org/presentationml/2006/main">
+  <p:cSld>
+    <p:spTree>
+      <p:nvGrpSpPr>
+        <p:cNvPr id="1" name="">
+          <a:extLst>
+            <a:ext uri="{FF2B5EF4-FFF2-40B4-BE49-F238E27FC236}">
+              <a16:creationId xmlns:a16="http://schemas.microsoft.com/office/drawing/2014/main" id="{04B45F52-E666-CD91-99EC-90583DB3B1EA}"/>
+            </a:ext>
+          </a:extLst>
+        </p:cNvPr>
+        <p:cNvGrpSpPr/>
+        <p:nvPr/>
+      </p:nvGrpSpPr>
+      <p:grpSpPr>
+        <a:xfrm>
+          <a:off x="0" y="0"/>
+          <a:ext cx="0" cy="0"/>
+          <a:chOff x="0" y="0"/>
+          <a:chExt cx="0" cy="0"/>
+        </a:xfrm>
+      </p:grpSpPr>
+      <p:sp>
+        <p:nvSpPr>
+          <p:cNvPr id="449" name="Title 448">
+            <a:extLst>
+              <a:ext uri="{FF2B5EF4-FFF2-40B4-BE49-F238E27FC236}">
+                <a16:creationId xmlns:a16="http://schemas.microsoft.com/office/drawing/2014/main" id="{41BDB8C3-9494-3161-A87F-DE2C0A3CB673}"/>
+              </a:ext>
+            </a:extLst>
+          </p:cNvPr>
+          <p:cNvSpPr>
+            <a:spLocks noGrp="1"/>
+          </p:cNvSpPr>
+          <p:nvPr>
+            <p:ph type="title"/>
+          </p:nvPr>
+        </p:nvSpPr>
+        <p:spPr>
+          <a:xfrm>
+            <a:off x="694944" y="466347"/>
+            <a:ext cx="3545076" cy="1676960"/>
+          </a:xfrm>
+        </p:spPr>
+        <p:txBody>
+          <a:bodyPr/>
+          <a:lstStyle/>
+          <a:p>
+            <a:r>
+              <a:rPr lang="en-US" dirty="0"/>
+              <a:t>Section 6: </a:t>
+            </a:r>
+            <a:br>
+              <a:rPr lang="en-US" dirty="0"/>
+            </a:br>
+            <a:r>
+              <a:rPr lang="en-US" dirty="0"/>
+              <a:t>Step 4 - Calibrated Priors (Plots Explained)</a:t>
+            </a:r>
+            <a:br>
+              <a:rPr lang="en-US" dirty="0"/>
+            </a:br>
+            <a:br>
+              <a:rPr lang="en-US" dirty="0"/>
+            </a:br>
+            <a:br>
+              <a:rPr lang="en-US" dirty="0"/>
+            </a:br>
+            <a:br>
+              <a:rPr lang="en-US" dirty="0"/>
+            </a:br>
+            <a:br>
+              <a:rPr lang="en-US" dirty="0"/>
+            </a:br>
+            <a:endParaRPr lang="en-US" dirty="0"/>
+          </a:p>
+        </p:txBody>
+      </p:sp>
+      <p:sp>
+        <p:nvSpPr>
+          <p:cNvPr id="451" name="Text Placeholder 450">
+            <a:extLst>
+              <a:ext uri="{FF2B5EF4-FFF2-40B4-BE49-F238E27FC236}">
+                <a16:creationId xmlns:a16="http://schemas.microsoft.com/office/drawing/2014/main" id="{5D97881E-4D97-52BF-8E52-799E7A0DF576}"/>
+              </a:ext>
+            </a:extLst>
+          </p:cNvPr>
+          <p:cNvSpPr>
+            <a:spLocks noGrp="1"/>
+          </p:cNvSpPr>
+          <p:nvPr>
+            <p:ph type="body" sz="quarter" idx="15"/>
+          </p:nvPr>
+        </p:nvSpPr>
+        <p:spPr>
+          <a:xfrm>
+            <a:off x="65930" y="5480110"/>
+            <a:ext cx="5519481" cy="812530"/>
+          </a:xfrm>
+        </p:spPr>
+        <p:txBody>
+          <a:bodyPr/>
+          <a:lstStyle/>
+          <a:p>
+            <a:pPr algn="l"/>
+            <a:r>
+              <a:rPr lang="en-US" b="0" dirty="0"/>
+              <a:t>The two-path approach here demonstrates both expert elicitation (Path A) and data-driven calibration (Path B) methods.</a:t>
+            </a:r>
+            <a:endParaRPr lang="en-US" dirty="0"/>
+          </a:p>
+        </p:txBody>
+      </p:sp>
+      <p:sp>
+        <p:nvSpPr>
+          <p:cNvPr id="3" name="Slide Number Placeholder 2">
+            <a:extLst>
+              <a:ext uri="{FF2B5EF4-FFF2-40B4-BE49-F238E27FC236}">
+                <a16:creationId xmlns:a16="http://schemas.microsoft.com/office/drawing/2014/main" id="{E80CE80A-A5A9-B734-FE73-C0452D516704}"/>
+              </a:ext>
+            </a:extLst>
+          </p:cNvPr>
+          <p:cNvSpPr>
+            <a:spLocks noGrp="1"/>
+          </p:cNvSpPr>
+          <p:nvPr>
+            <p:ph type="sldNum" sz="quarter" idx="4"/>
+          </p:nvPr>
+        </p:nvSpPr>
+        <p:spPr>
+          <a:xfrm>
+            <a:off x="10983397" y="6433754"/>
+            <a:ext cx="531946" cy="365125"/>
+          </a:xfrm>
+        </p:spPr>
+        <p:txBody>
+          <a:bodyPr/>
+          <a:lstStyle/>
+          <a:p>
+            <a:fld id="{07165E6F-54ED-4977-A15E-D44BE7238A65}" type="slidenum">
+              <a:rPr lang="en-US" smtClean="0"/>
+              <a:pPr/>
+              <a:t>11</a:t>
+            </a:fld>
+            <a:endParaRPr lang="en-US"/>
+          </a:p>
+        </p:txBody>
+      </p:sp>
+      <p:sp>
+        <p:nvSpPr>
+          <p:cNvPr id="10" name="TextBox 9">
+            <a:extLst>
+              <a:ext uri="{FF2B5EF4-FFF2-40B4-BE49-F238E27FC236}">
+                <a16:creationId xmlns:a16="http://schemas.microsoft.com/office/drawing/2014/main" id="{DA59BC0F-86CA-279A-6D00-0C74EE81C0FF}"/>
+              </a:ext>
+            </a:extLst>
+          </p:cNvPr>
+          <p:cNvSpPr txBox="1"/>
+          <p:nvPr/>
+        </p:nvSpPr>
+        <p:spPr>
+          <a:xfrm>
+            <a:off x="330727" y="2103549"/>
+            <a:ext cx="4273510" cy="3416320"/>
+          </a:xfrm>
+          <a:prstGeom prst="rect">
+            <a:avLst/>
+          </a:prstGeom>
+          <a:noFill/>
+        </p:spPr>
+        <p:txBody>
+          <a:bodyPr wrap="square">
+            <a:spAutoFit/>
+          </a:bodyPr>
+          <a:lstStyle/>
+          <a:p>
+            <a:r>
+              <a:rPr lang="en-US" b="1" dirty="0"/>
+              <a:t>Key Insight</a:t>
+            </a:r>
+            <a:r>
+              <a:rPr lang="en-US" dirty="0"/>
+              <a:t>:</a:t>
+            </a:r>
+          </a:p>
+          <a:p>
+            <a:r>
+              <a:rPr lang="en-US" dirty="0"/>
+              <a:t>The spread between these three curves is the Section 7 "prior sensitivity" story — if they cluster tightly, the data dominates and it doesn't matter much what prior you started with. If they're spread apart, your starting belief significantly drives the conclusion. </a:t>
+            </a:r>
+          </a:p>
+          <a:p>
+            <a:r>
+              <a:rPr lang="en-US" dirty="0"/>
+              <a:t>- Our 3 failures in 24 months from section 3 was our starting knowledge. Now we have new actual TTF data in path by to use.</a:t>
+            </a:r>
+          </a:p>
+        </p:txBody>
+      </p:sp>
+      <p:sp>
+        <p:nvSpPr>
+          <p:cNvPr id="6" name="TextBox 5">
+            <a:extLst>
+              <a:ext uri="{FF2B5EF4-FFF2-40B4-BE49-F238E27FC236}">
+                <a16:creationId xmlns:a16="http://schemas.microsoft.com/office/drawing/2014/main" id="{0CE886DE-00C8-2276-E626-6AB1630D71D2}"/>
+              </a:ext>
+            </a:extLst>
+          </p:cNvPr>
+          <p:cNvSpPr txBox="1"/>
+          <p:nvPr/>
+        </p:nvSpPr>
+        <p:spPr>
+          <a:xfrm>
+            <a:off x="5565183" y="181683"/>
+            <a:ext cx="6560887" cy="5909310"/>
+          </a:xfrm>
+          <a:prstGeom prst="rect">
+            <a:avLst/>
+          </a:prstGeom>
+          <a:noFill/>
+        </p:spPr>
+        <p:txBody>
+          <a:bodyPr wrap="square">
+            <a:spAutoFit/>
+          </a:bodyPr>
+          <a:lstStyle/>
+          <a:p>
+            <a:r>
+              <a:rPr lang="en-US" b="1" dirty="0"/>
+              <a:t>Let Panel Plot</a:t>
+            </a:r>
+          </a:p>
+          <a:p>
+            <a:r>
+              <a:rPr lang="en-US" b="1" dirty="0"/>
+              <a:t>Expert Prior (blue dashed) — </a:t>
+            </a:r>
+            <a:r>
+              <a:rPr lang="en-US" dirty="0"/>
+              <a:t>This is what the SME believed about λ before looking at any failure data. It's fitted purely from the MTBF 90% CI entered in Section 3 (e.g., "I'm 90% confident MTBF is between 9 and 14 months"). It answers: what does our engineering knowledge alone say about how fast this pump fails?</a:t>
+            </a:r>
+          </a:p>
+          <a:p>
+            <a:r>
+              <a:rPr lang="en-US" b="1" dirty="0"/>
+              <a:t>Data Prior/conjugate (purple dotted) — </a:t>
+            </a:r>
+            <a:r>
+              <a:rPr lang="en-US" dirty="0"/>
+              <a:t>This is what the observed TTF data alone implies about λ, with no expert input. It uses the conjugate update: if you saw n time-to-failure observations totaling T months of exposure, the posterior from a flat (uninformative) prior is Gamma(n, T). It answers: what does the raw failure timing data say, with zero prior assumptions?</a:t>
+            </a:r>
+          </a:p>
+          <a:p>
+            <a:r>
+              <a:rPr lang="en-US" b="1" dirty="0"/>
+              <a:t>Expert Posterior (green shaded) — </a:t>
+            </a:r>
+            <a:r>
+              <a:rPr lang="en-US" dirty="0"/>
+              <a:t>This is the Bayesian update: the Expert Prior multiplied by the likelihood of the observed failure count (k failures in t months). It's computed analytically via Gamma-Poisson conjugacy as Gamma(α_expert + k, β_expert + t). It answers: what do we believe about λ after combining our engineering knowledge with the observed failure count?</a:t>
+            </a:r>
+            <a:endParaRPr lang="en-US" i="0" dirty="0">
+              <a:effectLst/>
+              <a:latin typeface="-apple-system"/>
+            </a:endParaRPr>
+          </a:p>
+        </p:txBody>
+      </p:sp>
+      <p:sp>
+        <p:nvSpPr>
+          <p:cNvPr id="14" name="BJPseudoFooter">
+            <a:extLst>
+              <a:ext uri="{FF2B5EF4-FFF2-40B4-BE49-F238E27FC236}">
+                <a16:creationId xmlns:a16="http://schemas.microsoft.com/office/drawing/2014/main" id="{DDCD2EF1-AAA1-32CB-A05D-D2D81DAB2EA7}"/>
+              </a:ext>
+            </a:extLst>
+          </p:cNvPr>
+          <p:cNvSpPr txBox="1"/>
+          <p:nvPr>
+            <p:custDataLst>
+              <p:tags r:id="rId1"/>
+            </p:custDataLst>
+          </p:nvPr>
+        </p:nvSpPr>
+        <p:spPr>
+          <a:xfrm>
+            <a:off x="3963044" y="6519446"/>
+            <a:ext cx="4265911" cy="338554"/>
+          </a:xfrm>
+          <a:prstGeom prst="rect">
+            <a:avLst/>
+          </a:prstGeom>
+          <a:noFill/>
+        </p:spPr>
+        <p:txBody>
+          <a:bodyPr vert="horz" wrap="none" rtlCol="0">
+            <a:spAutoFit/>
+          </a:bodyPr>
+          <a:lstStyle/>
+          <a:p>
+            <a:pPr algn="ctr"/>
+            <a:r>
+              <a:rPr lang="en-US" sz="800">
+                <a:solidFill>
+                  <a:srgbClr val="000000"/>
+                </a:solidFill>
+              </a:rPr>
+              <a:t>RTX Corporation (Corporate) - Company Use
+This document does not contain any export controlled technical material/data/information.</a:t>
+            </a:r>
+          </a:p>
+        </p:txBody>
+      </p:sp>
+    </p:spTree>
+    <p:extLst>
+      <p:ext uri="{BB962C8B-B14F-4D97-AF65-F5344CB8AC3E}">
+        <p14:creationId xmlns:p14="http://schemas.microsoft.com/office/powerpoint/2010/main" val="1361469298"/>
+      </p:ext>
+    </p:extLst>
+  </p:cSld>
+  <p:clrMapOvr>
+    <a:masterClrMapping/>
+  </p:clrMapOvr>
+</p:sld>
+</file>
+
+<file path=ppt/slides/slide12.xml><?xml version="1.0" encoding="utf-8"?>
+<p:sld xmlns:a="http://schemas.openxmlformats.org/drawingml/2006/main" xmlns:r="http://schemas.openxmlformats.org/officeDocument/2006/relationships" xmlns:p="http://schemas.openxmlformats.org/presentationml/2006/main">
+  <p:cSld>
+    <p:spTree>
+      <p:nvGrpSpPr>
+        <p:cNvPr id="1" name="">
+          <a:extLst>
+            <a:ext uri="{FF2B5EF4-FFF2-40B4-BE49-F238E27FC236}">
+              <a16:creationId xmlns:a16="http://schemas.microsoft.com/office/drawing/2014/main" id="{FCE9DBA1-73AB-4664-7DB4-DB8CDA47E258}"/>
+            </a:ext>
+          </a:extLst>
+        </p:cNvPr>
+        <p:cNvGrpSpPr/>
+        <p:nvPr/>
+      </p:nvGrpSpPr>
+      <p:grpSpPr>
+        <a:xfrm>
+          <a:off x="0" y="0"/>
+          <a:ext cx="0" cy="0"/>
+          <a:chOff x="0" y="0"/>
+          <a:chExt cx="0" cy="0"/>
+        </a:xfrm>
+      </p:grpSpPr>
+      <p:sp>
+        <p:nvSpPr>
+          <p:cNvPr id="449" name="Title 448">
+            <a:extLst>
+              <a:ext uri="{FF2B5EF4-FFF2-40B4-BE49-F238E27FC236}">
+                <a16:creationId xmlns:a16="http://schemas.microsoft.com/office/drawing/2014/main" id="{BCED33DE-007D-90A1-1EA9-C3F3A25F4E19}"/>
+              </a:ext>
+            </a:extLst>
+          </p:cNvPr>
+          <p:cNvSpPr>
+            <a:spLocks noGrp="1"/>
+          </p:cNvSpPr>
+          <p:nvPr>
+            <p:ph type="title"/>
+          </p:nvPr>
+        </p:nvSpPr>
+        <p:spPr>
+          <a:xfrm>
+            <a:off x="694944" y="466347"/>
+            <a:ext cx="3545076" cy="1676960"/>
+          </a:xfrm>
+        </p:spPr>
+        <p:txBody>
+          <a:bodyPr/>
+          <a:lstStyle/>
+          <a:p>
+            <a:r>
+              <a:rPr lang="en-US" dirty="0"/>
+              <a:t>Section 6: </a:t>
+            </a:r>
+            <a:br>
+              <a:rPr lang="en-US" dirty="0"/>
+            </a:br>
+            <a:r>
+              <a:rPr lang="en-US" dirty="0"/>
+              <a:t>Step 4 - Calibrated Priors (Plots Explained)</a:t>
+            </a:r>
+            <a:br>
+              <a:rPr lang="en-US" dirty="0"/>
+            </a:br>
+            <a:br>
+              <a:rPr lang="en-US" dirty="0"/>
+            </a:br>
+            <a:br>
+              <a:rPr lang="en-US" dirty="0"/>
+            </a:br>
+            <a:br>
+              <a:rPr lang="en-US" dirty="0"/>
+            </a:br>
+            <a:br>
+              <a:rPr lang="en-US" dirty="0"/>
+            </a:br>
+            <a:endParaRPr lang="en-US" dirty="0"/>
+          </a:p>
+        </p:txBody>
+      </p:sp>
+      <p:sp>
+        <p:nvSpPr>
+          <p:cNvPr id="451" name="Text Placeholder 450">
+            <a:extLst>
+              <a:ext uri="{FF2B5EF4-FFF2-40B4-BE49-F238E27FC236}">
+                <a16:creationId xmlns:a16="http://schemas.microsoft.com/office/drawing/2014/main" id="{B10ACBC5-FD4A-5650-6E05-5C740EC88F30}"/>
+              </a:ext>
+            </a:extLst>
+          </p:cNvPr>
+          <p:cNvSpPr>
+            <a:spLocks noGrp="1"/>
+          </p:cNvSpPr>
+          <p:nvPr>
+            <p:ph type="body" sz="quarter" idx="15"/>
+          </p:nvPr>
+        </p:nvSpPr>
+        <p:spPr>
+          <a:xfrm>
+            <a:off x="65930" y="5480110"/>
+            <a:ext cx="5519481" cy="812530"/>
+          </a:xfrm>
+        </p:spPr>
+        <p:txBody>
+          <a:bodyPr/>
+          <a:lstStyle/>
+          <a:p>
+            <a:pPr algn="l"/>
+            <a:r>
+              <a:rPr lang="en-US" b="0" dirty="0"/>
+              <a:t>The two-path approach here demonstrates both expert elicitation (Path A) and data-driven calibration (Path B) methods.</a:t>
+            </a:r>
+            <a:endParaRPr lang="en-US" dirty="0"/>
+          </a:p>
+        </p:txBody>
+      </p:sp>
+      <p:sp>
+        <p:nvSpPr>
+          <p:cNvPr id="3" name="Slide Number Placeholder 2">
+            <a:extLst>
+              <a:ext uri="{FF2B5EF4-FFF2-40B4-BE49-F238E27FC236}">
+                <a16:creationId xmlns:a16="http://schemas.microsoft.com/office/drawing/2014/main" id="{62551EDA-2FF7-4A86-F569-7746EA3023DE}"/>
+              </a:ext>
+            </a:extLst>
+          </p:cNvPr>
+          <p:cNvSpPr>
+            <a:spLocks noGrp="1"/>
+          </p:cNvSpPr>
+          <p:nvPr>
+            <p:ph type="sldNum" sz="quarter" idx="4"/>
+          </p:nvPr>
+        </p:nvSpPr>
+        <p:spPr>
+          <a:xfrm>
+            <a:off x="10983397" y="6433754"/>
+            <a:ext cx="531946" cy="365125"/>
+          </a:xfrm>
+        </p:spPr>
+        <p:txBody>
+          <a:bodyPr/>
+          <a:lstStyle/>
+          <a:p>
+            <a:fld id="{07165E6F-54ED-4977-A15E-D44BE7238A65}" type="slidenum">
+              <a:rPr lang="en-US" smtClean="0"/>
+              <a:pPr/>
+              <a:t>12</a:t>
+            </a:fld>
+            <a:endParaRPr lang="en-US"/>
+          </a:p>
+        </p:txBody>
+      </p:sp>
+      <p:sp>
+        <p:nvSpPr>
+          <p:cNvPr id="10" name="TextBox 9">
+            <a:extLst>
+              <a:ext uri="{FF2B5EF4-FFF2-40B4-BE49-F238E27FC236}">
+                <a16:creationId xmlns:a16="http://schemas.microsoft.com/office/drawing/2014/main" id="{F89CF0FA-CC75-5A57-F49B-B6BB789A0257}"/>
+              </a:ext>
+            </a:extLst>
+          </p:cNvPr>
+          <p:cNvSpPr txBox="1"/>
+          <p:nvPr/>
+        </p:nvSpPr>
+        <p:spPr>
+          <a:xfrm>
+            <a:off x="380960" y="2271101"/>
+            <a:ext cx="4273510" cy="2308324"/>
+          </a:xfrm>
+          <a:prstGeom prst="rect">
+            <a:avLst/>
+          </a:prstGeom>
+          <a:noFill/>
+        </p:spPr>
+        <p:txBody>
+          <a:bodyPr wrap="square">
+            <a:spAutoFit/>
+          </a:bodyPr>
+          <a:lstStyle/>
+          <a:p>
+            <a:r>
+              <a:rPr lang="en-US" b="1" dirty="0"/>
+              <a:t>Key Insight</a:t>
+            </a:r>
+            <a:r>
+              <a:rPr lang="en-US" dirty="0"/>
+              <a:t>:</a:t>
+            </a:r>
+          </a:p>
+          <a:p>
+            <a:r>
+              <a:rPr lang="en-US" dirty="0"/>
+              <a:t>So the right panel tells you </a:t>
+            </a:r>
+            <a:r>
+              <a:rPr lang="en-US" i="1" dirty="0"/>
+              <a:t>whether the physics of failure supports PM as a strategy</a:t>
+            </a:r>
+            <a:r>
+              <a:rPr lang="en-US" dirty="0"/>
+              <a:t> — independent of cost calculations. If the data shows k &gt; 1, that's evidence that an aging mechanism exists and PM interventions have mechanical justification.</a:t>
+            </a:r>
+          </a:p>
+        </p:txBody>
+      </p:sp>
+      <p:sp>
+        <p:nvSpPr>
+          <p:cNvPr id="6" name="TextBox 5">
+            <a:extLst>
+              <a:ext uri="{FF2B5EF4-FFF2-40B4-BE49-F238E27FC236}">
+                <a16:creationId xmlns:a16="http://schemas.microsoft.com/office/drawing/2014/main" id="{B9044DF2-7FA0-79FE-30BC-C7A69245DCF2}"/>
+              </a:ext>
+            </a:extLst>
+          </p:cNvPr>
+          <p:cNvSpPr txBox="1"/>
+          <p:nvPr/>
+        </p:nvSpPr>
+        <p:spPr>
+          <a:xfrm>
+            <a:off x="5565183" y="181683"/>
+            <a:ext cx="6560887" cy="3970318"/>
+          </a:xfrm>
+          <a:prstGeom prst="rect">
+            <a:avLst/>
+          </a:prstGeom>
+          <a:noFill/>
+        </p:spPr>
+        <p:txBody>
+          <a:bodyPr wrap="square">
+            <a:spAutoFit/>
+          </a:bodyPr>
+          <a:lstStyle/>
+          <a:p>
+            <a:r>
+              <a:rPr lang="en-US" b="1" dirty="0"/>
+              <a:t>Right Panel Plot</a:t>
+            </a:r>
+          </a:p>
+          <a:p>
+            <a:endParaRPr lang="en-US" b="1" dirty="0"/>
+          </a:p>
+          <a:p>
+            <a:r>
+              <a:rPr lang="en-US" b="1" dirty="0"/>
+              <a:t>This plots the raw TTF histogram with two descriptive fits: </a:t>
+            </a:r>
+          </a:p>
+          <a:p>
+            <a:pPr marL="285750" indent="-285750">
+              <a:buFont typeface="Arial" panose="020B0604020202020204" pitchFamily="34" charset="0"/>
+              <a:buChar char="•"/>
+            </a:pPr>
+            <a:r>
+              <a:rPr lang="en-US" b="1" dirty="0"/>
+              <a:t>Weibull (red)</a:t>
+            </a:r>
+            <a:r>
+              <a:rPr lang="en-US" dirty="0"/>
+              <a:t> — flexible, captures aging behavior</a:t>
+            </a:r>
+          </a:p>
+          <a:p>
+            <a:pPr marL="285750" indent="-285750">
+              <a:buFont typeface="Arial" panose="020B0604020202020204" pitchFamily="34" charset="0"/>
+              <a:buChar char="•"/>
+            </a:pPr>
+            <a:r>
+              <a:rPr lang="en-US" b="1" dirty="0"/>
+              <a:t>Exponential (black dashed)</a:t>
+            </a:r>
+            <a:r>
+              <a:rPr lang="en-US" dirty="0"/>
+              <a:t> — the memoryless baseline</a:t>
+            </a:r>
+          </a:p>
+          <a:p>
+            <a:pPr marL="285750" indent="-285750">
+              <a:buFont typeface="Arial" panose="020B0604020202020204" pitchFamily="34" charset="0"/>
+              <a:buChar char="•"/>
+            </a:pPr>
+            <a:endParaRPr lang="en-US" dirty="0"/>
+          </a:p>
+          <a:p>
+            <a:r>
+              <a:rPr lang="en-US" dirty="0"/>
+              <a:t>The key number is </a:t>
+            </a:r>
+            <a:r>
+              <a:rPr lang="en-US" b="1" dirty="0"/>
+              <a:t>Weibull shape k</a:t>
+            </a:r>
+            <a:r>
+              <a:rPr lang="en-US" dirty="0"/>
+              <a:t>:</a:t>
+            </a:r>
+          </a:p>
+          <a:p>
+            <a:pPr marL="285750" indent="-285750">
+              <a:buFont typeface="Arial" panose="020B0604020202020204" pitchFamily="34" charset="0"/>
+              <a:buChar char="•"/>
+            </a:pPr>
+            <a:r>
+              <a:rPr lang="en-US" b="1" dirty="0"/>
+              <a:t>k &lt; 1</a:t>
+            </a:r>
+            <a:r>
+              <a:rPr lang="en-US" dirty="0"/>
+              <a:t> → hazard rate </a:t>
+            </a:r>
+            <a:r>
+              <a:rPr lang="en-US" i="1" dirty="0"/>
+              <a:t>decreases</a:t>
+            </a:r>
+            <a:r>
+              <a:rPr lang="en-US" dirty="0"/>
+              <a:t> with age (infant mortality — early defects burning in; PM doesn't help much)</a:t>
+            </a:r>
+          </a:p>
+          <a:p>
+            <a:pPr marL="285750" indent="-285750">
+              <a:buFont typeface="Arial" panose="020B0604020202020204" pitchFamily="34" charset="0"/>
+              <a:buChar char="•"/>
+            </a:pPr>
+            <a:r>
+              <a:rPr lang="en-US" b="1" dirty="0"/>
+              <a:t>k = 1</a:t>
+            </a:r>
+            <a:r>
+              <a:rPr lang="en-US" dirty="0"/>
+              <a:t> → constant hazard (random failures; PM provides no age-related benefit)</a:t>
+            </a:r>
+          </a:p>
+          <a:p>
+            <a:pPr marL="285750" indent="-285750">
+              <a:buFont typeface="Arial" panose="020B0604020202020204" pitchFamily="34" charset="0"/>
+              <a:buChar char="•"/>
+            </a:pPr>
+            <a:r>
+              <a:rPr lang="en-US" b="1" dirty="0"/>
+              <a:t>k &gt; 1</a:t>
+            </a:r>
+            <a:r>
+              <a:rPr lang="en-US" dirty="0"/>
+              <a:t> → hazard rate </a:t>
+            </a:r>
+            <a:r>
+              <a:rPr lang="en-US" i="1" dirty="0"/>
+              <a:t>increases</a:t>
+            </a:r>
+            <a:r>
+              <a:rPr lang="en-US" dirty="0"/>
+              <a:t> with age (wear-out; </a:t>
+            </a:r>
+            <a:r>
+              <a:rPr lang="en-US" b="1" dirty="0"/>
+              <a:t>this is where PM genuinely helps</a:t>
+            </a:r>
+            <a:r>
+              <a:rPr lang="en-US" dirty="0"/>
+              <a:t> by resetting the clock)</a:t>
+            </a:r>
+          </a:p>
+          <a:p>
+            <a:pPr marL="285750" indent="-285750">
+              <a:buFont typeface="Arial" panose="020B0604020202020204" pitchFamily="34" charset="0"/>
+              <a:buChar char="•"/>
+            </a:pPr>
+            <a:endParaRPr lang="en-US" dirty="0"/>
+          </a:p>
+        </p:txBody>
+      </p:sp>
+      <p:sp>
+        <p:nvSpPr>
+          <p:cNvPr id="14" name="BJPseudoFooter">
+            <a:extLst>
+              <a:ext uri="{FF2B5EF4-FFF2-40B4-BE49-F238E27FC236}">
+                <a16:creationId xmlns:a16="http://schemas.microsoft.com/office/drawing/2014/main" id="{E4E691AF-D552-8EBC-320E-E90FB19060AC}"/>
+              </a:ext>
+            </a:extLst>
+          </p:cNvPr>
+          <p:cNvSpPr txBox="1"/>
+          <p:nvPr>
+            <p:custDataLst>
+              <p:tags r:id="rId1"/>
+            </p:custDataLst>
+          </p:nvPr>
+        </p:nvSpPr>
+        <p:spPr>
+          <a:xfrm>
+            <a:off x="3963044" y="6519446"/>
+            <a:ext cx="4265911" cy="338554"/>
+          </a:xfrm>
+          <a:prstGeom prst="rect">
+            <a:avLst/>
+          </a:prstGeom>
+          <a:noFill/>
+        </p:spPr>
+        <p:txBody>
+          <a:bodyPr vert="horz" wrap="none" rtlCol="0">
+            <a:spAutoFit/>
+          </a:bodyPr>
+          <a:lstStyle/>
+          <a:p>
+            <a:pPr algn="ctr"/>
+            <a:r>
+              <a:rPr lang="en-US" sz="800">
+                <a:solidFill>
+                  <a:srgbClr val="000000"/>
+                </a:solidFill>
+              </a:rPr>
+              <a:t>RTX Corporation (Corporate) - Company Use
+This document does not contain any export controlled technical material/data/information.</a:t>
+            </a:r>
+          </a:p>
+        </p:txBody>
+      </p:sp>
+    </p:spTree>
+    <p:extLst>
+      <p:ext uri="{BB962C8B-B14F-4D97-AF65-F5344CB8AC3E}">
+        <p14:creationId xmlns:p14="http://schemas.microsoft.com/office/powerpoint/2010/main" val="3508820725"/>
+      </p:ext>
+    </p:extLst>
+  </p:cSld>
+  <p:clrMapOvr>
+    <a:masterClrMapping/>
+  </p:clrMapOvr>
+</p:sld>
+</file>
+
+<file path=ppt/slides/slide13.xml><?xml version="1.0" encoding="utf-8"?>
+<p:sld xmlns:a="http://schemas.openxmlformats.org/drawingml/2006/main" xmlns:r="http://schemas.openxmlformats.org/officeDocument/2006/relationships" xmlns:p="http://schemas.openxmlformats.org/presentationml/2006/main">
+  <p:cSld>
+    <p:spTree>
+      <p:nvGrpSpPr>
+        <p:cNvPr id="1" name="">
+          <a:extLst>
+            <a:ext uri="{FF2B5EF4-FFF2-40B4-BE49-F238E27FC236}">
+              <a16:creationId xmlns:a16="http://schemas.microsoft.com/office/drawing/2014/main" id="{BD8E041F-4019-1239-F2A0-01F62665334C}"/>
+            </a:ext>
+          </a:extLst>
+        </p:cNvPr>
+        <p:cNvGrpSpPr/>
+        <p:nvPr/>
+      </p:nvGrpSpPr>
+      <p:grpSpPr>
+        <a:xfrm>
+          <a:off x="0" y="0"/>
+          <a:ext cx="0" cy="0"/>
+          <a:chOff x="0" y="0"/>
+          <a:chExt cx="0" cy="0"/>
+        </a:xfrm>
+      </p:grpSpPr>
+      <p:sp>
+        <p:nvSpPr>
+          <p:cNvPr id="449" name="Title 448">
+            <a:extLst>
+              <a:ext uri="{FF2B5EF4-FFF2-40B4-BE49-F238E27FC236}">
+                <a16:creationId xmlns:a16="http://schemas.microsoft.com/office/drawing/2014/main" id="{AB03D632-4031-3FCF-EB35-D744F0A6FB68}"/>
+              </a:ext>
+            </a:extLst>
+          </p:cNvPr>
+          <p:cNvSpPr>
+            <a:spLocks noGrp="1"/>
+          </p:cNvSpPr>
+          <p:nvPr>
+            <p:ph type="title"/>
+          </p:nvPr>
+        </p:nvSpPr>
+        <p:spPr>
+          <a:xfrm>
+            <a:off x="694944" y="466347"/>
+            <a:ext cx="3545076" cy="1676960"/>
+          </a:xfrm>
+        </p:spPr>
+        <p:txBody>
+          <a:bodyPr/>
+          <a:lstStyle/>
+          <a:p>
+            <a:r>
+              <a:rPr lang="en-US" dirty="0"/>
+              <a:t>Section 6: </a:t>
+            </a:r>
+            <a:br>
+              <a:rPr lang="en-US" dirty="0"/>
+            </a:br>
+            <a:r>
+              <a:rPr lang="en-US" dirty="0"/>
+              <a:t>Step 4 - Calibrated Priors (Exploration)</a:t>
+            </a:r>
+            <a:br>
+              <a:rPr lang="en-US" dirty="0"/>
+            </a:br>
+            <a:br>
+              <a:rPr lang="en-US" dirty="0"/>
+            </a:br>
+            <a:br>
+              <a:rPr lang="en-US" dirty="0"/>
+            </a:br>
+            <a:br>
+              <a:rPr lang="en-US" dirty="0"/>
+            </a:br>
+            <a:br>
+              <a:rPr lang="en-US" dirty="0"/>
+            </a:br>
+            <a:endParaRPr lang="en-US" dirty="0"/>
+          </a:p>
+        </p:txBody>
+      </p:sp>
+      <p:sp>
+        <p:nvSpPr>
+          <p:cNvPr id="451" name="Text Placeholder 450">
+            <a:extLst>
+              <a:ext uri="{FF2B5EF4-FFF2-40B4-BE49-F238E27FC236}">
+                <a16:creationId xmlns:a16="http://schemas.microsoft.com/office/drawing/2014/main" id="{2010CE3A-A37A-8D23-1F31-37F336A8F1D0}"/>
+              </a:ext>
+            </a:extLst>
+          </p:cNvPr>
+          <p:cNvSpPr>
+            <a:spLocks noGrp="1"/>
+          </p:cNvSpPr>
+          <p:nvPr>
+            <p:ph type="body" sz="quarter" idx="15"/>
+          </p:nvPr>
+        </p:nvSpPr>
+        <p:spPr>
+          <a:xfrm>
+            <a:off x="65930" y="5480110"/>
+            <a:ext cx="5519481" cy="812530"/>
+          </a:xfrm>
+        </p:spPr>
+        <p:txBody>
+          <a:bodyPr/>
+          <a:lstStyle/>
+          <a:p>
+            <a:pPr algn="l"/>
+            <a:r>
+              <a:rPr lang="en-US" b="0" dirty="0"/>
+              <a:t>The two-path approach here demonstrates both expert elicitation (Path A) and data-driven calibration (Path B) methods.</a:t>
+            </a:r>
+            <a:endParaRPr lang="en-US" dirty="0"/>
+          </a:p>
+        </p:txBody>
+      </p:sp>
+      <p:sp>
+        <p:nvSpPr>
+          <p:cNvPr id="3" name="Slide Number Placeholder 2">
+            <a:extLst>
+              <a:ext uri="{FF2B5EF4-FFF2-40B4-BE49-F238E27FC236}">
+                <a16:creationId xmlns:a16="http://schemas.microsoft.com/office/drawing/2014/main" id="{90AA26D8-B4A6-FBBB-80B4-17D348C3E039}"/>
+              </a:ext>
+            </a:extLst>
+          </p:cNvPr>
+          <p:cNvSpPr>
+            <a:spLocks noGrp="1"/>
+          </p:cNvSpPr>
+          <p:nvPr>
+            <p:ph type="sldNum" sz="quarter" idx="4"/>
+          </p:nvPr>
+        </p:nvSpPr>
+        <p:spPr>
+          <a:xfrm>
+            <a:off x="10983397" y="6433754"/>
+            <a:ext cx="531946" cy="365125"/>
+          </a:xfrm>
+        </p:spPr>
+        <p:txBody>
+          <a:bodyPr/>
+          <a:lstStyle/>
+          <a:p>
+            <a:fld id="{07165E6F-54ED-4977-A15E-D44BE7238A65}" type="slidenum">
+              <a:rPr lang="en-US" smtClean="0"/>
+              <a:pPr/>
+              <a:t>13</a:t>
+            </a:fld>
+            <a:endParaRPr lang="en-US"/>
+          </a:p>
+        </p:txBody>
+      </p:sp>
+      <p:sp>
+        <p:nvSpPr>
+          <p:cNvPr id="10" name="TextBox 9">
+            <a:extLst>
+              <a:ext uri="{FF2B5EF4-FFF2-40B4-BE49-F238E27FC236}">
+                <a16:creationId xmlns:a16="http://schemas.microsoft.com/office/drawing/2014/main" id="{AF1946D9-BBE4-E145-21ED-69E5B82EF1F9}"/>
+              </a:ext>
+            </a:extLst>
+          </p:cNvPr>
+          <p:cNvSpPr txBox="1"/>
+          <p:nvPr/>
+        </p:nvSpPr>
+        <p:spPr>
+          <a:xfrm>
+            <a:off x="380960" y="2271101"/>
+            <a:ext cx="4273510" cy="2031325"/>
+          </a:xfrm>
+          <a:prstGeom prst="rect">
+            <a:avLst/>
+          </a:prstGeom>
+          <a:noFill/>
+        </p:spPr>
+        <p:txBody>
+          <a:bodyPr wrap="square">
+            <a:spAutoFit/>
+          </a:bodyPr>
+          <a:lstStyle/>
+          <a:p>
+            <a:r>
+              <a:rPr lang="en-US" b="1" dirty="0"/>
+              <a:t>Key Insight</a:t>
+            </a:r>
+            <a:r>
+              <a:rPr lang="en-US" dirty="0"/>
+              <a:t>:</a:t>
+            </a:r>
+          </a:p>
+          <a:p>
+            <a:r>
+              <a:rPr lang="en-US" dirty="0"/>
+              <a:t>Our 3 failures in 24 months from section 3 was our starting knowledge. Now we have new actual TTF data in path by to use.</a:t>
+            </a:r>
+          </a:p>
+          <a:p>
+            <a:r>
+              <a:rPr lang="en-US" dirty="0"/>
+              <a:t>- What if we plotted against that original knowledge?</a:t>
+            </a:r>
+          </a:p>
+        </p:txBody>
+      </p:sp>
+      <p:sp>
+        <p:nvSpPr>
+          <p:cNvPr id="6" name="TextBox 5">
+            <a:extLst>
+              <a:ext uri="{FF2B5EF4-FFF2-40B4-BE49-F238E27FC236}">
+                <a16:creationId xmlns:a16="http://schemas.microsoft.com/office/drawing/2014/main" id="{D28D1FC0-93DD-3108-BC6C-5653BE56D253}"/>
+              </a:ext>
+            </a:extLst>
+          </p:cNvPr>
+          <p:cNvSpPr txBox="1"/>
+          <p:nvPr/>
+        </p:nvSpPr>
+        <p:spPr>
+          <a:xfrm>
+            <a:off x="5565183" y="181683"/>
+            <a:ext cx="6560887" cy="5078313"/>
+          </a:xfrm>
+          <a:prstGeom prst="rect">
+            <a:avLst/>
+          </a:prstGeom>
+          <a:noFill/>
+        </p:spPr>
+        <p:txBody>
+          <a:bodyPr wrap="square">
+            <a:spAutoFit/>
+          </a:bodyPr>
+          <a:lstStyle/>
+          <a:p>
+            <a:r>
+              <a:rPr lang="en-US" b="1" dirty="0"/>
+              <a:t>Exploration</a:t>
+            </a:r>
+          </a:p>
+          <a:p>
+            <a:endParaRPr lang="en-US" b="1" dirty="0"/>
+          </a:p>
+          <a:p>
+            <a:r>
+              <a:rPr lang="en-US" b="1" dirty="0"/>
+              <a:t>Steps: </a:t>
+            </a:r>
+          </a:p>
+          <a:p>
+            <a:pPr marL="285750" indent="-285750">
+              <a:buFont typeface="Arial" panose="020B0604020202020204" pitchFamily="34" charset="0"/>
+              <a:buChar char="•"/>
+            </a:pPr>
+            <a:r>
+              <a:rPr lang="en-US" dirty="0"/>
+              <a:t>In section 6 Path B</a:t>
+            </a:r>
+          </a:p>
+          <a:p>
+            <a:pPr marL="285750" indent="-285750">
+              <a:buFont typeface="Arial" panose="020B0604020202020204" pitchFamily="34" charset="0"/>
+              <a:buChar char="•"/>
+            </a:pPr>
+            <a:r>
+              <a:rPr lang="en-US" dirty="0"/>
+              <a:t>Change the TTF actual data to match our original problem data of 3 failures in 24 months.</a:t>
+            </a:r>
+          </a:p>
+          <a:p>
+            <a:pPr marL="285750" indent="-285750">
+              <a:buFont typeface="Arial" panose="020B0604020202020204" pitchFamily="34" charset="0"/>
+              <a:buChar char="•"/>
+            </a:pPr>
+            <a:r>
+              <a:rPr lang="en-US" dirty="0"/>
+              <a:t>Use [6,8,10] for the new actual TTF data in the entry box.</a:t>
+            </a:r>
+          </a:p>
+          <a:p>
+            <a:pPr marL="285750" indent="-285750">
+              <a:buFont typeface="Arial" panose="020B0604020202020204" pitchFamily="34" charset="0"/>
+              <a:buChar char="•"/>
+            </a:pPr>
+            <a:r>
+              <a:rPr lang="en-US" dirty="0"/>
+              <a:t>Click the Apply the Observed TTFs button</a:t>
+            </a:r>
+          </a:p>
+          <a:p>
+            <a:pPr marL="742950" lvl="1" indent="-285750">
+              <a:buFont typeface="Arial" panose="020B0604020202020204" pitchFamily="34" charset="0"/>
+              <a:buChar char="•"/>
+            </a:pPr>
+            <a:r>
+              <a:rPr lang="en-US" dirty="0"/>
+              <a:t>Note the Gamma(alpha=3.00, rate=24.00)  has changed to reflect the 3 failures over 24 months.</a:t>
+            </a:r>
+          </a:p>
+          <a:p>
+            <a:pPr marL="285750" indent="-285750">
+              <a:buFont typeface="Arial" panose="020B0604020202020204" pitchFamily="34" charset="0"/>
+              <a:buChar char="•"/>
+            </a:pPr>
+            <a:r>
+              <a:rPr lang="en-US" dirty="0"/>
+              <a:t>Rerun the Section6_Step4_Compute_Path_B() block</a:t>
+            </a:r>
+          </a:p>
+          <a:p>
+            <a:pPr marL="285750" indent="-285750">
+              <a:buFont typeface="Arial" panose="020B0604020202020204" pitchFamily="34" charset="0"/>
+              <a:buChar char="•"/>
+            </a:pPr>
+            <a:r>
+              <a:rPr lang="en-US" dirty="0"/>
+              <a:t>Rerun the Section6_Step4_Plot_Prior_Comparison() plot</a:t>
+            </a:r>
+          </a:p>
+          <a:p>
+            <a:pPr marL="742950" lvl="1" indent="-285750">
+              <a:buFont typeface="Arial" panose="020B0604020202020204" pitchFamily="34" charset="0"/>
+              <a:buChar char="•"/>
+            </a:pPr>
+            <a:r>
+              <a:rPr lang="en-US" dirty="0"/>
+              <a:t>Notice now our expert estimates of LB 9 and UB 14 match our original experience of 3 failures in 24 months more closely.</a:t>
+            </a:r>
+          </a:p>
+          <a:p>
+            <a:pPr marL="285750" indent="-285750">
+              <a:buFont typeface="Arial" panose="020B0604020202020204" pitchFamily="34" charset="0"/>
+              <a:buChar char="•"/>
+            </a:pPr>
+            <a:endParaRPr lang="en-US" dirty="0"/>
+          </a:p>
+          <a:p>
+            <a:pPr marL="742950" lvl="1" indent="-285750">
+              <a:buFont typeface="Arial" panose="020B0604020202020204" pitchFamily="34" charset="0"/>
+              <a:buChar char="•"/>
+            </a:pPr>
+            <a:endParaRPr lang="en-US" dirty="0"/>
+          </a:p>
+          <a:p>
+            <a:pPr marL="285750" indent="-285750">
+              <a:buFont typeface="Arial" panose="020B0604020202020204" pitchFamily="34" charset="0"/>
+              <a:buChar char="•"/>
+            </a:pPr>
+            <a:endParaRPr lang="en-US" dirty="0"/>
+          </a:p>
+        </p:txBody>
+      </p:sp>
+      <p:sp>
+        <p:nvSpPr>
+          <p:cNvPr id="14" name="BJPseudoFooter">
+            <a:extLst>
+              <a:ext uri="{FF2B5EF4-FFF2-40B4-BE49-F238E27FC236}">
+                <a16:creationId xmlns:a16="http://schemas.microsoft.com/office/drawing/2014/main" id="{45D26F72-F196-6C7B-BE2D-771943CBC60A}"/>
+              </a:ext>
+            </a:extLst>
+          </p:cNvPr>
+          <p:cNvSpPr txBox="1"/>
+          <p:nvPr>
+            <p:custDataLst>
+              <p:tags r:id="rId1"/>
+            </p:custDataLst>
+          </p:nvPr>
+        </p:nvSpPr>
+        <p:spPr>
+          <a:xfrm>
+            <a:off x="3963044" y="6519446"/>
+            <a:ext cx="4265911" cy="338554"/>
+          </a:xfrm>
+          <a:prstGeom prst="rect">
+            <a:avLst/>
+          </a:prstGeom>
+          <a:noFill/>
+        </p:spPr>
+        <p:txBody>
+          <a:bodyPr vert="horz" wrap="none" rtlCol="0">
+            <a:spAutoFit/>
+          </a:bodyPr>
+          <a:lstStyle/>
+          <a:p>
+            <a:pPr algn="ctr"/>
+            <a:r>
+              <a:rPr lang="en-US" sz="800">
+                <a:solidFill>
+                  <a:srgbClr val="000000"/>
+                </a:solidFill>
+              </a:rPr>
+              <a:t>RTX Corporation (Corporate) - Company Use
+This document does not contain any export controlled technical material/data/information.</a:t>
+            </a:r>
+          </a:p>
+        </p:txBody>
+      </p:sp>
+      <p:pic>
+        <p:nvPicPr>
+          <p:cNvPr id="4" name="Picture 3">
+            <a:extLst>
+              <a:ext uri="{FF2B5EF4-FFF2-40B4-BE49-F238E27FC236}">
+                <a16:creationId xmlns:a16="http://schemas.microsoft.com/office/drawing/2014/main" id="{88EC2A69-4F64-B031-7D0C-070DF7338A32}"/>
+              </a:ext>
+            </a:extLst>
+          </p:cNvPr>
+          <p:cNvPicPr>
+            <a:picLocks noChangeAspect="1"/>
+          </p:cNvPicPr>
+          <p:nvPr/>
+        </p:nvPicPr>
+        <p:blipFill>
+          <a:blip r:embed="rId4"/>
+          <a:stretch>
+            <a:fillRect/>
+          </a:stretch>
+        </p:blipFill>
+        <p:spPr>
+          <a:xfrm>
+            <a:off x="182358" y="4951458"/>
+            <a:ext cx="5403053" cy="1341182"/>
+          </a:xfrm>
+          <a:prstGeom prst="rect">
+            <a:avLst/>
+          </a:prstGeom>
+        </p:spPr>
+      </p:pic>
+    </p:spTree>
+    <p:extLst>
+      <p:ext uri="{BB962C8B-B14F-4D97-AF65-F5344CB8AC3E}">
+        <p14:creationId xmlns:p14="http://schemas.microsoft.com/office/powerpoint/2010/main" val="662880064"/>
+      </p:ext>
+    </p:extLst>
+  </p:cSld>
+  <p:clrMapOvr>
+    <a:masterClrMapping/>
+  </p:clrMapOvr>
+</p:sld>
+</file>
+
+<file path=ppt/slides/slide14.xml><?xml version="1.0" encoding="utf-8"?>
+<p:sld xmlns:a="http://schemas.openxmlformats.org/drawingml/2006/main" xmlns:r="http://schemas.openxmlformats.org/officeDocument/2006/relationships" xmlns:p="http://schemas.openxmlformats.org/presentationml/2006/main">
+  <p:cSld>
+    <p:spTree>
+      <p:nvGrpSpPr>
+        <p:cNvPr id="1" name="">
+          <a:extLst>
+            <a:ext uri="{FF2B5EF4-FFF2-40B4-BE49-F238E27FC236}">
+              <a16:creationId xmlns:a16="http://schemas.microsoft.com/office/drawing/2014/main" id="{025A71EA-5694-6052-4897-382ECF081837}"/>
+            </a:ext>
+          </a:extLst>
+        </p:cNvPr>
+        <p:cNvGrpSpPr/>
+        <p:nvPr/>
+      </p:nvGrpSpPr>
+      <p:grpSpPr>
+        <a:xfrm>
+          <a:off x="0" y="0"/>
+          <a:ext cx="0" cy="0"/>
+          <a:chOff x="0" y="0"/>
+          <a:chExt cx="0" cy="0"/>
+        </a:xfrm>
+      </p:grpSpPr>
+      <p:sp>
+        <p:nvSpPr>
+          <p:cNvPr id="449" name="Title 448">
+            <a:extLst>
+              <a:ext uri="{FF2B5EF4-FFF2-40B4-BE49-F238E27FC236}">
+                <a16:creationId xmlns:a16="http://schemas.microsoft.com/office/drawing/2014/main" id="{BFE2B210-B65B-B462-8122-E5372EECCF12}"/>
+              </a:ext>
+            </a:extLst>
+          </p:cNvPr>
+          <p:cNvSpPr>
+            <a:spLocks noGrp="1"/>
+          </p:cNvSpPr>
+          <p:nvPr>
+            <p:ph type="title"/>
+          </p:nvPr>
+        </p:nvSpPr>
+        <p:spPr>
+          <a:xfrm>
+            <a:off x="694944" y="466347"/>
+            <a:ext cx="3545076" cy="1676960"/>
+          </a:xfrm>
+        </p:spPr>
+        <p:txBody>
+          <a:bodyPr/>
+          <a:lstStyle/>
+          <a:p>
+            <a:r>
+              <a:rPr lang="en-US" dirty="0"/>
+              <a:t>Section 6: </a:t>
+            </a:r>
+            <a:br>
+              <a:rPr lang="en-US" dirty="0"/>
+            </a:br>
+            <a:r>
+              <a:rPr lang="en-US" dirty="0"/>
+              <a:t>Step 4 - Calibrated Priors (Exploration)</a:t>
+            </a:r>
+            <a:br>
+              <a:rPr lang="en-US" dirty="0"/>
+            </a:br>
+            <a:br>
+              <a:rPr lang="en-US" dirty="0"/>
+            </a:br>
+            <a:br>
+              <a:rPr lang="en-US" dirty="0"/>
+            </a:br>
+            <a:br>
+              <a:rPr lang="en-US" dirty="0"/>
+            </a:br>
+            <a:br>
+              <a:rPr lang="en-US" dirty="0"/>
+            </a:br>
+            <a:endParaRPr lang="en-US" dirty="0"/>
+          </a:p>
+        </p:txBody>
+      </p:sp>
+      <p:sp>
+        <p:nvSpPr>
+          <p:cNvPr id="451" name="Text Placeholder 450">
+            <a:extLst>
+              <a:ext uri="{FF2B5EF4-FFF2-40B4-BE49-F238E27FC236}">
+                <a16:creationId xmlns:a16="http://schemas.microsoft.com/office/drawing/2014/main" id="{D99E1A88-FD3E-0174-55A5-1C1F028AF9BD}"/>
+              </a:ext>
+            </a:extLst>
+          </p:cNvPr>
+          <p:cNvSpPr>
+            <a:spLocks noGrp="1"/>
+          </p:cNvSpPr>
+          <p:nvPr>
+            <p:ph type="body" sz="quarter" idx="15"/>
+          </p:nvPr>
+        </p:nvSpPr>
+        <p:spPr>
+          <a:xfrm>
+            <a:off x="65930" y="5480110"/>
+            <a:ext cx="5519481" cy="812530"/>
+          </a:xfrm>
+        </p:spPr>
+        <p:txBody>
+          <a:bodyPr/>
+          <a:lstStyle/>
+          <a:p>
+            <a:pPr algn="l"/>
+            <a:r>
+              <a:rPr lang="en-US" b="0" dirty="0"/>
+              <a:t>The two-path approach here demonstrates both expert elicitation (Path A) and data-driven calibration (Path B) methods.</a:t>
+            </a:r>
+            <a:endParaRPr lang="en-US" dirty="0"/>
+          </a:p>
+        </p:txBody>
+      </p:sp>
+      <p:sp>
+        <p:nvSpPr>
+          <p:cNvPr id="3" name="Slide Number Placeholder 2">
+            <a:extLst>
+              <a:ext uri="{FF2B5EF4-FFF2-40B4-BE49-F238E27FC236}">
+                <a16:creationId xmlns:a16="http://schemas.microsoft.com/office/drawing/2014/main" id="{CF3A8FED-D3B9-2404-91CF-E5FB3C128B4B}"/>
+              </a:ext>
+            </a:extLst>
+          </p:cNvPr>
+          <p:cNvSpPr>
+            <a:spLocks noGrp="1"/>
+          </p:cNvSpPr>
+          <p:nvPr>
+            <p:ph type="sldNum" sz="quarter" idx="4"/>
+          </p:nvPr>
+        </p:nvSpPr>
+        <p:spPr>
+          <a:xfrm>
+            <a:off x="10983397" y="6433754"/>
+            <a:ext cx="531946" cy="365125"/>
+          </a:xfrm>
+        </p:spPr>
+        <p:txBody>
+          <a:bodyPr/>
+          <a:lstStyle/>
+          <a:p>
+            <a:fld id="{07165E6F-54ED-4977-A15E-D44BE7238A65}" type="slidenum">
+              <a:rPr lang="en-US" smtClean="0"/>
+              <a:pPr/>
+              <a:t>14</a:t>
+            </a:fld>
+            <a:endParaRPr lang="en-US"/>
+          </a:p>
+        </p:txBody>
+      </p:sp>
+      <p:sp>
+        <p:nvSpPr>
+          <p:cNvPr id="10" name="TextBox 9">
+            <a:extLst>
+              <a:ext uri="{FF2B5EF4-FFF2-40B4-BE49-F238E27FC236}">
+                <a16:creationId xmlns:a16="http://schemas.microsoft.com/office/drawing/2014/main" id="{7EE06131-4C53-636C-57A1-C17AAA36F881}"/>
+              </a:ext>
+            </a:extLst>
+          </p:cNvPr>
+          <p:cNvSpPr txBox="1"/>
+          <p:nvPr/>
+        </p:nvSpPr>
+        <p:spPr>
+          <a:xfrm>
+            <a:off x="380960" y="2271101"/>
+            <a:ext cx="4273510" cy="2031325"/>
+          </a:xfrm>
+          <a:prstGeom prst="rect">
+            <a:avLst/>
+          </a:prstGeom>
+          <a:noFill/>
+        </p:spPr>
+        <p:txBody>
+          <a:bodyPr wrap="square">
+            <a:spAutoFit/>
+          </a:bodyPr>
+          <a:lstStyle/>
+          <a:p>
+            <a:r>
+              <a:rPr lang="en-US" b="1" dirty="0"/>
+              <a:t>Key Insight</a:t>
+            </a:r>
+            <a:r>
+              <a:rPr lang="en-US" dirty="0"/>
+              <a:t>:</a:t>
+            </a:r>
+          </a:p>
+          <a:p>
+            <a:r>
+              <a:rPr lang="en-US" dirty="0"/>
+              <a:t>Lets use the new </a:t>
+            </a:r>
+            <a:r>
+              <a:rPr lang="en-US" dirty="0" err="1"/>
+              <a:t>new</a:t>
+            </a:r>
+            <a:r>
+              <a:rPr lang="en-US" dirty="0"/>
+              <a:t> actual TTF data.</a:t>
+            </a:r>
+          </a:p>
+          <a:p>
+            <a:pPr marL="285750" indent="-285750">
+              <a:buFontTx/>
+              <a:buChar char="-"/>
+            </a:pPr>
+            <a:r>
+              <a:rPr lang="en-US" dirty="0"/>
+              <a:t>That new knowledge changes our SME estimates?</a:t>
+            </a:r>
+          </a:p>
+          <a:p>
+            <a:pPr marL="285750" indent="-285750">
+              <a:buFontTx/>
+              <a:buChar char="-"/>
+            </a:pPr>
+            <a:r>
+              <a:rPr lang="en-US" dirty="0"/>
+              <a:t>revise our SME estimates from it some. [9,14] to ?</a:t>
+            </a:r>
+          </a:p>
+          <a:p>
+            <a:pPr marL="285750" indent="-285750">
+              <a:buFontTx/>
+              <a:buChar char="-"/>
+            </a:pPr>
+            <a:endParaRPr lang="en-US" dirty="0"/>
+          </a:p>
+        </p:txBody>
+      </p:sp>
+      <p:sp>
+        <p:nvSpPr>
+          <p:cNvPr id="6" name="TextBox 5">
+            <a:extLst>
+              <a:ext uri="{FF2B5EF4-FFF2-40B4-BE49-F238E27FC236}">
+                <a16:creationId xmlns:a16="http://schemas.microsoft.com/office/drawing/2014/main" id="{FE313DF3-5A03-05B0-30FD-714DADC72275}"/>
+              </a:ext>
+            </a:extLst>
+          </p:cNvPr>
+          <p:cNvSpPr txBox="1"/>
+          <p:nvPr/>
+        </p:nvSpPr>
+        <p:spPr>
+          <a:xfrm>
+            <a:off x="5565183" y="181683"/>
+            <a:ext cx="6560887" cy="5355312"/>
+          </a:xfrm>
+          <a:prstGeom prst="rect">
+            <a:avLst/>
+          </a:prstGeom>
+          <a:noFill/>
+        </p:spPr>
+        <p:txBody>
+          <a:bodyPr wrap="square">
+            <a:spAutoFit/>
+          </a:bodyPr>
+          <a:lstStyle/>
+          <a:p>
+            <a:r>
+              <a:rPr lang="en-US" b="1" dirty="0"/>
+              <a:t>Exploration</a:t>
+            </a:r>
+          </a:p>
+          <a:p>
+            <a:endParaRPr lang="en-US" b="1" dirty="0"/>
+          </a:p>
+          <a:p>
+            <a:r>
+              <a:rPr lang="en-US" b="1" dirty="0"/>
+              <a:t>Steps: </a:t>
+            </a:r>
+          </a:p>
+          <a:p>
+            <a:pPr marL="285750" indent="-285750">
+              <a:buFont typeface="Arial" panose="020B0604020202020204" pitchFamily="34" charset="0"/>
+              <a:buChar char="•"/>
+            </a:pPr>
+            <a:r>
+              <a:rPr lang="en-US" dirty="0"/>
+              <a:t>In section 6 Path B</a:t>
+            </a:r>
+          </a:p>
+          <a:p>
+            <a:pPr marL="285750" indent="-285750">
+              <a:buFont typeface="Arial" panose="020B0604020202020204" pitchFamily="34" charset="0"/>
+              <a:buChar char="•"/>
+            </a:pPr>
+            <a:r>
+              <a:rPr lang="en-US" dirty="0"/>
+              <a:t>Click Reset button.</a:t>
+            </a:r>
+          </a:p>
+          <a:p>
+            <a:pPr marL="285750" indent="-285750">
+              <a:buFont typeface="Arial" panose="020B0604020202020204" pitchFamily="34" charset="0"/>
+              <a:buChar char="•"/>
+            </a:pPr>
+            <a:r>
+              <a:rPr lang="en-US" dirty="0"/>
+              <a:t>Click the Apply the Observed TTFs button</a:t>
+            </a:r>
+          </a:p>
+          <a:p>
+            <a:pPr marL="742950" lvl="1" indent="-285750">
+              <a:buFont typeface="Arial" panose="020B0604020202020204" pitchFamily="34" charset="0"/>
+              <a:buChar char="•"/>
+            </a:pPr>
+            <a:r>
+              <a:rPr lang="en-US" dirty="0"/>
+              <a:t>Note the Gamma(alpha=10.00, rate=167.95).</a:t>
+            </a:r>
+          </a:p>
+          <a:p>
+            <a:pPr marL="742950" lvl="1" indent="-285750">
+              <a:buFont typeface="Arial" panose="020B0604020202020204" pitchFamily="34" charset="0"/>
+              <a:buChar char="•"/>
+            </a:pPr>
+            <a:r>
+              <a:rPr lang="en-US" dirty="0"/>
+              <a:t>mean lambda=0.0595 fail/</a:t>
+            </a:r>
+            <a:r>
+              <a:rPr lang="en-US" dirty="0" err="1"/>
+              <a:t>mo</a:t>
+            </a:r>
+            <a:r>
+              <a:rPr lang="en-US" dirty="0"/>
+              <a:t> → implied MTBF 16.8 </a:t>
+            </a:r>
+            <a:r>
+              <a:rPr lang="en-US" dirty="0" err="1"/>
+              <a:t>mo</a:t>
+            </a:r>
+            <a:endParaRPr lang="en-US" dirty="0"/>
+          </a:p>
+          <a:p>
+            <a:pPr marL="285750" indent="-285750">
+              <a:buFont typeface="Arial" panose="020B0604020202020204" pitchFamily="34" charset="0"/>
+              <a:buChar char="•"/>
+            </a:pPr>
+            <a:r>
+              <a:rPr lang="en-US" dirty="0"/>
+              <a:t>In Section 6 Path A</a:t>
+            </a:r>
+          </a:p>
+          <a:p>
+            <a:pPr marL="285750" indent="-285750">
+              <a:buFont typeface="Arial" panose="020B0604020202020204" pitchFamily="34" charset="0"/>
+              <a:buChar char="•"/>
+            </a:pPr>
+            <a:r>
+              <a:rPr lang="en-US" dirty="0"/>
+              <a:t>Set MTBF LB to 5 but raise UB to 17 months for our new data.</a:t>
+            </a:r>
+          </a:p>
+          <a:p>
+            <a:pPr marL="285750" indent="-285750">
+              <a:buFont typeface="Arial" panose="020B0604020202020204" pitchFamily="34" charset="0"/>
+              <a:buChar char="•"/>
+            </a:pPr>
+            <a:r>
+              <a:rPr lang="en-US" dirty="0"/>
+              <a:t>Click Apply Expert CI button.</a:t>
+            </a:r>
+          </a:p>
+          <a:p>
+            <a:pPr marL="285750" indent="-285750">
+              <a:buFont typeface="Arial" panose="020B0604020202020204" pitchFamily="34" charset="0"/>
+              <a:buChar char="•"/>
+            </a:pPr>
+            <a:r>
+              <a:rPr lang="en-US" dirty="0"/>
+              <a:t>Rerun Section6_Step4_Compute_Path_A() block</a:t>
+            </a:r>
+          </a:p>
+          <a:p>
+            <a:pPr marL="285750" indent="-285750">
+              <a:buFont typeface="Arial" panose="020B0604020202020204" pitchFamily="34" charset="0"/>
+              <a:buChar char="•"/>
+            </a:pPr>
+            <a:r>
+              <a:rPr lang="en-US" dirty="0"/>
+              <a:t>Rerun the Section6_Step4_Compute_Path_B() block</a:t>
+            </a:r>
+          </a:p>
+          <a:p>
+            <a:pPr marL="285750" indent="-285750">
+              <a:buFont typeface="Arial" panose="020B0604020202020204" pitchFamily="34" charset="0"/>
+              <a:buChar char="•"/>
+            </a:pPr>
+            <a:r>
+              <a:rPr lang="en-US" dirty="0"/>
+              <a:t>Rerun the Section6_Step4_Plot_Prior_Comparison() plot</a:t>
+            </a:r>
+          </a:p>
+          <a:p>
+            <a:pPr marL="742950" lvl="1" indent="-285750">
+              <a:buFont typeface="Arial" panose="020B0604020202020204" pitchFamily="34" charset="0"/>
+              <a:buChar char="•"/>
+            </a:pPr>
+            <a:r>
+              <a:rPr lang="en-US" dirty="0"/>
+              <a:t>Notice the estimates of LB 5 and UB 17 effect</a:t>
+            </a:r>
+          </a:p>
+          <a:p>
+            <a:pPr marL="742950" lvl="1" indent="-285750">
+              <a:buFont typeface="Arial" panose="020B0604020202020204" pitchFamily="34" charset="0"/>
+              <a:buChar char="•"/>
+            </a:pPr>
+            <a:endParaRPr lang="en-US" dirty="0"/>
+          </a:p>
+          <a:p>
+            <a:pPr marL="742950" lvl="1" indent="-285750">
+              <a:buFont typeface="Arial" panose="020B0604020202020204" pitchFamily="34" charset="0"/>
+              <a:buChar char="•"/>
+            </a:pPr>
+            <a:endParaRPr lang="en-US" dirty="0"/>
+          </a:p>
+          <a:p>
+            <a:pPr marL="285750" indent="-285750">
+              <a:buFont typeface="Arial" panose="020B0604020202020204" pitchFamily="34" charset="0"/>
+              <a:buChar char="•"/>
+            </a:pPr>
+            <a:endParaRPr lang="en-US" dirty="0"/>
+          </a:p>
+        </p:txBody>
+      </p:sp>
+      <p:sp>
+        <p:nvSpPr>
+          <p:cNvPr id="14" name="BJPseudoFooter">
+            <a:extLst>
+              <a:ext uri="{FF2B5EF4-FFF2-40B4-BE49-F238E27FC236}">
+                <a16:creationId xmlns:a16="http://schemas.microsoft.com/office/drawing/2014/main" id="{C0BFFE0D-6520-B176-A63E-78E78C321D1E}"/>
+              </a:ext>
+            </a:extLst>
+          </p:cNvPr>
+          <p:cNvSpPr txBox="1"/>
+          <p:nvPr>
+            <p:custDataLst>
+              <p:tags r:id="rId1"/>
+            </p:custDataLst>
+          </p:nvPr>
+        </p:nvSpPr>
+        <p:spPr>
+          <a:xfrm>
+            <a:off x="3963044" y="6519446"/>
+            <a:ext cx="4265911" cy="338554"/>
+          </a:xfrm>
+          <a:prstGeom prst="rect">
+            <a:avLst/>
+          </a:prstGeom>
+          <a:noFill/>
+        </p:spPr>
+        <p:txBody>
+          <a:bodyPr vert="horz" wrap="none" rtlCol="0">
+            <a:spAutoFit/>
+          </a:bodyPr>
+          <a:lstStyle/>
+          <a:p>
+            <a:pPr algn="ctr"/>
+            <a:r>
+              <a:rPr lang="en-US" sz="800">
+                <a:solidFill>
+                  <a:srgbClr val="000000"/>
+                </a:solidFill>
+              </a:rPr>
+              <a:t>RTX Corporation (Corporate) - Company Use
+This document does not contain any export controlled technical material/data/information.</a:t>
+            </a:r>
+          </a:p>
+        </p:txBody>
+      </p:sp>
+      <p:pic>
+        <p:nvPicPr>
+          <p:cNvPr id="4" name="Picture 3">
+            <a:extLst>
+              <a:ext uri="{FF2B5EF4-FFF2-40B4-BE49-F238E27FC236}">
+                <a16:creationId xmlns:a16="http://schemas.microsoft.com/office/drawing/2014/main" id="{29261607-27D5-908F-257E-1F56F049F970}"/>
+              </a:ext>
+            </a:extLst>
+          </p:cNvPr>
+          <p:cNvPicPr>
+            <a:picLocks noChangeAspect="1"/>
+          </p:cNvPicPr>
+          <p:nvPr/>
+        </p:nvPicPr>
+        <p:blipFill>
+          <a:blip r:embed="rId4"/>
+          <a:stretch>
+            <a:fillRect/>
+          </a:stretch>
+        </p:blipFill>
+        <p:spPr>
+          <a:xfrm>
+            <a:off x="182358" y="4951458"/>
+            <a:ext cx="5403053" cy="1341182"/>
+          </a:xfrm>
+          <a:prstGeom prst="rect">
+            <a:avLst/>
+          </a:prstGeom>
+        </p:spPr>
+      </p:pic>
+      <p:pic>
+        <p:nvPicPr>
+          <p:cNvPr id="5" name="Picture 4">
+            <a:extLst>
+              <a:ext uri="{FF2B5EF4-FFF2-40B4-BE49-F238E27FC236}">
+                <a16:creationId xmlns:a16="http://schemas.microsoft.com/office/drawing/2014/main" id="{422E524E-A0B9-3E25-BE20-D50F16A5C50A}"/>
+              </a:ext>
+            </a:extLst>
+          </p:cNvPr>
+          <p:cNvPicPr>
+            <a:picLocks noChangeAspect="1"/>
+          </p:cNvPicPr>
+          <p:nvPr/>
+        </p:nvPicPr>
+        <p:blipFill>
+          <a:blip r:embed="rId5"/>
+          <a:stretch>
+            <a:fillRect/>
+          </a:stretch>
+        </p:blipFill>
+        <p:spPr>
+          <a:xfrm>
+            <a:off x="6433921" y="4736854"/>
+            <a:ext cx="3086259" cy="1600282"/>
+          </a:xfrm>
+          <a:prstGeom prst="rect">
+            <a:avLst/>
+          </a:prstGeom>
+        </p:spPr>
+      </p:pic>
+    </p:spTree>
+    <p:extLst>
+      <p:ext uri="{BB962C8B-B14F-4D97-AF65-F5344CB8AC3E}">
+        <p14:creationId xmlns:p14="http://schemas.microsoft.com/office/powerpoint/2010/main" val="2846984579"/>
+      </p:ext>
+    </p:extLst>
+  </p:cSld>
+  <p:clrMapOvr>
+    <a:masterClrMapping/>
+  </p:clrMapOvr>
+</p:sld>
+</file>
+
+<file path=ppt/slides/slide15.xml><?xml version="1.0" encoding="utf-8"?>
+<p:sld xmlns:a="http://schemas.openxmlformats.org/drawingml/2006/main" xmlns:r="http://schemas.openxmlformats.org/officeDocument/2006/relationships" xmlns:p="http://schemas.openxmlformats.org/presentationml/2006/main">
+  <p:cSld>
+    <p:spTree>
+      <p:nvGrpSpPr>
+        <p:cNvPr id="1" name="">
+          <a:extLst>
+            <a:ext uri="{FF2B5EF4-FFF2-40B4-BE49-F238E27FC236}">
               <a16:creationId xmlns:a16="http://schemas.microsoft.com/office/drawing/2014/main" id="{4C92608C-B13F-A670-76F7-62A3523433B3}"/>
             </a:ext>
           </a:extLst>
@@ -9833,7 +12639,7 @@
             <a:fld id="{07165E6F-54ED-4977-A15E-D44BE7238A65}" type="slidenum">
               <a:rPr lang="en-US" smtClean="0"/>
               <a:pPr/>
-              <a:t>10</a:t>
+              <a:t>15</a:t>
             </a:fld>
             <a:endParaRPr lang="en-US"/>
           </a:p>
@@ -10305,7 +13111,7 @@
 </p:sld>
 </file>
 
-<file path=ppt/slides/slide11.xml><?xml version="1.0" encoding="utf-8"?>
+<file path=ppt/slides/slide16.xml><?xml version="1.0" encoding="utf-8"?>
 <p:sld xmlns:a="http://schemas.openxmlformats.org/drawingml/2006/main" xmlns:r="http://schemas.openxmlformats.org/officeDocument/2006/relationships" xmlns:p="http://schemas.openxmlformats.org/presentationml/2006/main">
   <p:cSld>
     <p:spTree>
@@ -10455,7 +13261,7 @@
             <a:fld id="{07165E6F-54ED-4977-A15E-D44BE7238A65}" type="slidenum">
               <a:rPr lang="en-US" smtClean="0"/>
               <a:pPr/>
-              <a:t>11</a:t>
+              <a:t>16</a:t>
             </a:fld>
             <a:endParaRPr lang="en-US"/>
           </a:p>
@@ -10818,7 +13624,7 @@
 </p:sld>
 </file>
 
-<file path=ppt/slides/slide12.xml><?xml version="1.0" encoding="utf-8"?>
+<file path=ppt/slides/slide17.xml><?xml version="1.0" encoding="utf-8"?>
 <p:sld xmlns:a="http://schemas.openxmlformats.org/drawingml/2006/main" xmlns:r="http://schemas.openxmlformats.org/officeDocument/2006/relationships" xmlns:p="http://schemas.openxmlformats.org/presentationml/2006/main">
   <p:cSld>
     <p:spTree>
@@ -10978,7 +13784,7 @@
             <a:fld id="{07165E6F-54ED-4977-A15E-D44BE7238A65}" type="slidenum">
               <a:rPr lang="en-US" smtClean="0"/>
               <a:pPr/>
-              <a:t>12</a:t>
+              <a:t>17</a:t>
             </a:fld>
             <a:endParaRPr lang="en-US"/>
           </a:p>
@@ -11446,7 +14252,7 @@
 </p:sld>
 </file>
 
-<file path=ppt/slides/slide13.xml><?xml version="1.0" encoding="utf-8"?>
+<file path=ppt/slides/slide18.xml><?xml version="1.0" encoding="utf-8"?>
 <p:sld xmlns:a="http://schemas.openxmlformats.org/drawingml/2006/main" xmlns:r="http://schemas.openxmlformats.org/officeDocument/2006/relationships" xmlns:p="http://schemas.openxmlformats.org/presentationml/2006/main">
   <p:cSld>
     <p:spTree>
@@ -11767,7 +14573,7 @@
             <a:fld id="{07165E6F-54ED-4977-A15E-D44BE7238A65}" type="slidenum">
               <a:rPr lang="en-US" smtClean="0"/>
               <a:pPr/>
-              <a:t>13</a:t>
+              <a:t>18</a:t>
             </a:fld>
             <a:endParaRPr lang="en-US"/>
           </a:p>
@@ -11831,7 +14637,7 @@
 </p:sld>
 </file>
 
-<file path=ppt/slides/slide14.xml><?xml version="1.0" encoding="utf-8"?>
+<file path=ppt/slides/slide19.xml><?xml version="1.0" encoding="utf-8"?>
 <p:sld xmlns:a="http://schemas.openxmlformats.org/drawingml/2006/main" xmlns:r="http://schemas.openxmlformats.org/officeDocument/2006/relationships" xmlns:p="http://schemas.openxmlformats.org/presentationml/2006/main">
   <p:cSld>
     <p:spTree>
@@ -11916,7 +14722,7 @@
             <a:fld id="{07165E6F-54ED-4977-A15E-D44BE7238A65}" type="slidenum">
               <a:rPr lang="en-US" smtClean="0"/>
               <a:pPr/>
-              <a:t>14</a:t>
+              <a:t>19</a:t>
             </a:fld>
             <a:endParaRPr lang="en-US"/>
           </a:p>
@@ -11971,562 +14777,6 @@
     <p:extLst>
       <p:ext uri="{BB962C8B-B14F-4D97-AF65-F5344CB8AC3E}">
         <p14:creationId xmlns:p14="http://schemas.microsoft.com/office/powerpoint/2010/main" val="2821275583"/>
-      </p:ext>
-    </p:extLst>
-  </p:cSld>
-  <p:clrMapOvr>
-    <a:masterClrMapping/>
-  </p:clrMapOvr>
-</p:sld>
-</file>
-
-<file path=ppt/slides/slide15.xml><?xml version="1.0" encoding="utf-8"?>
-<p:sld xmlns:a="http://schemas.openxmlformats.org/drawingml/2006/main" xmlns:r="http://schemas.openxmlformats.org/officeDocument/2006/relationships" xmlns:p="http://schemas.openxmlformats.org/presentationml/2006/main">
-  <p:cSld>
-    <p:spTree>
-      <p:nvGrpSpPr>
-        <p:cNvPr id="1" name=""/>
-        <p:cNvGrpSpPr/>
-        <p:nvPr/>
-      </p:nvGrpSpPr>
-      <p:grpSpPr>
-        <a:xfrm>
-          <a:off x="0" y="0"/>
-          <a:ext cx="0" cy="0"/>
-          <a:chOff x="0" y="0"/>
-          <a:chExt cx="0" cy="0"/>
-        </a:xfrm>
-      </p:grpSpPr>
-      <p:sp>
-        <p:nvSpPr>
-          <p:cNvPr id="2" name="Title 1">
-            <a:extLst>
-              <a:ext uri="{FF2B5EF4-FFF2-40B4-BE49-F238E27FC236}">
-                <a16:creationId xmlns:a16="http://schemas.microsoft.com/office/drawing/2014/main" id="{A77F676C-8AEB-CAF9-4C69-7D5ADC490DA9}"/>
-              </a:ext>
-            </a:extLst>
-          </p:cNvPr>
-          <p:cNvSpPr>
-            <a:spLocks noGrp="1"/>
-          </p:cNvSpPr>
-          <p:nvPr>
-            <p:ph type="title"/>
-          </p:nvPr>
-        </p:nvSpPr>
-        <p:spPr/>
-        <p:txBody>
-          <a:bodyPr/>
-          <a:lstStyle/>
-          <a:p>
-            <a:r>
-              <a:rPr lang="en-US" dirty="0"/>
-              <a:t>BIO</a:t>
-            </a:r>
-            <a:br>
-              <a:rPr lang="en-US" dirty="0"/>
-            </a:br>
-            <a:endParaRPr lang="en-US" dirty="0">
-              <a:solidFill>
-                <a:srgbClr val="FF0000"/>
-              </a:solidFill>
-            </a:endParaRPr>
-          </a:p>
-        </p:txBody>
-      </p:sp>
-      <p:sp>
-        <p:nvSpPr>
-          <p:cNvPr id="3" name="Slide Number Placeholder 2">
-            <a:extLst>
-              <a:ext uri="{FF2B5EF4-FFF2-40B4-BE49-F238E27FC236}">
-                <a16:creationId xmlns:a16="http://schemas.microsoft.com/office/drawing/2014/main" id="{A389B7F3-7271-C06F-E5A7-0F686CD81DD7}"/>
-              </a:ext>
-            </a:extLst>
-          </p:cNvPr>
-          <p:cNvSpPr>
-            <a:spLocks noGrp="1"/>
-          </p:cNvSpPr>
-          <p:nvPr>
-            <p:ph type="sldNum" sz="quarter" idx="4"/>
-          </p:nvPr>
-        </p:nvSpPr>
-        <p:spPr>
-          <a:xfrm>
-            <a:off x="10983397" y="6433754"/>
-            <a:ext cx="531946" cy="365125"/>
-          </a:xfrm>
-        </p:spPr>
-        <p:txBody>
-          <a:bodyPr/>
-          <a:lstStyle/>
-          <a:p>
-            <a:fld id="{07165E6F-54ED-4977-A15E-D44BE7238A65}" type="slidenum">
-              <a:rPr lang="en-US" smtClean="0"/>
-              <a:pPr/>
-              <a:t>15</a:t>
-            </a:fld>
-            <a:endParaRPr lang="en-US"/>
-          </a:p>
-        </p:txBody>
-      </p:sp>
-      <p:sp>
-        <p:nvSpPr>
-          <p:cNvPr id="6" name="Rectangle 5">
-            <a:extLst>
-              <a:ext uri="{FF2B5EF4-FFF2-40B4-BE49-F238E27FC236}">
-                <a16:creationId xmlns:a16="http://schemas.microsoft.com/office/drawing/2014/main" id="{825FF640-9044-54D3-6848-5E7E062FCCBA}"/>
-              </a:ext>
-            </a:extLst>
-          </p:cNvPr>
-          <p:cNvSpPr/>
-          <p:nvPr/>
-        </p:nvSpPr>
-        <p:spPr>
-          <a:xfrm>
-            <a:off x="712008" y="2730708"/>
-            <a:ext cx="2788838" cy="1869743"/>
-          </a:xfrm>
-          <a:prstGeom prst="rect">
-            <a:avLst/>
-          </a:prstGeom>
-        </p:spPr>
-        <p:txBody>
-          <a:bodyPr wrap="square">
-            <a:spAutoFit/>
-          </a:bodyPr>
-          <a:lstStyle/>
-          <a:p>
-            <a:pPr marL="457200" marR="0">
-              <a:spcBef>
-                <a:spcPts val="0"/>
-              </a:spcBef>
-              <a:spcAft>
-                <a:spcPts val="0"/>
-              </a:spcAft>
-            </a:pPr>
-            <a:r>
-              <a:rPr lang="en-US" sz="1050" dirty="0">
-                <a:latin typeface="Calibri" panose="020F0502020204030204" pitchFamily="34" charset="0"/>
-                <a:ea typeface="Calibri" panose="020F0502020204030204" pitchFamily="34" charset="0"/>
-                <a:cs typeface="Times New Roman" panose="02020603050405020304" pitchFamily="18" charset="0"/>
-              </a:rPr>
-              <a:t>Kirtis Christensen, BSEET, MDIV, LTC</a:t>
-            </a:r>
-            <a:br>
-              <a:rPr lang="en-US" sz="1050" dirty="0">
-                <a:latin typeface="Calibri" panose="020F0502020204030204" pitchFamily="34" charset="0"/>
-                <a:ea typeface="Calibri" panose="020F0502020204030204" pitchFamily="34" charset="0"/>
-                <a:cs typeface="Times New Roman" panose="02020603050405020304" pitchFamily="18" charset="0"/>
-              </a:rPr>
-            </a:br>
-            <a:br>
-              <a:rPr lang="en-US" sz="1050" dirty="0">
-                <a:latin typeface="Calibri" panose="020F0502020204030204" pitchFamily="34" charset="0"/>
-                <a:ea typeface="Calibri" panose="020F0502020204030204" pitchFamily="34" charset="0"/>
-                <a:cs typeface="Times New Roman" panose="02020603050405020304" pitchFamily="18" charset="0"/>
-              </a:rPr>
-            </a:br>
-            <a:r>
-              <a:rPr lang="en-US" sz="1050" dirty="0">
-                <a:latin typeface="Calibri" panose="020F0502020204030204" pitchFamily="34" charset="0"/>
-                <a:ea typeface="Calibri" panose="020F0502020204030204" pitchFamily="34" charset="0"/>
-                <a:cs typeface="Times New Roman" panose="02020603050405020304" pitchFamily="18" charset="0"/>
-              </a:rPr>
-              <a:t>Kirtis Christensen is a Life Cycle Engineering Tool Strategist for Raytheon working in SETC. Experience spans Controls, Software Dev, SW QA, Risk Management, and Reliability Engineering (1994 to Present).  Completing Doctorate in Strategic Leadership. Chaplain, IN Army National Guard 2004 to present.</a:t>
-            </a:r>
-          </a:p>
-        </p:txBody>
-      </p:sp>
-      <p:pic>
-        <p:nvPicPr>
-          <p:cNvPr id="10" name="Picture 11">
-            <a:extLst>
-              <a:ext uri="{FF2B5EF4-FFF2-40B4-BE49-F238E27FC236}">
-                <a16:creationId xmlns:a16="http://schemas.microsoft.com/office/drawing/2014/main" id="{045D497F-8AF7-AEFD-0170-48D6EE2A6ECA}"/>
-              </a:ext>
-            </a:extLst>
-          </p:cNvPr>
-          <p:cNvPicPr>
-            <a:picLocks noChangeAspect="1"/>
-          </p:cNvPicPr>
-          <p:nvPr/>
-        </p:nvPicPr>
-        <p:blipFill>
-          <a:blip r:embed="rId4"/>
-          <a:srcRect/>
-          <a:stretch/>
-        </p:blipFill>
-        <p:spPr>
-          <a:xfrm>
-            <a:off x="1748564" y="1798251"/>
-            <a:ext cx="776613" cy="722648"/>
-          </a:xfrm>
-          <a:prstGeom prst="rect">
-            <a:avLst/>
-          </a:prstGeom>
-        </p:spPr>
-      </p:pic>
-      <p:sp>
-        <p:nvSpPr>
-          <p:cNvPr id="13" name="TextBox 12">
-            <a:extLst>
-              <a:ext uri="{FF2B5EF4-FFF2-40B4-BE49-F238E27FC236}">
-                <a16:creationId xmlns:a16="http://schemas.microsoft.com/office/drawing/2014/main" id="{ED89AA70-3F60-5F43-7808-2EC2A571C64B}"/>
-              </a:ext>
-            </a:extLst>
-          </p:cNvPr>
-          <p:cNvSpPr txBox="1"/>
-          <p:nvPr/>
-        </p:nvSpPr>
-        <p:spPr>
-          <a:xfrm>
-            <a:off x="1191334" y="5247036"/>
-            <a:ext cx="2529132" cy="253916"/>
-          </a:xfrm>
-          <a:prstGeom prst="rect">
-            <a:avLst/>
-          </a:prstGeom>
-          <a:noFill/>
-        </p:spPr>
-        <p:txBody>
-          <a:bodyPr wrap="square" rtlCol="0">
-            <a:spAutoFit/>
-          </a:bodyPr>
-          <a:lstStyle/>
-          <a:p>
-            <a:r>
-              <a:rPr lang="en-US" sz="1050" dirty="0"/>
-              <a:t>E-mail: Kirtis.a.Christensen@rtx.com</a:t>
-            </a:r>
-          </a:p>
-        </p:txBody>
-      </p:sp>
-      <p:sp>
-        <p:nvSpPr>
-          <p:cNvPr id="22" name="BJPseudoFooter">
-            <a:extLst>
-              <a:ext uri="{FF2B5EF4-FFF2-40B4-BE49-F238E27FC236}">
-                <a16:creationId xmlns:a16="http://schemas.microsoft.com/office/drawing/2014/main" id="{5B3C39DE-B36D-C25B-5544-F3A5FF8BBAED}"/>
-              </a:ext>
-            </a:extLst>
-          </p:cNvPr>
-          <p:cNvSpPr txBox="1"/>
-          <p:nvPr>
-            <p:custDataLst>
-              <p:tags r:id="rId1"/>
-            </p:custDataLst>
-          </p:nvPr>
-        </p:nvSpPr>
-        <p:spPr>
-          <a:xfrm>
-            <a:off x="3963044" y="6519446"/>
-            <a:ext cx="4265911" cy="338554"/>
-          </a:xfrm>
-          <a:prstGeom prst="rect">
-            <a:avLst/>
-          </a:prstGeom>
-          <a:noFill/>
-        </p:spPr>
-        <p:txBody>
-          <a:bodyPr vert="horz" wrap="none" rtlCol="0">
-            <a:spAutoFit/>
-          </a:bodyPr>
-          <a:lstStyle/>
-          <a:p>
-            <a:pPr algn="ctr"/>
-            <a:r>
-              <a:rPr lang="en-US" sz="800">
-                <a:solidFill>
-                  <a:srgbClr val="000000"/>
-                </a:solidFill>
-              </a:rPr>
-              <a:t>RTX Corporation (Corporate) - Company Use
-This document does not contain any export controlled technical material/data/information.</a:t>
-            </a:r>
-          </a:p>
-        </p:txBody>
-      </p:sp>
-    </p:spTree>
-    <p:extLst>
-      <p:ext uri="{BB962C8B-B14F-4D97-AF65-F5344CB8AC3E}">
-        <p14:creationId xmlns:p14="http://schemas.microsoft.com/office/powerpoint/2010/main" val="1887434109"/>
-      </p:ext>
-    </p:extLst>
-  </p:cSld>
-  <p:clrMapOvr>
-    <a:masterClrMapping/>
-  </p:clrMapOvr>
-</p:sld>
-</file>
-
-<file path=ppt/slides/slide16.xml><?xml version="1.0" encoding="utf-8"?>
-<p:sld xmlns:a="http://schemas.openxmlformats.org/drawingml/2006/main" xmlns:r="http://schemas.openxmlformats.org/officeDocument/2006/relationships" xmlns:p="http://schemas.openxmlformats.org/presentationml/2006/main">
-  <p:cSld>
-    <p:spTree>
-      <p:nvGrpSpPr>
-        <p:cNvPr id="1" name=""/>
-        <p:cNvGrpSpPr/>
-        <p:nvPr/>
-      </p:nvGrpSpPr>
-      <p:grpSpPr>
-        <a:xfrm>
-          <a:off x="0" y="0"/>
-          <a:ext cx="0" cy="0"/>
-          <a:chOff x="0" y="0"/>
-          <a:chExt cx="0" cy="0"/>
-        </a:xfrm>
-      </p:grpSpPr>
-      <p:sp>
-        <p:nvSpPr>
-          <p:cNvPr id="43" name="Picture Placeholder 42"/>
-          <p:cNvSpPr>
-            <a:spLocks noGrp="1"/>
-          </p:cNvSpPr>
-          <p:nvPr>
-            <p:ph type="pic" sz="quarter" idx="16"/>
-          </p:nvPr>
-        </p:nvSpPr>
-        <p:spPr>
-          <a:solidFill>
-            <a:schemeClr val="bg1">
-              <a:lumMod val="85000"/>
-            </a:schemeClr>
-          </a:solidFill>
-        </p:spPr>
-        <p:txBody>
-          <a:bodyPr/>
-          <a:lstStyle/>
-          <a:p>
-            <a:endParaRPr lang="en-US"/>
-          </a:p>
-        </p:txBody>
-      </p:sp>
-      <p:sp>
-        <p:nvSpPr>
-          <p:cNvPr id="34" name="Title 33"/>
-          <p:cNvSpPr>
-            <a:spLocks noGrp="1"/>
-          </p:cNvSpPr>
-          <p:nvPr>
-            <p:ph type="title"/>
-          </p:nvPr>
-        </p:nvSpPr>
-        <p:spPr/>
-        <p:txBody>
-          <a:bodyPr/>
-          <a:lstStyle/>
-          <a:p>
-            <a:r>
-              <a:rPr lang="en-US"/>
-              <a:t>Thank you.</a:t>
-            </a:r>
-          </a:p>
-        </p:txBody>
-      </p:sp>
-      <p:sp>
-        <p:nvSpPr>
-          <p:cNvPr id="5" name="Slide Number Placeholder 1">
-            <a:extLst>
-              <a:ext uri="{FF2B5EF4-FFF2-40B4-BE49-F238E27FC236}">
-                <a16:creationId xmlns:a16="http://schemas.microsoft.com/office/drawing/2014/main" id="{5A96F879-AA71-7D01-D624-3E000661B7C7}"/>
-              </a:ext>
-            </a:extLst>
-          </p:cNvPr>
-          <p:cNvSpPr>
-            <a:spLocks noGrp="1"/>
-          </p:cNvSpPr>
-          <p:nvPr>
-            <p:ph type="sldNum" sz="quarter" idx="4"/>
-          </p:nvPr>
-        </p:nvSpPr>
-        <p:spPr>
-          <a:xfrm>
-            <a:off x="10983397" y="6433754"/>
-            <a:ext cx="531946" cy="365125"/>
-          </a:xfrm>
-          <a:prstGeom prst="rect">
-            <a:avLst/>
-          </a:prstGeom>
-        </p:spPr>
-        <p:txBody>
-          <a:bodyPr/>
-          <a:lstStyle/>
-          <a:p>
-            <a:fld id="{07165E6F-54ED-4977-A15E-D44BE7238A65}" type="slidenum">
-              <a:rPr lang="en-US" smtClean="0"/>
-              <a:pPr/>
-              <a:t>16</a:t>
-            </a:fld>
-            <a:endParaRPr lang="en-US"/>
-          </a:p>
-        </p:txBody>
-      </p:sp>
-      <p:sp>
-        <p:nvSpPr>
-          <p:cNvPr id="9" name="BJPseudoFooter">
-            <a:extLst>
-              <a:ext uri="{FF2B5EF4-FFF2-40B4-BE49-F238E27FC236}">
-                <a16:creationId xmlns:a16="http://schemas.microsoft.com/office/drawing/2014/main" id="{EB01A866-A350-BA93-7106-CE30F312446C}"/>
-              </a:ext>
-            </a:extLst>
-          </p:cNvPr>
-          <p:cNvSpPr txBox="1"/>
-          <p:nvPr>
-            <p:custDataLst>
-              <p:tags r:id="rId1"/>
-            </p:custDataLst>
-          </p:nvPr>
-        </p:nvSpPr>
-        <p:spPr>
-          <a:xfrm>
-            <a:off x="3963044" y="6519446"/>
-            <a:ext cx="4265911" cy="338554"/>
-          </a:xfrm>
-          <a:prstGeom prst="rect">
-            <a:avLst/>
-          </a:prstGeom>
-          <a:noFill/>
-        </p:spPr>
-        <p:txBody>
-          <a:bodyPr vert="horz" wrap="none" rtlCol="0">
-            <a:spAutoFit/>
-          </a:bodyPr>
-          <a:lstStyle/>
-          <a:p>
-            <a:pPr algn="ctr"/>
-            <a:r>
-              <a:rPr lang="en-US" sz="800">
-                <a:solidFill>
-                  <a:srgbClr val="000000"/>
-                </a:solidFill>
-              </a:rPr>
-              <a:t>RTX Corporation (Corporate) - Company Use
-This document does not contain any export controlled technical material/data/information.</a:t>
-            </a:r>
-          </a:p>
-        </p:txBody>
-      </p:sp>
-    </p:spTree>
-    <p:extLst>
-      <p:ext uri="{BB962C8B-B14F-4D97-AF65-F5344CB8AC3E}">
-        <p14:creationId xmlns:p14="http://schemas.microsoft.com/office/powerpoint/2010/main" val="1856117729"/>
-      </p:ext>
-    </p:extLst>
-  </p:cSld>
-  <p:clrMapOvr>
-    <a:masterClrMapping/>
-  </p:clrMapOvr>
-  <mc:AlternateContent xmlns:mc="http://schemas.openxmlformats.org/markup-compatibility/2006" xmlns:p14="http://schemas.microsoft.com/office/powerpoint/2010/main">
-    <mc:Choice Requires="p14">
-      <p:transition p14:dur="0"/>
-    </mc:Choice>
-    <mc:Fallback xmlns="">
-      <p:transition/>
-    </mc:Fallback>
-  </mc:AlternateContent>
-</p:sld>
-</file>
-
-<file path=ppt/slides/slide17.xml><?xml version="1.0" encoding="utf-8"?>
-<p:sld xmlns:a="http://schemas.openxmlformats.org/drawingml/2006/main" xmlns:r="http://schemas.openxmlformats.org/officeDocument/2006/relationships" xmlns:p="http://schemas.openxmlformats.org/presentationml/2006/main">
-  <p:cSld>
-    <p:spTree>
-      <p:nvGrpSpPr>
-        <p:cNvPr id="1" name=""/>
-        <p:cNvGrpSpPr/>
-        <p:nvPr/>
-      </p:nvGrpSpPr>
-      <p:grpSpPr>
-        <a:xfrm>
-          <a:off x="0" y="0"/>
-          <a:ext cx="0" cy="0"/>
-          <a:chOff x="0" y="0"/>
-          <a:chExt cx="0" cy="0"/>
-        </a:xfrm>
-      </p:grpSpPr>
-      <p:sp>
-        <p:nvSpPr>
-          <p:cNvPr id="2" name="Slide Number Placeholder 1">
-            <a:extLst>
-              <a:ext uri="{FF2B5EF4-FFF2-40B4-BE49-F238E27FC236}">
-                <a16:creationId xmlns:a16="http://schemas.microsoft.com/office/drawing/2014/main" id="{D8B4323C-E4D8-3ACE-EAC9-39F9A4544022}"/>
-              </a:ext>
-            </a:extLst>
-          </p:cNvPr>
-          <p:cNvSpPr>
-            <a:spLocks noGrp="1"/>
-          </p:cNvSpPr>
-          <p:nvPr>
-            <p:ph type="sldNum" sz="quarter" idx="4"/>
-          </p:nvPr>
-        </p:nvSpPr>
-        <p:spPr>
-          <a:xfrm>
-            <a:off x="11559540" y="6492875"/>
-            <a:ext cx="531946" cy="365125"/>
-          </a:xfrm>
-        </p:spPr>
-        <p:txBody>
-          <a:bodyPr/>
-          <a:lstStyle/>
-          <a:p>
-            <a:fld id="{07165E6F-54ED-4977-A15E-D44BE7238A65}" type="slidenum">
-              <a:rPr lang="en-US" smtClean="0"/>
-              <a:pPr/>
-              <a:t>17</a:t>
-            </a:fld>
-            <a:endParaRPr lang="en-US"/>
-          </a:p>
-        </p:txBody>
-      </p:sp>
-      <p:sp>
-        <p:nvSpPr>
-          <p:cNvPr id="9" name="BJPseudoFooter">
-            <a:extLst>
-              <a:ext uri="{FF2B5EF4-FFF2-40B4-BE49-F238E27FC236}">
-                <a16:creationId xmlns:a16="http://schemas.microsoft.com/office/drawing/2014/main" id="{8337B924-4022-4CD2-3322-6BADB949F2D5}"/>
-              </a:ext>
-            </a:extLst>
-          </p:cNvPr>
-          <p:cNvSpPr txBox="1"/>
-          <p:nvPr>
-            <p:custDataLst>
-              <p:tags r:id="rId1"/>
-            </p:custDataLst>
-          </p:nvPr>
-        </p:nvSpPr>
-        <p:spPr>
-          <a:xfrm>
-            <a:off x="3963044" y="6519446"/>
-            <a:ext cx="4265911" cy="338554"/>
-          </a:xfrm>
-          <a:prstGeom prst="rect">
-            <a:avLst/>
-          </a:prstGeom>
-          <a:noFill/>
-        </p:spPr>
-        <p:txBody>
-          <a:bodyPr vert="horz" wrap="none" rtlCol="0">
-            <a:spAutoFit/>
-          </a:bodyPr>
-          <a:lstStyle/>
-          <a:p>
-            <a:pPr algn="ctr"/>
-            <a:r>
-              <a:rPr lang="en-US" sz="800">
-                <a:solidFill>
-                  <a:srgbClr val="000000"/>
-                </a:solidFill>
-              </a:rPr>
-              <a:t>RTX Corporation (Corporate) - Company Use
-This document does not contain any export controlled technical material/data/information.</a:t>
-            </a:r>
-          </a:p>
-        </p:txBody>
-      </p:sp>
-    </p:spTree>
-    <p:extLst>
-      <p:ext uri="{BB962C8B-B14F-4D97-AF65-F5344CB8AC3E}">
-        <p14:creationId xmlns:p14="http://schemas.microsoft.com/office/powerpoint/2010/main" val="417666251"/>
       </p:ext>
     </p:extLst>
   </p:cSld>
@@ -12744,6 +14994,562 @@
     <p:extLst>
       <p:ext uri="{BB962C8B-B14F-4D97-AF65-F5344CB8AC3E}">
         <p14:creationId xmlns:p14="http://schemas.microsoft.com/office/powerpoint/2010/main" val="2695307528"/>
+      </p:ext>
+    </p:extLst>
+  </p:cSld>
+  <p:clrMapOvr>
+    <a:masterClrMapping/>
+  </p:clrMapOvr>
+</p:sld>
+</file>
+
+<file path=ppt/slides/slide20.xml><?xml version="1.0" encoding="utf-8"?>
+<p:sld xmlns:a="http://schemas.openxmlformats.org/drawingml/2006/main" xmlns:r="http://schemas.openxmlformats.org/officeDocument/2006/relationships" xmlns:p="http://schemas.openxmlformats.org/presentationml/2006/main">
+  <p:cSld>
+    <p:spTree>
+      <p:nvGrpSpPr>
+        <p:cNvPr id="1" name=""/>
+        <p:cNvGrpSpPr/>
+        <p:nvPr/>
+      </p:nvGrpSpPr>
+      <p:grpSpPr>
+        <a:xfrm>
+          <a:off x="0" y="0"/>
+          <a:ext cx="0" cy="0"/>
+          <a:chOff x="0" y="0"/>
+          <a:chExt cx="0" cy="0"/>
+        </a:xfrm>
+      </p:grpSpPr>
+      <p:sp>
+        <p:nvSpPr>
+          <p:cNvPr id="2" name="Title 1">
+            <a:extLst>
+              <a:ext uri="{FF2B5EF4-FFF2-40B4-BE49-F238E27FC236}">
+                <a16:creationId xmlns:a16="http://schemas.microsoft.com/office/drawing/2014/main" id="{A77F676C-8AEB-CAF9-4C69-7D5ADC490DA9}"/>
+              </a:ext>
+            </a:extLst>
+          </p:cNvPr>
+          <p:cNvSpPr>
+            <a:spLocks noGrp="1"/>
+          </p:cNvSpPr>
+          <p:nvPr>
+            <p:ph type="title"/>
+          </p:nvPr>
+        </p:nvSpPr>
+        <p:spPr/>
+        <p:txBody>
+          <a:bodyPr/>
+          <a:lstStyle/>
+          <a:p>
+            <a:r>
+              <a:rPr lang="en-US" dirty="0"/>
+              <a:t>BIO</a:t>
+            </a:r>
+            <a:br>
+              <a:rPr lang="en-US" dirty="0"/>
+            </a:br>
+            <a:endParaRPr lang="en-US" dirty="0">
+              <a:solidFill>
+                <a:srgbClr val="FF0000"/>
+              </a:solidFill>
+            </a:endParaRPr>
+          </a:p>
+        </p:txBody>
+      </p:sp>
+      <p:sp>
+        <p:nvSpPr>
+          <p:cNvPr id="3" name="Slide Number Placeholder 2">
+            <a:extLst>
+              <a:ext uri="{FF2B5EF4-FFF2-40B4-BE49-F238E27FC236}">
+                <a16:creationId xmlns:a16="http://schemas.microsoft.com/office/drawing/2014/main" id="{A389B7F3-7271-C06F-E5A7-0F686CD81DD7}"/>
+              </a:ext>
+            </a:extLst>
+          </p:cNvPr>
+          <p:cNvSpPr>
+            <a:spLocks noGrp="1"/>
+          </p:cNvSpPr>
+          <p:nvPr>
+            <p:ph type="sldNum" sz="quarter" idx="4"/>
+          </p:nvPr>
+        </p:nvSpPr>
+        <p:spPr>
+          <a:xfrm>
+            <a:off x="10983397" y="6433754"/>
+            <a:ext cx="531946" cy="365125"/>
+          </a:xfrm>
+        </p:spPr>
+        <p:txBody>
+          <a:bodyPr/>
+          <a:lstStyle/>
+          <a:p>
+            <a:fld id="{07165E6F-54ED-4977-A15E-D44BE7238A65}" type="slidenum">
+              <a:rPr lang="en-US" smtClean="0"/>
+              <a:pPr/>
+              <a:t>20</a:t>
+            </a:fld>
+            <a:endParaRPr lang="en-US"/>
+          </a:p>
+        </p:txBody>
+      </p:sp>
+      <p:sp>
+        <p:nvSpPr>
+          <p:cNvPr id="6" name="Rectangle 5">
+            <a:extLst>
+              <a:ext uri="{FF2B5EF4-FFF2-40B4-BE49-F238E27FC236}">
+                <a16:creationId xmlns:a16="http://schemas.microsoft.com/office/drawing/2014/main" id="{825FF640-9044-54D3-6848-5E7E062FCCBA}"/>
+              </a:ext>
+            </a:extLst>
+          </p:cNvPr>
+          <p:cNvSpPr/>
+          <p:nvPr/>
+        </p:nvSpPr>
+        <p:spPr>
+          <a:xfrm>
+            <a:off x="712008" y="2730708"/>
+            <a:ext cx="2788838" cy="1869743"/>
+          </a:xfrm>
+          <a:prstGeom prst="rect">
+            <a:avLst/>
+          </a:prstGeom>
+        </p:spPr>
+        <p:txBody>
+          <a:bodyPr wrap="square">
+            <a:spAutoFit/>
+          </a:bodyPr>
+          <a:lstStyle/>
+          <a:p>
+            <a:pPr marL="457200" marR="0">
+              <a:spcBef>
+                <a:spcPts val="0"/>
+              </a:spcBef>
+              <a:spcAft>
+                <a:spcPts val="0"/>
+              </a:spcAft>
+            </a:pPr>
+            <a:r>
+              <a:rPr lang="en-US" sz="1050" dirty="0">
+                <a:latin typeface="Calibri" panose="020F0502020204030204" pitchFamily="34" charset="0"/>
+                <a:ea typeface="Calibri" panose="020F0502020204030204" pitchFamily="34" charset="0"/>
+                <a:cs typeface="Times New Roman" panose="02020603050405020304" pitchFamily="18" charset="0"/>
+              </a:rPr>
+              <a:t>Kirtis Christensen, BSEET, MDIV, LTC</a:t>
+            </a:r>
+            <a:br>
+              <a:rPr lang="en-US" sz="1050" dirty="0">
+                <a:latin typeface="Calibri" panose="020F0502020204030204" pitchFamily="34" charset="0"/>
+                <a:ea typeface="Calibri" panose="020F0502020204030204" pitchFamily="34" charset="0"/>
+                <a:cs typeface="Times New Roman" panose="02020603050405020304" pitchFamily="18" charset="0"/>
+              </a:rPr>
+            </a:br>
+            <a:br>
+              <a:rPr lang="en-US" sz="1050" dirty="0">
+                <a:latin typeface="Calibri" panose="020F0502020204030204" pitchFamily="34" charset="0"/>
+                <a:ea typeface="Calibri" panose="020F0502020204030204" pitchFamily="34" charset="0"/>
+                <a:cs typeface="Times New Roman" panose="02020603050405020304" pitchFamily="18" charset="0"/>
+              </a:rPr>
+            </a:br>
+            <a:r>
+              <a:rPr lang="en-US" sz="1050" dirty="0">
+                <a:latin typeface="Calibri" panose="020F0502020204030204" pitchFamily="34" charset="0"/>
+                <a:ea typeface="Calibri" panose="020F0502020204030204" pitchFamily="34" charset="0"/>
+                <a:cs typeface="Times New Roman" panose="02020603050405020304" pitchFamily="18" charset="0"/>
+              </a:rPr>
+              <a:t>Kirtis Christensen is a Life Cycle Engineering Tool Strategist for Raytheon working in SETC. Experience spans Controls, Software Dev, SW QA, Risk Management, and Reliability Engineering (1994 to Present).  Completing Doctorate in Strategic Leadership. Chaplain, IN Army National Guard 2004 to present.</a:t>
+            </a:r>
+          </a:p>
+        </p:txBody>
+      </p:sp>
+      <p:pic>
+        <p:nvPicPr>
+          <p:cNvPr id="10" name="Picture 11">
+            <a:extLst>
+              <a:ext uri="{FF2B5EF4-FFF2-40B4-BE49-F238E27FC236}">
+                <a16:creationId xmlns:a16="http://schemas.microsoft.com/office/drawing/2014/main" id="{045D497F-8AF7-AEFD-0170-48D6EE2A6ECA}"/>
+              </a:ext>
+            </a:extLst>
+          </p:cNvPr>
+          <p:cNvPicPr>
+            <a:picLocks noChangeAspect="1"/>
+          </p:cNvPicPr>
+          <p:nvPr/>
+        </p:nvPicPr>
+        <p:blipFill>
+          <a:blip r:embed="rId4"/>
+          <a:srcRect/>
+          <a:stretch/>
+        </p:blipFill>
+        <p:spPr>
+          <a:xfrm>
+            <a:off x="1748564" y="1798251"/>
+            <a:ext cx="776613" cy="722648"/>
+          </a:xfrm>
+          <a:prstGeom prst="rect">
+            <a:avLst/>
+          </a:prstGeom>
+        </p:spPr>
+      </p:pic>
+      <p:sp>
+        <p:nvSpPr>
+          <p:cNvPr id="13" name="TextBox 12">
+            <a:extLst>
+              <a:ext uri="{FF2B5EF4-FFF2-40B4-BE49-F238E27FC236}">
+                <a16:creationId xmlns:a16="http://schemas.microsoft.com/office/drawing/2014/main" id="{ED89AA70-3F60-5F43-7808-2EC2A571C64B}"/>
+              </a:ext>
+            </a:extLst>
+          </p:cNvPr>
+          <p:cNvSpPr txBox="1"/>
+          <p:nvPr/>
+        </p:nvSpPr>
+        <p:spPr>
+          <a:xfrm>
+            <a:off x="1191334" y="5247036"/>
+            <a:ext cx="2529132" cy="253916"/>
+          </a:xfrm>
+          <a:prstGeom prst="rect">
+            <a:avLst/>
+          </a:prstGeom>
+          <a:noFill/>
+        </p:spPr>
+        <p:txBody>
+          <a:bodyPr wrap="square" rtlCol="0">
+            <a:spAutoFit/>
+          </a:bodyPr>
+          <a:lstStyle/>
+          <a:p>
+            <a:r>
+              <a:rPr lang="en-US" sz="1050" dirty="0"/>
+              <a:t>E-mail: Kirtis.a.Christensen@rtx.com</a:t>
+            </a:r>
+          </a:p>
+        </p:txBody>
+      </p:sp>
+      <p:sp>
+        <p:nvSpPr>
+          <p:cNvPr id="22" name="BJPseudoFooter">
+            <a:extLst>
+              <a:ext uri="{FF2B5EF4-FFF2-40B4-BE49-F238E27FC236}">
+                <a16:creationId xmlns:a16="http://schemas.microsoft.com/office/drawing/2014/main" id="{5B3C39DE-B36D-C25B-5544-F3A5FF8BBAED}"/>
+              </a:ext>
+            </a:extLst>
+          </p:cNvPr>
+          <p:cNvSpPr txBox="1"/>
+          <p:nvPr>
+            <p:custDataLst>
+              <p:tags r:id="rId1"/>
+            </p:custDataLst>
+          </p:nvPr>
+        </p:nvSpPr>
+        <p:spPr>
+          <a:xfrm>
+            <a:off x="3963044" y="6519446"/>
+            <a:ext cx="4265911" cy="338554"/>
+          </a:xfrm>
+          <a:prstGeom prst="rect">
+            <a:avLst/>
+          </a:prstGeom>
+          <a:noFill/>
+        </p:spPr>
+        <p:txBody>
+          <a:bodyPr vert="horz" wrap="none" rtlCol="0">
+            <a:spAutoFit/>
+          </a:bodyPr>
+          <a:lstStyle/>
+          <a:p>
+            <a:pPr algn="ctr"/>
+            <a:r>
+              <a:rPr lang="en-US" sz="800">
+                <a:solidFill>
+                  <a:srgbClr val="000000"/>
+                </a:solidFill>
+              </a:rPr>
+              <a:t>RTX Corporation (Corporate) - Company Use
+This document does not contain any export controlled technical material/data/information.</a:t>
+            </a:r>
+          </a:p>
+        </p:txBody>
+      </p:sp>
+    </p:spTree>
+    <p:extLst>
+      <p:ext uri="{BB962C8B-B14F-4D97-AF65-F5344CB8AC3E}">
+        <p14:creationId xmlns:p14="http://schemas.microsoft.com/office/powerpoint/2010/main" val="1887434109"/>
+      </p:ext>
+    </p:extLst>
+  </p:cSld>
+  <p:clrMapOvr>
+    <a:masterClrMapping/>
+  </p:clrMapOvr>
+</p:sld>
+</file>
+
+<file path=ppt/slides/slide21.xml><?xml version="1.0" encoding="utf-8"?>
+<p:sld xmlns:a="http://schemas.openxmlformats.org/drawingml/2006/main" xmlns:r="http://schemas.openxmlformats.org/officeDocument/2006/relationships" xmlns:p="http://schemas.openxmlformats.org/presentationml/2006/main">
+  <p:cSld>
+    <p:spTree>
+      <p:nvGrpSpPr>
+        <p:cNvPr id="1" name=""/>
+        <p:cNvGrpSpPr/>
+        <p:nvPr/>
+      </p:nvGrpSpPr>
+      <p:grpSpPr>
+        <a:xfrm>
+          <a:off x="0" y="0"/>
+          <a:ext cx="0" cy="0"/>
+          <a:chOff x="0" y="0"/>
+          <a:chExt cx="0" cy="0"/>
+        </a:xfrm>
+      </p:grpSpPr>
+      <p:sp>
+        <p:nvSpPr>
+          <p:cNvPr id="43" name="Picture Placeholder 42"/>
+          <p:cNvSpPr>
+            <a:spLocks noGrp="1"/>
+          </p:cNvSpPr>
+          <p:nvPr>
+            <p:ph type="pic" sz="quarter" idx="16"/>
+          </p:nvPr>
+        </p:nvSpPr>
+        <p:spPr>
+          <a:solidFill>
+            <a:schemeClr val="bg1">
+              <a:lumMod val="85000"/>
+            </a:schemeClr>
+          </a:solidFill>
+        </p:spPr>
+        <p:txBody>
+          <a:bodyPr/>
+          <a:lstStyle/>
+          <a:p>
+            <a:endParaRPr lang="en-US"/>
+          </a:p>
+        </p:txBody>
+      </p:sp>
+      <p:sp>
+        <p:nvSpPr>
+          <p:cNvPr id="34" name="Title 33"/>
+          <p:cNvSpPr>
+            <a:spLocks noGrp="1"/>
+          </p:cNvSpPr>
+          <p:nvPr>
+            <p:ph type="title"/>
+          </p:nvPr>
+        </p:nvSpPr>
+        <p:spPr/>
+        <p:txBody>
+          <a:bodyPr/>
+          <a:lstStyle/>
+          <a:p>
+            <a:r>
+              <a:rPr lang="en-US"/>
+              <a:t>Thank you.</a:t>
+            </a:r>
+          </a:p>
+        </p:txBody>
+      </p:sp>
+      <p:sp>
+        <p:nvSpPr>
+          <p:cNvPr id="5" name="Slide Number Placeholder 1">
+            <a:extLst>
+              <a:ext uri="{FF2B5EF4-FFF2-40B4-BE49-F238E27FC236}">
+                <a16:creationId xmlns:a16="http://schemas.microsoft.com/office/drawing/2014/main" id="{5A96F879-AA71-7D01-D624-3E000661B7C7}"/>
+              </a:ext>
+            </a:extLst>
+          </p:cNvPr>
+          <p:cNvSpPr>
+            <a:spLocks noGrp="1"/>
+          </p:cNvSpPr>
+          <p:nvPr>
+            <p:ph type="sldNum" sz="quarter" idx="4"/>
+          </p:nvPr>
+        </p:nvSpPr>
+        <p:spPr>
+          <a:xfrm>
+            <a:off x="10983397" y="6433754"/>
+            <a:ext cx="531946" cy="365125"/>
+          </a:xfrm>
+          <a:prstGeom prst="rect">
+            <a:avLst/>
+          </a:prstGeom>
+        </p:spPr>
+        <p:txBody>
+          <a:bodyPr/>
+          <a:lstStyle/>
+          <a:p>
+            <a:fld id="{07165E6F-54ED-4977-A15E-D44BE7238A65}" type="slidenum">
+              <a:rPr lang="en-US" smtClean="0"/>
+              <a:pPr/>
+              <a:t>21</a:t>
+            </a:fld>
+            <a:endParaRPr lang="en-US"/>
+          </a:p>
+        </p:txBody>
+      </p:sp>
+      <p:sp>
+        <p:nvSpPr>
+          <p:cNvPr id="9" name="BJPseudoFooter">
+            <a:extLst>
+              <a:ext uri="{FF2B5EF4-FFF2-40B4-BE49-F238E27FC236}">
+                <a16:creationId xmlns:a16="http://schemas.microsoft.com/office/drawing/2014/main" id="{EB01A866-A350-BA93-7106-CE30F312446C}"/>
+              </a:ext>
+            </a:extLst>
+          </p:cNvPr>
+          <p:cNvSpPr txBox="1"/>
+          <p:nvPr>
+            <p:custDataLst>
+              <p:tags r:id="rId1"/>
+            </p:custDataLst>
+          </p:nvPr>
+        </p:nvSpPr>
+        <p:spPr>
+          <a:xfrm>
+            <a:off x="3963044" y="6519446"/>
+            <a:ext cx="4265911" cy="338554"/>
+          </a:xfrm>
+          <a:prstGeom prst="rect">
+            <a:avLst/>
+          </a:prstGeom>
+          <a:noFill/>
+        </p:spPr>
+        <p:txBody>
+          <a:bodyPr vert="horz" wrap="none" rtlCol="0">
+            <a:spAutoFit/>
+          </a:bodyPr>
+          <a:lstStyle/>
+          <a:p>
+            <a:pPr algn="ctr"/>
+            <a:r>
+              <a:rPr lang="en-US" sz="800">
+                <a:solidFill>
+                  <a:srgbClr val="000000"/>
+                </a:solidFill>
+              </a:rPr>
+              <a:t>RTX Corporation (Corporate) - Company Use
+This document does not contain any export controlled technical material/data/information.</a:t>
+            </a:r>
+          </a:p>
+        </p:txBody>
+      </p:sp>
+    </p:spTree>
+    <p:extLst>
+      <p:ext uri="{BB962C8B-B14F-4D97-AF65-F5344CB8AC3E}">
+        <p14:creationId xmlns:p14="http://schemas.microsoft.com/office/powerpoint/2010/main" val="1856117729"/>
+      </p:ext>
+    </p:extLst>
+  </p:cSld>
+  <p:clrMapOvr>
+    <a:masterClrMapping/>
+  </p:clrMapOvr>
+  <mc:AlternateContent xmlns:mc="http://schemas.openxmlformats.org/markup-compatibility/2006" xmlns:p14="http://schemas.microsoft.com/office/powerpoint/2010/main">
+    <mc:Choice Requires="p14">
+      <p:transition p14:dur="0"/>
+    </mc:Choice>
+    <mc:Fallback xmlns="">
+      <p:transition/>
+    </mc:Fallback>
+  </mc:AlternateContent>
+</p:sld>
+</file>
+
+<file path=ppt/slides/slide22.xml><?xml version="1.0" encoding="utf-8"?>
+<p:sld xmlns:a="http://schemas.openxmlformats.org/drawingml/2006/main" xmlns:r="http://schemas.openxmlformats.org/officeDocument/2006/relationships" xmlns:p="http://schemas.openxmlformats.org/presentationml/2006/main">
+  <p:cSld>
+    <p:spTree>
+      <p:nvGrpSpPr>
+        <p:cNvPr id="1" name=""/>
+        <p:cNvGrpSpPr/>
+        <p:nvPr/>
+      </p:nvGrpSpPr>
+      <p:grpSpPr>
+        <a:xfrm>
+          <a:off x="0" y="0"/>
+          <a:ext cx="0" cy="0"/>
+          <a:chOff x="0" y="0"/>
+          <a:chExt cx="0" cy="0"/>
+        </a:xfrm>
+      </p:grpSpPr>
+      <p:sp>
+        <p:nvSpPr>
+          <p:cNvPr id="2" name="Slide Number Placeholder 1">
+            <a:extLst>
+              <a:ext uri="{FF2B5EF4-FFF2-40B4-BE49-F238E27FC236}">
+                <a16:creationId xmlns:a16="http://schemas.microsoft.com/office/drawing/2014/main" id="{D8B4323C-E4D8-3ACE-EAC9-39F9A4544022}"/>
+              </a:ext>
+            </a:extLst>
+          </p:cNvPr>
+          <p:cNvSpPr>
+            <a:spLocks noGrp="1"/>
+          </p:cNvSpPr>
+          <p:nvPr>
+            <p:ph type="sldNum" sz="quarter" idx="4"/>
+          </p:nvPr>
+        </p:nvSpPr>
+        <p:spPr>
+          <a:xfrm>
+            <a:off x="11559540" y="6492875"/>
+            <a:ext cx="531946" cy="365125"/>
+          </a:xfrm>
+        </p:spPr>
+        <p:txBody>
+          <a:bodyPr/>
+          <a:lstStyle/>
+          <a:p>
+            <a:fld id="{07165E6F-54ED-4977-A15E-D44BE7238A65}" type="slidenum">
+              <a:rPr lang="en-US" smtClean="0"/>
+              <a:pPr/>
+              <a:t>22</a:t>
+            </a:fld>
+            <a:endParaRPr lang="en-US"/>
+          </a:p>
+        </p:txBody>
+      </p:sp>
+      <p:sp>
+        <p:nvSpPr>
+          <p:cNvPr id="9" name="BJPseudoFooter">
+            <a:extLst>
+              <a:ext uri="{FF2B5EF4-FFF2-40B4-BE49-F238E27FC236}">
+                <a16:creationId xmlns:a16="http://schemas.microsoft.com/office/drawing/2014/main" id="{8337B924-4022-4CD2-3322-6BADB949F2D5}"/>
+              </a:ext>
+            </a:extLst>
+          </p:cNvPr>
+          <p:cNvSpPr txBox="1"/>
+          <p:nvPr>
+            <p:custDataLst>
+              <p:tags r:id="rId1"/>
+            </p:custDataLst>
+          </p:nvPr>
+        </p:nvSpPr>
+        <p:spPr>
+          <a:xfrm>
+            <a:off x="3963044" y="6519446"/>
+            <a:ext cx="4265911" cy="338554"/>
+          </a:xfrm>
+          <a:prstGeom prst="rect">
+            <a:avLst/>
+          </a:prstGeom>
+          <a:noFill/>
+        </p:spPr>
+        <p:txBody>
+          <a:bodyPr vert="horz" wrap="none" rtlCol="0">
+            <a:spAutoFit/>
+          </a:bodyPr>
+          <a:lstStyle/>
+          <a:p>
+            <a:pPr algn="ctr"/>
+            <a:r>
+              <a:rPr lang="en-US" sz="800">
+                <a:solidFill>
+                  <a:srgbClr val="000000"/>
+                </a:solidFill>
+              </a:rPr>
+              <a:t>RTX Corporation (Corporate) - Company Use
+This document does not contain any export controlled technical material/data/information.</a:t>
+            </a:r>
+          </a:p>
+        </p:txBody>
+      </p:sp>
+    </p:spTree>
+    <p:extLst>
+      <p:ext uri="{BB962C8B-B14F-4D97-AF65-F5344CB8AC3E}">
+        <p14:creationId xmlns:p14="http://schemas.microsoft.com/office/powerpoint/2010/main" val="417666251"/>
       </p:ext>
     </p:extLst>
   </p:cSld>
@@ -15821,7 +18627,7 @@
         <p:cNvPr id="1" name="">
           <a:extLst>
             <a:ext uri="{FF2B5EF4-FFF2-40B4-BE49-F238E27FC236}">
-              <a16:creationId xmlns:a16="http://schemas.microsoft.com/office/drawing/2014/main" id="{808C81DB-1F87-6E78-D79F-C9AC1B330FBD}"/>
+              <a16:creationId xmlns:a16="http://schemas.microsoft.com/office/drawing/2014/main" id="{5042785D-F173-1F09-4F7A-F33AD5B351E1}"/>
             </a:ext>
           </a:extLst>
         </p:cNvPr>
@@ -15841,7 +18647,7 @@
           <p:cNvPr id="449" name="Title 448">
             <a:extLst>
               <a:ext uri="{FF2B5EF4-FFF2-40B4-BE49-F238E27FC236}">
-                <a16:creationId xmlns:a16="http://schemas.microsoft.com/office/drawing/2014/main" id="{3CD6CC17-F17B-C7A5-3599-64B03924F598}"/>
+                <a16:creationId xmlns:a16="http://schemas.microsoft.com/office/drawing/2014/main" id="{5E77A042-FB40-F7CE-95D9-0854F1CC08FF}"/>
               </a:ext>
             </a:extLst>
           </p:cNvPr>
@@ -15855,7 +18661,7 @@
         <p:spPr>
           <a:xfrm>
             <a:off x="694944" y="466347"/>
-            <a:ext cx="3545076" cy="1676960"/>
+            <a:ext cx="3224745" cy="1632419"/>
           </a:xfrm>
         </p:spPr>
         <p:txBody>
@@ -15864,18 +18670,23 @@
           <a:p>
             <a:r>
               <a:rPr lang="en-US" dirty="0"/>
-              <a:t>Section 6: </a:t>
+              <a:t>Section 5: </a:t>
             </a:r>
             <a:br>
               <a:rPr lang="en-US" dirty="0"/>
             </a:br>
             <a:r>
               <a:rPr lang="en-US" dirty="0"/>
-              <a:t>Step 4 - Calibrated Priors (Two Paths)</a:t>
-            </a:r>
-            <a:br>
+              <a:t>Step 3 – Iterative (</a:t>
+            </a:r>
+            <a:r>
+              <a:rPr lang="en-US" dirty="0" err="1"/>
+              <a:t>VoI</a:t>
+            </a:r>
+            <a:r>
               <a:rPr lang="en-US" dirty="0"/>
-            </a:br>
+              <a:t>) Analysis</a:t>
+            </a:r>
             <a:br>
               <a:rPr lang="en-US" dirty="0"/>
             </a:br>
@@ -15897,7 +18708,7 @@
           <p:cNvPr id="451" name="Text Placeholder 450">
             <a:extLst>
               <a:ext uri="{FF2B5EF4-FFF2-40B4-BE49-F238E27FC236}">
-                <a16:creationId xmlns:a16="http://schemas.microsoft.com/office/drawing/2014/main" id="{AF0D26D8-AEA4-E042-A762-803B33C3A7B7}"/>
+                <a16:creationId xmlns:a16="http://schemas.microsoft.com/office/drawing/2014/main" id="{6821F44C-1F6E-CF39-FFDB-CA78AF7172BA}"/>
               </a:ext>
             </a:extLst>
           </p:cNvPr>
@@ -15910,26 +18721,17 @@
         </p:nvSpPr>
         <p:spPr>
           <a:xfrm>
-            <a:off x="65930" y="4707219"/>
-            <a:ext cx="5519481" cy="1585421"/>
+            <a:off x="694944" y="5712723"/>
+            <a:ext cx="10820399" cy="566309"/>
           </a:xfrm>
         </p:spPr>
         <p:txBody>
           <a:bodyPr/>
           <a:lstStyle/>
           <a:p>
-            <a:pPr algn="l"/>
             <a:r>
               <a:rPr lang="en-US" b="0" dirty="0"/>
-              <a:t>Hubbard emphasizes the importance of calibrated priors in </a:t>
-            </a:r>
-            <a:r>
-              <a:rPr lang="en-US" b="0" i="1" dirty="0"/>
-              <a:t>How to Measure Anything</a:t>
-            </a:r>
-            <a:r>
-              <a:rPr lang="en-US" b="0" dirty="0"/>
-              <a:t> (Chapter 5: "The Measurement Process"). The two-path approach here demonstrates both expert elicitation (Path A) and data-driven calibration (Path B) methods.</a:t>
+              <a:t>The EVPI calculation ensures that measurement efforts are directed toward the most impactful uncertainties.</a:t>
             </a:r>
             <a:endParaRPr lang="en-US" dirty="0"/>
           </a:p>
@@ -15940,7 +18742,7 @@
           <p:cNvPr id="3" name="Slide Number Placeholder 2">
             <a:extLst>
               <a:ext uri="{FF2B5EF4-FFF2-40B4-BE49-F238E27FC236}">
-                <a16:creationId xmlns:a16="http://schemas.microsoft.com/office/drawing/2014/main" id="{FED8B3B4-E6FD-4662-ED85-C1E922D067D8}"/>
+                <a16:creationId xmlns:a16="http://schemas.microsoft.com/office/drawing/2014/main" id="{D7CCCA6A-D205-D04B-06A4-9B0E566701AE}"/>
               </a:ext>
             </a:extLst>
           </p:cNvPr>
@@ -15972,10 +18774,10 @@
       </p:sp>
       <p:sp>
         <p:nvSpPr>
-          <p:cNvPr id="10" name="TextBox 9">
-            <a:extLst>
-              <a:ext uri="{FF2B5EF4-FFF2-40B4-BE49-F238E27FC236}">
-                <a16:creationId xmlns:a16="http://schemas.microsoft.com/office/drawing/2014/main" id="{A55757F6-F117-DB5F-A782-72995F7C5D20}"/>
+          <p:cNvPr id="7" name="TextBox 6">
+            <a:extLst>
+              <a:ext uri="{FF2B5EF4-FFF2-40B4-BE49-F238E27FC236}">
+                <a16:creationId xmlns:a16="http://schemas.microsoft.com/office/drawing/2014/main" id="{E877BFFE-498A-1EA6-6275-676BBD3F63BD}"/>
               </a:ext>
             </a:extLst>
           </p:cNvPr>
@@ -15984,74 +18786,8 @@
         </p:nvSpPr>
         <p:spPr>
           <a:xfrm>
-            <a:off x="380960" y="2271101"/>
-            <a:ext cx="4273510" cy="2308324"/>
-          </a:xfrm>
-          <a:prstGeom prst="rect">
-            <a:avLst/>
-          </a:prstGeom>
-          <a:noFill/>
-        </p:spPr>
-        <p:txBody>
-          <a:bodyPr wrap="square">
-            <a:spAutoFit/>
-          </a:bodyPr>
-          <a:lstStyle/>
-          <a:p>
-            <a:r>
-              <a:rPr lang="en-US" b="1" dirty="0"/>
-              <a:t>Key Insight</a:t>
-            </a:r>
-            <a:r>
-              <a:rPr lang="en-US" dirty="0"/>
-              <a:t>:</a:t>
-            </a:r>
-          </a:p>
-          <a:p>
-            <a:r>
-              <a:rPr lang="en-US" dirty="0"/>
-              <a:t>Weibull shape parameter (k) reveals failure mechanism:</a:t>
-            </a:r>
-          </a:p>
-          <a:p>
-            <a:pPr lvl="1"/>
-            <a:r>
-              <a:rPr lang="en-US" dirty="0"/>
-              <a:t>k &lt; 1: Infant mortality (decreasing hazard)</a:t>
-            </a:r>
-          </a:p>
-          <a:p>
-            <a:pPr lvl="1"/>
-            <a:r>
-              <a:rPr lang="en-US" dirty="0"/>
-              <a:t>k = 1: Random failures (constant hazard)</a:t>
-            </a:r>
-          </a:p>
-          <a:p>
-            <a:pPr lvl="1"/>
-            <a:r>
-              <a:rPr lang="en-US" dirty="0"/>
-              <a:t>k &gt; 1: Wear-out (increasing hazard</a:t>
-            </a:r>
-          </a:p>
-        </p:txBody>
-      </p:sp>
-      <p:sp>
-        <p:nvSpPr>
-          <p:cNvPr id="6" name="TextBox 5">
-            <a:extLst>
-              <a:ext uri="{FF2B5EF4-FFF2-40B4-BE49-F238E27FC236}">
-                <a16:creationId xmlns:a16="http://schemas.microsoft.com/office/drawing/2014/main" id="{855EDC02-BA05-2096-A91A-435CD20B531C}"/>
-              </a:ext>
-            </a:extLst>
-          </p:cNvPr>
-          <p:cNvSpPr txBox="1"/>
-          <p:nvPr/>
-        </p:nvSpPr>
-        <p:spPr>
-          <a:xfrm>
-            <a:off x="5565183" y="181683"/>
-            <a:ext cx="6560887" cy="6617196"/>
+            <a:off x="4888369" y="250418"/>
+            <a:ext cx="6095028" cy="6063198"/>
           </a:xfrm>
           <a:prstGeom prst="rect">
             <a:avLst/>
@@ -16078,68 +18814,221 @@
                 <a:effectLst/>
                 <a:latin typeface="-apple-system"/>
               </a:rPr>
-              <a:t>Objective - </a:t>
+              <a:t>Suggested Steps</a:t>
+            </a:r>
+          </a:p>
+          <a:p>
+            <a:pPr algn="l">
+              <a:buFont typeface="+mj-lt"/>
+              <a:buAutoNum type="arabicPeriod"/>
+            </a:pPr>
+            <a:r>
+              <a:rPr lang="en-US" b="1" dirty="0">
+                <a:latin typeface="-apple-system"/>
+              </a:rPr>
+              <a:t>Section 3 – Step 1</a:t>
+            </a:r>
+            <a:r>
+              <a:rPr lang="en-US" dirty="0">
+                <a:latin typeface="-apple-system"/>
+              </a:rPr>
+              <a:t>:</a:t>
+            </a:r>
+          </a:p>
+          <a:p>
+            <a:pPr marL="285750" indent="-285750" algn="l">
+              <a:buFont typeface="Arial" panose="020B0604020202020204" pitchFamily="34" charset="0"/>
+              <a:buChar char="•"/>
+            </a:pPr>
+            <a:r>
+              <a:rPr lang="en-US" i="0" dirty="0">
+                <a:effectLst/>
+                <a:latin typeface="-apple-system"/>
+              </a:rPr>
+              <a:t>Set observed failures to 1</a:t>
+            </a:r>
+          </a:p>
+          <a:p>
+            <a:pPr marL="285750" indent="-285750" algn="l">
+              <a:buFont typeface="Arial" panose="020B0604020202020204" pitchFamily="34" charset="0"/>
+              <a:buChar char="•"/>
+            </a:pPr>
+            <a:r>
+              <a:rPr lang="en-US" dirty="0">
+                <a:latin typeface="-apple-system"/>
+              </a:rPr>
+              <a:t>Set PM Eff LB to .05 and UB to .55</a:t>
+            </a:r>
+          </a:p>
+          <a:p>
+            <a:pPr marL="285750" indent="-285750" algn="l">
+              <a:buFont typeface="Arial" panose="020B0604020202020204" pitchFamily="34" charset="0"/>
+              <a:buChar char="•"/>
+            </a:pPr>
+            <a:r>
+              <a:rPr lang="en-US" i="0" dirty="0">
+                <a:effectLst/>
+                <a:latin typeface="-apple-system"/>
+              </a:rPr>
+              <a:t>Apply th</a:t>
+            </a:r>
+            <a:r>
+              <a:rPr lang="en-US" dirty="0">
+                <a:latin typeface="-apple-system"/>
+              </a:rPr>
+              <a:t>e scenarios button and check for update on screen</a:t>
+            </a:r>
+            <a:endParaRPr lang="en-US" i="0" dirty="0">
+              <a:effectLst/>
+              <a:latin typeface="-apple-system"/>
+            </a:endParaRPr>
+          </a:p>
+          <a:p>
+            <a:pPr algn="l"/>
+            <a:r>
+              <a:rPr lang="en-US" b="1" dirty="0">
+                <a:latin typeface="-apple-system"/>
+              </a:rPr>
+              <a:t>2. Section 4 – step 2</a:t>
             </a:r>
             <a:r>
               <a:rPr lang="en-US" b="0" i="0" dirty="0">
                 <a:effectLst/>
                 <a:latin typeface="-apple-system"/>
               </a:rPr>
-              <a:t>Establish well-calibrated prior beliefs about uncertain quantities. </a:t>
-            </a:r>
-          </a:p>
-          <a:p>
-            <a:r>
-              <a:rPr lang="en-US" b="1" dirty="0"/>
-              <a:t>Path A: Expert Calibrated Prior</a:t>
-            </a:r>
-          </a:p>
-          <a:p>
-            <a:r>
-              <a:rPr lang="en-US" b="1" dirty="0"/>
-              <a:t>Process</a:t>
-            </a:r>
-            <a:r>
-              <a:rPr lang="en-US" dirty="0"/>
               <a:t>:</a:t>
             </a:r>
           </a:p>
           <a:p>
-            <a:pPr marL="342900" indent="-342900">
+            <a:pPr marL="742950" lvl="1" indent="-285750" algn="l">
+              <a:buFont typeface="Arial" panose="020B0604020202020204" pitchFamily="34" charset="0"/>
+              <a:buChar char="•"/>
+            </a:pPr>
+            <a:r>
+              <a:rPr lang="en-US" i="0" dirty="0">
+                <a:effectLst/>
+                <a:latin typeface="-apple-system"/>
+              </a:rPr>
+              <a:t>Run the block code to send the data to the LLM problem parser for analysis</a:t>
+            </a:r>
+          </a:p>
+          <a:p>
+            <a:pPr marL="742950" lvl="1" indent="-285750" algn="l">
+              <a:buFont typeface="Arial" panose="020B0604020202020204" pitchFamily="34" charset="0"/>
+              <a:buChar char="•"/>
+            </a:pPr>
+            <a:r>
+              <a:rPr lang="en-US" i="0" dirty="0">
+                <a:effectLst/>
+                <a:latin typeface="-apple-system"/>
+              </a:rPr>
+              <a:t>It will select best distribution &amp;parameters for each measure, and return </a:t>
+            </a:r>
+            <a:r>
+              <a:rPr lang="en-US" i="0" dirty="0" err="1">
+                <a:effectLst/>
+                <a:latin typeface="-apple-system"/>
+              </a:rPr>
+              <a:t>json</a:t>
+            </a:r>
+            <a:r>
+              <a:rPr lang="en-US" i="0" dirty="0">
+                <a:effectLst/>
+                <a:latin typeface="-apple-system"/>
+              </a:rPr>
+              <a:t> for next workflow section.</a:t>
+            </a:r>
+          </a:p>
+          <a:p>
+            <a:pPr marL="742950" lvl="1" indent="-285750" algn="l">
+              <a:buFont typeface="Arial" panose="020B0604020202020204" pitchFamily="34" charset="0"/>
+              <a:buChar char="•"/>
+            </a:pPr>
+            <a:r>
+              <a:rPr lang="en-US" dirty="0">
+                <a:latin typeface="-apple-system"/>
+              </a:rPr>
+              <a:t>Run Validate block and note naming fixes</a:t>
+            </a:r>
+            <a:endParaRPr lang="en-US" i="0" dirty="0">
+              <a:effectLst/>
+              <a:latin typeface="-apple-system"/>
+            </a:endParaRPr>
+          </a:p>
+          <a:p>
+            <a:pPr algn="l"/>
+            <a:r>
+              <a:rPr lang="en-US" b="1" i="0" dirty="0">
+                <a:effectLst/>
+                <a:latin typeface="-apple-system"/>
+              </a:rPr>
+              <a:t>3 Section5 – step 3</a:t>
+            </a:r>
+            <a:r>
+              <a:rPr lang="en-US" b="0" i="0" dirty="0">
+                <a:effectLst/>
+                <a:latin typeface="-apple-system"/>
+              </a:rPr>
+              <a:t>:</a:t>
+            </a:r>
+          </a:p>
+          <a:p>
+            <a:pPr marL="742950" lvl="1" indent="-285750" algn="l">
               <a:buFont typeface="+mj-lt"/>
               <a:buAutoNum type="arabicPeriod"/>
             </a:pPr>
             <a:r>
-              <a:rPr lang="en-US" dirty="0"/>
-              <a:t>Elicit expert's 90% confidence interval on MTBF (Mean Time Between Failures)</a:t>
-            </a:r>
-          </a:p>
-          <a:p>
-            <a:pPr marL="342900" indent="-342900">
+              <a:rPr lang="en-US" b="0" i="0" dirty="0">
+                <a:effectLst/>
+                <a:latin typeface="-apple-system"/>
+              </a:rPr>
+              <a:t>Run VOI compute block</a:t>
+            </a:r>
+          </a:p>
+          <a:p>
+            <a:pPr marL="1200150" lvl="2" indent="-285750">
+              <a:buFont typeface="Arial" panose="020B0604020202020204" pitchFamily="34" charset="0"/>
+              <a:buChar char="•"/>
+            </a:pPr>
+            <a:r>
+              <a:rPr lang="en-US" b="0" i="0" dirty="0">
+                <a:effectLst/>
+                <a:latin typeface="-apple-system"/>
+              </a:rPr>
+              <a:t>Note the change from PM to RTF and the VOI of -$97 to $706</a:t>
+            </a:r>
+          </a:p>
+          <a:p>
+            <a:pPr marL="742950" lvl="1" indent="-285750" algn="l">
               <a:buFont typeface="+mj-lt"/>
               <a:buAutoNum type="arabicPeriod"/>
             </a:pPr>
             <a:r>
-              <a:rPr lang="en-US" dirty="0"/>
-              <a:t>Convert to failure rate (λ = 1/MTBF) 90% CI</a:t>
-            </a:r>
-          </a:p>
-          <a:p>
-            <a:pPr marL="342900" indent="-342900">
+              <a:rPr lang="en-US" b="0" i="0" dirty="0">
+                <a:effectLst/>
+                <a:latin typeface="-apple-system"/>
+              </a:rPr>
+              <a:t>Run VOI Plot block </a:t>
+            </a:r>
+          </a:p>
+          <a:p>
+            <a:pPr marL="1200150" lvl="2" indent="-285750">
               <a:buFont typeface="+mj-lt"/>
               <a:buAutoNum type="arabicPeriod"/>
             </a:pPr>
             <a:r>
-              <a:rPr lang="en-US" dirty="0"/>
-              <a:t>Fit Gamma distribution to match the CI</a:t>
-            </a:r>
-          </a:p>
-          <a:p>
-            <a:r>
-              <a:rPr lang="en-US" b="1" dirty="0"/>
-              <a:t>Why Gamma?</a:t>
-            </a:r>
-            <a:endParaRPr lang="en-US" dirty="0"/>
+              <a:rPr lang="en-US" b="0" i="0" dirty="0">
+                <a:effectLst/>
+                <a:latin typeface="-apple-system"/>
+              </a:rPr>
+              <a:t>Note the table for </a:t>
+            </a:r>
+            <a:r>
+              <a:rPr lang="en-US" dirty="0">
+                <a:latin typeface="-apple-system"/>
+              </a:rPr>
+              <a:t>interpreting</a:t>
+            </a:r>
           </a:p>
           <a:p>
             <a:pPr marL="285750" indent="-285750">
@@ -16147,134 +19036,67 @@
               <a:buChar char="•"/>
             </a:pPr>
             <a:r>
-              <a:rPr lang="en-US" dirty="0"/>
-              <a:t>Conjugate prior for Poisson failure processes</a:t>
-            </a:r>
-          </a:p>
-          <a:p>
-            <a:pPr marL="285750" indent="-285750">
+              <a:rPr lang="en-US" b="0" i="0" dirty="0">
+                <a:effectLst/>
+                <a:latin typeface="-apple-system"/>
+              </a:rPr>
+              <a:t>Set PM Cost to $4400, rerun blocks</a:t>
+            </a:r>
+          </a:p>
+          <a:p>
+            <a:pPr marL="742950" lvl="1" indent="-285750">
               <a:buFont typeface="Arial" panose="020B0604020202020204" pitchFamily="34" charset="0"/>
               <a:buChar char="•"/>
             </a:pPr>
             <a:r>
-              <a:rPr lang="en-US" dirty="0"/>
-              <a:t>Natural for rate parameters</a:t>
-            </a:r>
-          </a:p>
-          <a:p>
-            <a:pPr marL="285750" indent="-285750">
-              <a:buFont typeface="Arial" panose="020B0604020202020204" pitchFamily="34" charset="0"/>
-              <a:buChar char="•"/>
-            </a:pPr>
-            <a:r>
-              <a:rPr lang="en-US" dirty="0"/>
-              <a:t>Flexible shape to match expert beliefs</a:t>
-            </a:r>
-          </a:p>
-          <a:p>
-            <a:pPr algn="l"/>
+              <a:rPr lang="en-US" dirty="0">
+                <a:latin typeface="-apple-system"/>
+              </a:rPr>
+              <a:t>Note RTF is selected as the best option</a:t>
+            </a:r>
             <a:endParaRPr lang="en-US" b="0" i="0" dirty="0">
               <a:effectLst/>
               <a:latin typeface="-apple-system"/>
             </a:endParaRPr>
           </a:p>
           <a:p>
-            <a:r>
-              <a:rPr lang="en-US" b="1" dirty="0"/>
-              <a:t>Path B: Data-Fitted Prior</a:t>
-            </a:r>
-          </a:p>
-          <a:p>
-            <a:r>
-              <a:rPr lang="en-US" b="1" dirty="0"/>
-              <a:t>Process</a:t>
-            </a:r>
-            <a:r>
-              <a:rPr lang="en-US" dirty="0"/>
-              <a:t>:</a:t>
-            </a:r>
-          </a:p>
-          <a:p>
-            <a:pPr marL="342900" indent="-342900">
+            <a:pPr marL="1200150" lvl="2" indent="-285750">
               <a:buFont typeface="+mj-lt"/>
               <a:buAutoNum type="arabicPeriod"/>
-            </a:pPr>
-            <a:r>
-              <a:rPr lang="en-US" dirty="0"/>
-              <a:t>Input observed time-to-failure (TTF) data</a:t>
-            </a:r>
-          </a:p>
-          <a:p>
-            <a:pPr marL="342900" indent="-342900">
-              <a:buFont typeface="+mj-lt"/>
-              <a:buAutoNum type="arabicPeriod"/>
-            </a:pPr>
-            <a:r>
-              <a:rPr lang="en-US" dirty="0"/>
-              <a:t>Fit descriptive distributions (Exponential/Weibull)</a:t>
-            </a:r>
-          </a:p>
-          <a:p>
-            <a:pPr marL="342900" indent="-342900">
-              <a:buFont typeface="+mj-lt"/>
-              <a:buAutoNum type="arabicPeriod"/>
-            </a:pPr>
-            <a:r>
-              <a:rPr lang="en-US" dirty="0"/>
-              <a:t>Derive Gamma prior via conjugate update from flat prior</a:t>
-            </a:r>
-          </a:p>
-          <a:p>
-            <a:pPr marL="342900" indent="-342900">
-              <a:buFont typeface="+mj-lt"/>
-              <a:buAutoNum type="arabicPeriod"/>
-            </a:pPr>
-            <a:endParaRPr lang="en-US" dirty="0"/>
-          </a:p>
-          <a:p>
-            <a:r>
-              <a:rPr lang="en-US" b="1" dirty="0"/>
-              <a:t>Comparison</a:t>
-            </a:r>
-          </a:p>
-          <a:p>
-            <a:r>
-              <a:rPr lang="en-US" dirty="0"/>
-              <a:t>Both paths produce Gamma priors on failure rate λ that compete in the three-way sensitivity analysis.</a:t>
-            </a:r>
-          </a:p>
-          <a:p>
-            <a:pPr algn="l">
-              <a:buFont typeface="Arial" panose="020B0604020202020204" pitchFamily="34" charset="0"/>
-              <a:buChar char="•"/>
             </a:pPr>
             <a:endParaRPr lang="en-US" b="0" i="0" dirty="0">
               <a:effectLst/>
               <a:latin typeface="-apple-system"/>
             </a:endParaRPr>
           </a:p>
-        </p:txBody>
-      </p:sp>
-      <p:sp>
-        <p:nvSpPr>
-          <p:cNvPr id="14" name="BJPseudoFooter">
-            <a:extLst>
-              <a:ext uri="{FF2B5EF4-FFF2-40B4-BE49-F238E27FC236}">
-                <a16:creationId xmlns:a16="http://schemas.microsoft.com/office/drawing/2014/main" id="{8CD4DB4A-AACD-15A5-51F6-29CC8D314CD5}"/>
+          <a:p>
+            <a:pPr marL="742950" lvl="1" indent="-285750" algn="l">
+              <a:buFont typeface="+mj-lt"/>
+              <a:buAutoNum type="arabicPeriod"/>
+            </a:pPr>
+            <a:endParaRPr lang="en-US" b="0" i="0" dirty="0">
+              <a:effectLst/>
+              <a:latin typeface="-apple-system"/>
+            </a:endParaRPr>
+          </a:p>
+        </p:txBody>
+      </p:sp>
+      <p:sp>
+        <p:nvSpPr>
+          <p:cNvPr id="10" name="TextBox 9">
+            <a:extLst>
+              <a:ext uri="{FF2B5EF4-FFF2-40B4-BE49-F238E27FC236}">
+                <a16:creationId xmlns:a16="http://schemas.microsoft.com/office/drawing/2014/main" id="{B13B8F72-3739-7A51-D4CA-90AF1C7EA1BB}"/>
               </a:ext>
             </a:extLst>
           </p:cNvPr>
           <p:cNvSpPr txBox="1"/>
-          <p:nvPr>
-            <p:custDataLst>
-              <p:tags r:id="rId1"/>
-            </p:custDataLst>
-          </p:nvPr>
-        </p:nvSpPr>
-        <p:spPr>
-          <a:xfrm>
-            <a:off x="3963044" y="6519446"/>
-            <a:ext cx="4265911" cy="338554"/>
+          <p:nvPr/>
+        </p:nvSpPr>
+        <p:spPr>
+          <a:xfrm>
+            <a:off x="458516" y="3429000"/>
+            <a:ext cx="4273510" cy="1908215"/>
           </a:xfrm>
           <a:prstGeom prst="rect">
             <a:avLst/>
@@ -16282,6 +19104,86 @@
           <a:noFill/>
         </p:spPr>
         <p:txBody>
+          <a:bodyPr wrap="square">
+            <a:spAutoFit/>
+          </a:bodyPr>
+          <a:lstStyle/>
+          <a:p>
+            <a:pPr algn="l">
+              <a:spcBef>
+                <a:spcPts val="1800"/>
+              </a:spcBef>
+              <a:spcAft>
+                <a:spcPts val="1200"/>
+              </a:spcAft>
+              <a:buNone/>
+            </a:pPr>
+            <a:r>
+              <a:rPr lang="en-US" b="1" i="0" dirty="0">
+                <a:effectLst/>
+                <a:latin typeface="-apple-system"/>
+              </a:rPr>
+              <a:t>Key Insights</a:t>
+            </a:r>
+          </a:p>
+          <a:p>
+            <a:pPr algn="l">
+              <a:buFont typeface="Arial" panose="020B0604020202020204" pitchFamily="34" charset="0"/>
+              <a:buChar char="•"/>
+            </a:pPr>
+            <a:r>
+              <a:rPr lang="en-US" b="0" i="0" dirty="0">
+                <a:effectLst/>
+                <a:latin typeface="-apple-system"/>
+              </a:rPr>
+              <a:t> LLM AI selects measures  &amp;  distributions best for the problem type.</a:t>
+            </a:r>
+          </a:p>
+          <a:p>
+            <a:pPr algn="l">
+              <a:buFont typeface="Arial" panose="020B0604020202020204" pitchFamily="34" charset="0"/>
+              <a:buChar char="•"/>
+            </a:pPr>
+            <a:r>
+              <a:rPr lang="en-US" dirty="0">
+                <a:latin typeface="-apple-system"/>
+              </a:rPr>
+              <a:t> The value of information justifies SME estimates versus $ for deeper dive study of real data collection</a:t>
+            </a:r>
+            <a:endParaRPr lang="en-US" b="0" i="0" dirty="0">
+              <a:effectLst/>
+              <a:latin typeface="-apple-system"/>
+            </a:endParaRPr>
+          </a:p>
+        </p:txBody>
+      </p:sp>
+      <p:sp>
+        <p:nvSpPr>
+          <p:cNvPr id="16" name="BJPseudoFooter">
+            <a:extLst>
+              <a:ext uri="{FF2B5EF4-FFF2-40B4-BE49-F238E27FC236}">
+                <a16:creationId xmlns:a16="http://schemas.microsoft.com/office/drawing/2014/main" id="{67207DE7-2716-496A-8F87-334EE1634840}"/>
+              </a:ext>
+            </a:extLst>
+          </p:cNvPr>
+          <p:cNvSpPr txBox="1"/>
+          <p:nvPr>
+            <p:custDataLst>
+              <p:tags r:id="rId1"/>
+            </p:custDataLst>
+          </p:nvPr>
+        </p:nvSpPr>
+        <p:spPr>
+          <a:xfrm>
+            <a:off x="3963044" y="6519446"/>
+            <a:ext cx="4265911" cy="338554"/>
+          </a:xfrm>
+          <a:prstGeom prst="rect">
+            <a:avLst/>
+          </a:prstGeom>
+          <a:noFill/>
+        </p:spPr>
+        <p:txBody>
           <a:bodyPr vert="horz" wrap="none" rtlCol="0">
             <a:spAutoFit/>
           </a:bodyPr>
@@ -16300,10 +19202,64 @@
           </a:p>
         </p:txBody>
       </p:sp>
+      <p:sp>
+        <p:nvSpPr>
+          <p:cNvPr id="4" name="TextBox 3">
+            <a:extLst>
+              <a:ext uri="{FF2B5EF4-FFF2-40B4-BE49-F238E27FC236}">
+                <a16:creationId xmlns:a16="http://schemas.microsoft.com/office/drawing/2014/main" id="{486D3959-7A7E-C0A2-9F98-14767AC7C774}"/>
+              </a:ext>
+            </a:extLst>
+          </p:cNvPr>
+          <p:cNvSpPr txBox="1"/>
+          <p:nvPr/>
+        </p:nvSpPr>
+        <p:spPr>
+          <a:xfrm>
+            <a:off x="458516" y="2018695"/>
+            <a:ext cx="3773850" cy="1200329"/>
+          </a:xfrm>
+          <a:prstGeom prst="rect">
+            <a:avLst/>
+          </a:prstGeom>
+          <a:noFill/>
+        </p:spPr>
+        <p:txBody>
+          <a:bodyPr wrap="square">
+            <a:spAutoFit/>
+          </a:bodyPr>
+          <a:lstStyle/>
+          <a:p>
+            <a:pPr algn="l">
+              <a:spcBef>
+                <a:spcPts val="1800"/>
+              </a:spcBef>
+              <a:spcAft>
+                <a:spcPts val="1200"/>
+              </a:spcAft>
+              <a:buNone/>
+            </a:pPr>
+            <a:r>
+              <a:rPr lang="en-US" sz="1800" b="1" i="0" dirty="0">
+                <a:effectLst/>
+                <a:latin typeface="-apple-system"/>
+              </a:rPr>
+              <a:t>Explore – </a:t>
+            </a:r>
+            <a:r>
+              <a:rPr lang="en-US" sz="1800" b="0" i="0" dirty="0">
+                <a:effectLst/>
+                <a:latin typeface="-apple-system"/>
+              </a:rPr>
+              <a:t>What happens if I change the number of observed failures of if I change my SME calibrated impact for preventative maintenance?</a:t>
+            </a:r>
+          </a:p>
+        </p:txBody>
+      </p:sp>
     </p:spTree>
     <p:extLst>
       <p:ext uri="{BB962C8B-B14F-4D97-AF65-F5344CB8AC3E}">
-        <p14:creationId xmlns:p14="http://schemas.microsoft.com/office/powerpoint/2010/main" val="721752110"/>
+        <p14:creationId xmlns:p14="http://schemas.microsoft.com/office/powerpoint/2010/main" val="3499187145"/>
       </p:ext>
     </p:extLst>
   </p:cSld>
@@ -16410,6 +19366,46 @@
 </file>
 
 <file path=ppt/tags/tag20.xml><?xml version="1.0" encoding="utf-8"?>
+<p:tagLst xmlns:a="http://schemas.openxmlformats.org/drawingml/2006/main" xmlns:r="http://schemas.openxmlformats.org/officeDocument/2006/relationships" xmlns:p="http://schemas.openxmlformats.org/presentationml/2006/main">
+  <p:tag name="BJHEADERFOOTERLABEL" val="TRUE"/>
+  <p:tag name="BJHEADERFOOTERTEXTLABEL" val="RTX Corporation (Corporate) - Company Use&#10;This document does not contain any export controlled technical material/data/information."/>
+  <p:tag name="BJHEADERFOOTERTEXTMARKING" val="RTX Corporation (Corporate) - Company Use&#10;This document does not contain any export controlled technical material/data/information."/>
+</p:tagLst>
+</file>
+
+<file path=ppt/tags/tag21.xml><?xml version="1.0" encoding="utf-8"?>
+<p:tagLst xmlns:a="http://schemas.openxmlformats.org/drawingml/2006/main" xmlns:r="http://schemas.openxmlformats.org/officeDocument/2006/relationships" xmlns:p="http://schemas.openxmlformats.org/presentationml/2006/main">
+  <p:tag name="BJHEADERFOOTERLABEL" val="TRUE"/>
+  <p:tag name="BJHEADERFOOTERTEXTLABEL" val="RTX Corporation (Corporate) - Company Use&#10;This document does not contain any export controlled technical material/data/information."/>
+  <p:tag name="BJHEADERFOOTERTEXTMARKING" val="RTX Corporation (Corporate) - Company Use&#10;This document does not contain any export controlled technical material/data/information."/>
+</p:tagLst>
+</file>
+
+<file path=ppt/tags/tag22.xml><?xml version="1.0" encoding="utf-8"?>
+<p:tagLst xmlns:a="http://schemas.openxmlformats.org/drawingml/2006/main" xmlns:r="http://schemas.openxmlformats.org/officeDocument/2006/relationships" xmlns:p="http://schemas.openxmlformats.org/presentationml/2006/main">
+  <p:tag name="BJHEADERFOOTERLABEL" val="TRUE"/>
+  <p:tag name="BJHEADERFOOTERTEXTLABEL" val="RTX Corporation (Corporate) - Company Use&#10;This document does not contain any export controlled technical material/data/information."/>
+  <p:tag name="BJHEADERFOOTERTEXTMARKING" val="RTX Corporation (Corporate) - Company Use&#10;This document does not contain any export controlled technical material/data/information."/>
+</p:tagLst>
+</file>
+
+<file path=ppt/tags/tag23.xml><?xml version="1.0" encoding="utf-8"?>
+<p:tagLst xmlns:a="http://schemas.openxmlformats.org/drawingml/2006/main" xmlns:r="http://schemas.openxmlformats.org/officeDocument/2006/relationships" xmlns:p="http://schemas.openxmlformats.org/presentationml/2006/main">
+  <p:tag name="BJHEADERFOOTERLABEL" val="TRUE"/>
+  <p:tag name="BJHEADERFOOTERTEXTLABEL" val="RTX Corporation (Corporate) - Company Use&#10;This document does not contain any export controlled technical material/data/information."/>
+  <p:tag name="BJHEADERFOOTERTEXTMARKING" val="RTX Corporation (Corporate) - Company Use&#10;This document does not contain any export controlled technical material/data/information."/>
+</p:tagLst>
+</file>
+
+<file path=ppt/tags/tag24.xml><?xml version="1.0" encoding="utf-8"?>
+<p:tagLst xmlns:a="http://schemas.openxmlformats.org/drawingml/2006/main" xmlns:r="http://schemas.openxmlformats.org/officeDocument/2006/relationships" xmlns:p="http://schemas.openxmlformats.org/presentationml/2006/main">
+  <p:tag name="BJHEADERFOOTERLABEL" val="TRUE"/>
+  <p:tag name="BJHEADERFOOTERTEXTLABEL" val="RTX Corporation (Corporate) - Company Use&#10;This document does not contain any export controlled technical material/data/information."/>
+  <p:tag name="BJHEADERFOOTERTEXTMARKING" val="RTX Corporation (Corporate) - Company Use&#10;This document does not contain any export controlled technical material/data/information."/>
+</p:tagLst>
+</file>
+
+<file path=ppt/tags/tag25.xml><?xml version="1.0" encoding="utf-8"?>
 <p:tagLst xmlns:a="http://schemas.openxmlformats.org/drawingml/2006/main" xmlns:r="http://schemas.openxmlformats.org/officeDocument/2006/relationships" xmlns:p="http://schemas.openxmlformats.org/presentationml/2006/main">
   <p:tag name="BJHEADERFOOTERLABEL" val="TRUE"/>
   <p:tag name="BJHEADERFOOTERTEXTLABEL" val="RTX Corporation (Corporate) - Company Use&#10;This document does not contain any export controlled technical material/data/information."/>
@@ -17529,15 +20525,22 @@
 </file>
 
 <file path=customXml/item2.xml><?xml version="1.0" encoding="utf-8"?>
-<?mso-contentType ?>
-<FormTemplates xmlns="http://schemas.microsoft.com/sharepoint/v3/contenttype/forms">
-  <Display>DocumentLibraryForm</Display>
-  <Edit>DocumentLibraryForm</Edit>
-  <New>DocumentLibraryForm</New>
-</FormTemplates>
+<sisl xmlns:xsi="http://www.w3.org/2001/XMLSchema-instance" xmlns:xsd="http://www.w3.org/2001/XMLSchema" xmlns="http://www.boldonjames.com/2008/01/sie/internal/label" sislVersion="0" policy="cde53ac1-bf5f-4aae-9cf1-07509e23a4b0" origin="userSelected">
+  <element uid="acf9ecc3-0f45-4234-a90d-e4368facd981" value=""/>
+  <element uid="69d00acd-89c4-44e0-84ae-e58da17f485c" value=""/>
+  <element uid="bba94c65-ac3d-4f34-b2e1-8de11ef6f01c" value=""/>
+  <element uid="bc2b7c01-6db1-4e7d-88d1-fc61674f86fd" value=""/>
+  <element uid="71f4f2ca-9336-4970-a006-192d7a805164" value=""/>
+</sisl>
 </file>
 
 <file path=customXml/item3.xml><?xml version="1.0" encoding="utf-8"?>
+<WrappedLabelHistory xmlns:xsi="http://www.w3.org/2001/XMLSchema-instance" xmlns:xsd="http://www.w3.org/2001/XMLSchema" xmlns="http://www.boldonjames.com/2016/02/Classifier/internal/wrappedLabelHistory">
+  <Value>PD94bWwgdmVyc2lvbj0iMS4wIiBlbmNvZGluZz0idXMtYXNjaWkiPz48bGFiZWxIaXN0b3J5IHhtbG5zOnhzaT0iaHR0cDovL3d3dy53My5vcmcvMjAwMS9YTUxTY2hlbWEtaW5zdGFuY2UiIHhtbG5zOnhzZD0iaHR0cDovL3d3dy53My5vcmcvMjAwMS9YTUxTY2hlbWEiIHhtbG5zPSJodHRwOi8vd3d3LmJvbGRvbmphbWVzLmNvbS8yMDE2LzAyL0NsYXNzaWZpZXIvaW50ZXJuYWwvbGFiZWxIaXN0b3J5Ij48aXRlbT48c2lzbCBzaXNsVmVyc2lvbj0iMCIgcG9saWN5PSJjZGU1M2FjMS1iZjVmLTRhYWUtOWNmMS0wNzUwOWUyM2E0YjAiIG9yaWdpbj0iZGVmYXVsdFZhbHVlIj48ZWxlbWVudCB1aWQ9ImJiYTk0YzY1LWFjM2QtNGYzNC1iMmUxLThkZTExZWY2ZjAxYyIgdmFsdWU9IiIgeG1sbnM9Imh0dHA6Ly93d3cuYm9sZG9uamFtZXMuY29tLzIwMDgvMDEvc2llL2ludGVybmFsL2xhYmVsIiAvPjwvc2lzbD48VXNlck5hbWU+VVNcbnJwMDI0MTU4MjwvVXNlck5hbWU+PERhdGVUaW1lPjIvMTIvMjAyMCAyOjQ5OjE3IFBNPC9EYXRlVGltZT48TGFiZWxTdHJpbmc+T3JpZ2luIEp1cmlzZGljdGlvbjogVVMgPC9MYWJlbFN0cmluZz48L2l0ZW0+PGl0ZW0+PHNpc2wgc2lzbFZlcnNpb249IjAiIHBvbGljeT0iY2RlNTNhYzEtYmY1Zi00YWFlLTljZjEtMDc1MDllMjNhNGIwIiBvcmlnaW49InVzZXJTZWxlY3RlZCI+PGVsZW1lbnQgdWlkPSJiYmE5NGM2NS1hYzNkLTRmMzQtYjJlMS04ZGUxMWVmNmYwMWMiIHZhbHVlPSIiIHhtbG5zPSJodHRwOi8vd3d3LmJvbGRvbmphbWVzLmNvbS8yMDA4LzAxL3NpZS9pbnRlcm5hbC9sYWJlbCIgLz48ZWxlbWVudCB1aWQ9IjU5OGNmYzI4LTVkZmQtNGYwNi04YzAxLWM3NTg4ZmQzOTRmMCIgdmFsdWU9IiIgeG1sbnM9Imh0dHA6Ly93d3cuYm9sZG9uamFtZXMuY29tLzIwMDgvMDEvc2llL2ludGVybmFsL2xhYmVsIiAvPjxlbGVtZW50IHVpZD0iYWFmYzlhOTUtZWU1ZC00ODdjLTljNGUtNjdhNTM4MGYyOTkxIiB2YWx1ZT0iIiB4bWxucz0iaHR0cDovL3d3dy5ib2xkb25qYW1lcy5jb20vMjAwOC8wMS9zaWUvaW50ZXJuYWwvbGFiZWwiIC8+PGVsZW1lbnQgdWlkPSJkNzU5Y2Q3YS1iNTdjLTQyZTQtOWE0OS05YjgyYTIzMzc1NzkiIHZhbHVlPSIiIHhtbG5zPSJodHRwOi8vd3d3LmJvbGRvbmphbWVzLmNvbS8yMDA4LzAxL3NpZS9pbnRlcm5hbC9sYWJlbCIgLz48ZWxlbWVudCB1aWQ9ImMyMDZkNWZhLWFlZTEtNGY2NC04OWQ5LWY4MWU0ZDdiM2FjYyIgdmFsdWU9IiIgeG1sbnM9Imh0dHA6Ly93d3cuYm9sZG9uamFtZXMuY29tLzIwMDgvMDEvc2llL2ludGVybmFsL2xhYmVsIiAvPjwvc2lzbD48VXNlck5hbWU+VVNcbnJwMDI0MTU4MjwvVXNlck5hbWU+PERhdGVUaW1lPjIvMTIvMjAyMCAzOjAzOjA5IFBNPC9EYXRlVGltZT48TGFiZWxTdHJpbmc+T3JpZ2luIEp1cmlzZGljdGlvbjogVVMgIHwgUmF5dGhlb24gQ29tcGV0aXRpb24gU2Vuc2l0aXZlIHwgUGVyIEN1cnJlbnQgUmF5dGhlb24gUG9saWN5IChSUC1PR0MtMDM1KSB8IE5vbi1FeHBvcnQgQ29udHJvbGxlZCBUZWNobmljYWwgSW5mb3JtYXRpb24gKEVYSU0gRGV0ZXJtaW5lZCBPbmx5KSB8IFBlciBDdXJyZW50IFJheXRoZW9uIFBvbGljeSAoUEktT0dDLUdUQy01MDA0KTwvTGFiZWxTdHJpbmc+PC9pdGVtPjxpdGVtPjxzaXNsIHNpc2xWZXJzaW9uPSIwIiBwb2xpY3k9ImNkZTUzYWMxLWJmNWYtNGFhZS05Y2YxLTA3NTA5ZTIzYTRiMCIgb3JpZ2luPSJ1c2VyU2VsZWN0ZWQiPjxlbGVtZW50IHVpZD0iYmJhOTRjNjUtYWMzZC00ZjM0LWIyZTEtOGRlMTFlZjZmMDFjIiB2YWx1ZT0iIiB4bWxucz0iaHR0cDovL3d3dy5ib2xkb25qYW1lcy5jb20vMjAwOC8wMS9zaWUvaW50ZXJuYWwvbGFiZWwiIC8+PGVsZW1lbnQgdWlkPSI5OTdhNzE2ZS1jMDNmLTQzYjEtYTViMC1kNmNkMDRlOWJhNDAiIHZhbHVlPSIiIHhtbG5zPSJodHRwOi8vd3d3LmJvbGRvbmphbWVzLmNvbS8yMDA4LzAxL3NpZS9pbnRlcm5hbC9sYWJlbCIgLz48ZWxlbWVudCB1aWQ9ImFhZmM5YTk1LWVlNWQtNDg3Yy05YzRlLTY3YTUzODBmMjk5MSIgdmFsdWU9IiIgeG1sbnM9Imh0dHA6Ly93d3cuYm9sZG9uamFtZXMuY29tLzIwMDgvMDEvc2llL2ludGVybmFsL2xhYmVsIiAvPjxlbGVtZW50IHVpZD0iY2FlMTFhNmItMjFiMS00OWQ4LTk5ZDgtZWQzMDY4NTEzODRhIiB2YWx1ZT0iIiB4bWxucz0iaHR0cDovL3d3dy5ib2xkb25qYW1lcy5jb20vMjAwOC8wMS9zaWUvaW50ZXJuYWwvbGFiZWwiIC8+PGVsZW1lbnQgdWlkPSJjMjA2ZDVmYS1hZWUxLTRmNjQtODlkOS1mODFlNGQ3YjNhY2MiIHZhbHVlPSIiIHhtbG5zPSJodHRwOi8vd3d3LmJvbGRvbmphbWVzLmNvbS8yMDA4LzAxL3NpZS9pbnRlcm5hbC9sYWJlbCIgLz48L3Npc2w+PFVzZXJOYW1lPlVTXG5ycDAyNDE1ODI8L1VzZXJOYW1lPjxEYXRlVGltZT4yLzEyLzIwMjAgMzoyODo1NyBQTTwvRGF0ZVRpbWU+PExhYmVsU3RyaW5nPk9yaWdpbiBKdXJpc2RpY3Rpb246IFVTICB8IFJheXRoZW9uIFByb3ByaWV0YXJ5IHwgUGVyIEN1cnJlbnQgUmF5dGhlb24gUG9saWN5IChSUC1PR0MtMDM1KSB8IFVTLUlUQVIgQ29udHJvbGxlZCB8IFBlciBDdXJyZW50IFJheXRoZW9uIFBvbGljeSAoUEktT0dDLUdUQy01MDA0KTwvTGFiZWxTdHJpbmc+PC9pdGVtPjxpdGVtPjxzaXNsIHNpc2xWZXJzaW9uPSIwIiBwb2xpY3k9ImNkZTUzYWMxLWJmNWYtNGFhZS05Y2YxLTA3NTA5ZTIzYTRiMCIgb3JpZ2luPSJ1c2VyU2VsZWN0ZWQiPjxlbGVtZW50IHVpZD0iYmJhOTRjNjUtYWMzZC00ZjM0LWIyZTEtOGRlMTFlZjZmMDFjIiB2YWx1ZT0iIiB4bWxucz0iaHR0cDovL3d3dy5ib2xkb25qYW1lcy5jb20vMjAwOC8wMS9zaWUvaW50ZXJuYWwvbGFiZWwiIC8+PGVsZW1lbnQgdWlkPSIwMTJlYjIyYy03NmNhLTRlNGYtOGFiOS1mYWJiMDU0YWUxNDAiIHZhbHVlPSIiIHhtbG5zPSJodHRwOi8vd3d3LmJvbGRvbmphbWVzLmNvbS8yMDA4LzAxL3NpZS9pbnRlcm5hbC9sYWJlbCIgLz48ZWxlbWVudCB1aWQ9ImFhZmM5YTk1LWVlNWQtNDg3Yy05YzRlLTY3YTUzODBmMjk5MSIgdmFsdWU9IiIgeG1sbnM9Imh0dHA6Ly93d3cuYm9sZG9uamFtZXMuY29tLzIwMDgvMDEvc2llL2ludGVybmFsL2xhYmVsIiAvPjxlbGVtZW50IHVpZD0iYmMyYjdjMDEtNmRiMS00ZTdkLTg4ZDEtZmM2MTY3NGY4NmZkIiB2YWx1ZT0iIiB4bWxucz0iaHR0cDovL3d3dy5ib2xkb25qYW1lcy5jb20vMjAwOC8wMS9zaWUvaW50ZXJuYWwvbGFiZWwiIC8+PGVsZW1lbnQgdWlkPSI5MmU5OTNhMy1hZjMyLTRhZmItYWExOS0zYTQ5Y2RiODJjN2EiIHZhbHVlPSIiIHhtbG5zPSJodHRwOi8vd3d3LmJvbGRvbmphbWVzLmNvbS8yMDA4LzAxL3NpZS9pbnRlcm5hbC9sYWJlbCIgLz48L3Npc2w+PFVzZXJOYW1lPlVTXG5ycDAyNDE1ODI8L1VzZXJOYW1lPjxEYXRlVGltZT4yLzE0LzIwMjAgNDo0Mjo0NCBQTTwvRGF0ZVRpbWU+PExhYmVsU3RyaW5nPk9yaWdpbiBKdXJpc2RpY3Rpb246IFVTICB8IFJheXRoZW9uIE1vc3QgUHJpdmF0ZSB8IFBlciBDdXJyZW50IFJheXRoZW9uIFBvbGljeSAoUlAtT0dDLTAzNSkgfCBPdGhlciBJbmZvcm1hdGlvbiAoTm90IFJlcXVpcmluZyBhbiBFeHBvcnQgQ29udHJvbCBNYXJraW5nKSB8IE5vIG1hcmtpbmcgYXBwbGllZCBieSB0aGUgdG9vbDwvTGFiZWxTdHJpbmc+PC9pdGVtPjxpdGVtPjxzaXNsIHNpc2xWZXJzaW9uPSIwIiBwb2xpY3k9ImNkZTUzYWMxLWJmNWYtNGFhZS05Y2YxLTA3NTA5ZTIzYTRiMCIgb3JpZ2luPSJ1c2VyU2VsZWN0ZWQiPjxlbGVtZW50IHVpZD0iYmJhOTRjNjUtYWMzZC00ZjM0LWIyZTEtOGRlMTFlZjZmMDFjIiB2YWx1ZT0iIiB4bWxucz0iaHR0cDovL3d3dy5ib2xkb25qYW1lcy5jb20vMjAwOC8wMS9zaWUvaW50ZXJuYWwvbGFiZWwiIC8+PGVsZW1lbnQgdWlkPSI5OTdhNzE2ZS1jMDNmLTQzYjEtYTViMC1kNmNkMDRlOWJhNDAiIHZhbHVlPSIiIHhtbG5zPSJodHRwOi8vd3d3LmJvbGRvbmphbWVzLmNvbS8yMDA4LzAxL3NpZS9pbnRlcm5hbC9sYWJlbCIgLz48ZWxlbWVudCB1aWQ9ImFhZmM5YTk1LWVlNWQtNDg3Yy05YzRlLTY3YTUzODBmMjk5MSIgdmFsdWU9IiIgeG1sbnM9Imh0dHA6Ly93d3cuYm9sZG9uamFtZXMuY29tLzIwMDgvMDEvc2llL2ludGVybmFsL2xhYmVsIiAvPjxlbGVtZW50IHVpZD0iZmI5OTEzMDgtYTNkZS00MGE4LTk2N2ItMDkyMjMzNDI0MWJhIiB2YWx1ZT0iIiB4bWxucz0iaHR0cDovL3d3dy5ib2xkb25qYW1lcy5jb20vMjAwOC8wMS9zaWUvaW50ZXJuYWwvbGFiZWwiIC8+PGVsZW1lbnQgdWlkPSJjMjA2ZDVmYS1hZWUxLTRmNjQtODlkOS1mODFlNGQ3YjNhY2MiIHZhbHVlPSIiIHhtbG5zPSJodHRwOi8vd3d3LmJvbGRvbmphbWVzLmNvbS8yMDA4LzAxL3NpZS9pbnRlcm5hbC9sYWJlbCIgLz48L3Npc2w+PFVzZXJOYW1lPlVTXG5ycDAyNDE1ODI8L1VzZXJOYW1lPjxEYXRlVGltZT4yLzE0LzIwMjAgNjoyOTozNCBQTTwvRGF0ZVRpbWU+PExhYmVsU3RyaW5nPk9yaWdpbiBKdXJpc2RpY3Rpb246IFVTICB8IFJheXRoZW9uIFByb3ByaWV0YXJ5IHwgUGVyIEN1cnJlbnQgUmF5dGhlb24gUG9saWN5IChSUC1PR0MtMDM1KSB8IFVTLUV4cG9ydCBDb250cm9sbGVkIEp1cmlzZGljdGlvbiBVbmRldGVybWluZWQgfCBQZXIgQ3VycmVudCBSYXl0aGVvbiBQb2xpY3kgKFBJLU9HQy1HVEMtNTAwNCk8L0xhYmVsU3RyaW5nPjwvaXRlbT48aXRlbT48c2lzbCBzaXNsVmVyc2lvbj0iMCIgcG9saWN5PSJjZGU1M2FjMS1iZjVmLTRhYWUtOWNmMS0wNzUwOWUyM2E0YjAiIG9yaWdpbj0idXNlclNlbGVjdGVkIj48ZWxlbWVudCB1aWQ9ImJiYTk0YzY1LWFjM2QtNGYzNC1iMmUxLThkZTExZWY2ZjAxYyIgdmFsdWU9IiIgeG1sbnM9Imh0dHA6Ly93d3cuYm9sZG9uamFtZXMuY29tLzIwMDgvMDEvc2llL2ludGVybmFsL2xhYmVsIiAvPjxlbGVtZW50IHVpZD0iYWNmOWVjYzMtMGY0NS00MjM0LWE5MGQtZTQzNjhmYWNkOTgxIiB2YWx1ZT0iIiB4bWxucz0iaHR0cDovL3d3dy5ib2xkb25qYW1lcy5jb20vMjAwOC8wMS9zaWUvaW50ZXJuYWwvbGFiZWwiIC8+PGVsZW1lbnQgdWlkPSJhYWZjOWE5NS1lZTVkLTQ4N2MtOWM0ZS02N2E1MzgwZjI5OTEiIHZhbHVlPSIiIHhtbG5zPSJodHRwOi8vd3d3LmJvbGRvbmphbWVzLmNvbS8yMDA4LzAxL3NpZS9pbnRlcm5hbC9sYWJlbCIgLz48ZWxlbWVudCB1aWQ9ImZiOTkxMzA4LWEzZGUtNDBhOC05NjdiLTA5MjIzMzQyNDFiYSIgdmFsdWU9IiIgeG1sbnM9Imh0dHA6Ly93d3cuYm9sZG9uamFtZXMuY29tLzIwMDgvMDEvc2llL2ludGVybmFsL2xhYmVsIiAvPjxlbGVtZW50IHVpZD0iYzIwNmQ1ZmEtYWVlMS00ZjY0LTg5ZDktZjgxZTRkN2IzYWNjIiB2YWx1ZT0iIiB4bWxucz0iaHR0cDovL3d3dy5ib2xkb25qYW1lcy5jb20vMjAwOC8wMS9zaWUvaW50ZXJuYWwvbGFiZWwiIC8+PC9zaXNsPjxVc2VyTmFtZT5VU1xucnAwMjQxNTgyPC9Vc2VyTmFtZT48RGF0ZVRpbWU+Mi8xNy8yMDIwIDg6Mjg6MzEgUE08L0RhdGVUaW1lPjxMYWJlbFN0cmluZz5PcmlnaW4gSnVyaXNkaWN0aW9uOiBVUyAgfCBJbnRlcm5hbCBVc2UgT25seSB8IFBlciBDdXJyZW50IFJheXRoZW9uIFBvbGljeSAoUlAtT0dDLTAzNSkgfCBVUy1FeHBvcnQgQ29udHJvbGxlZCBKdXJpc2RpY3Rpb24gVW5kZXRlcm1pbmVkIHwgUGVyIEN1cnJlbnQgUmF5dGhlb24gUG9saWN5IChQSS1PR0MtR1RDLTUwMDQpPC9MYWJlbFN0cmluZz48L2l0ZW0+PGl0ZW0+PHNpc2wgc2lzbFZlcnNpb249IjAiIHBvbGljeT0iY2RlNTNhYzEtYmY1Zi00YWFlLTljZjEtMDc1MDllMjNhNGIwIiBvcmlnaW49InVzZXJTZWxlY3RlZCI+PGVsZW1lbnQgdWlkPSJiYmE5NGM2NS1hYzNkLTRmMzQtYjJlMS04ZGUxMWVmNmYwMWMiIHZhbHVlPSIiIHhtbG5zPSJodHRwOi8vd3d3LmJvbGRvbmphbWVzLmNvbS8yMDA4LzAxL3NpZS9pbnRlcm5hbC9sYWJlbCIgLz48ZWxlbWVudCB1aWQ9Ijk5N2E3MTZlLWMwM2YtNDNiMS1hNWIwLWQ2Y2QwNGU5YmE0MCIgdmFsdWU9IiIgeG1sbnM9Imh0dHA6Ly93d3cuYm9sZG9uamFtZXMuY29tLzIwMDgvMDEvc2llL2ludGVybmFsL2xhYmVsIiAvPjxlbGVtZW50IHVpZD0iYWFmYzlhOTUtZWU1ZC00ODdjLTljNGUtNjdhNTM4MGYyOTkxIiB2YWx1ZT0iIiB4bWxucz0iaHR0cDovL3d3dy5ib2xkb25qYW1lcy5jb20vMjAwOC8wMS9zaWUvaW50ZXJuYWwvbGFiZWwiIC8+PGVsZW1lbnQgdWlkPSJiYzJiN2MwMS02ZGIxLTRlN2QtODhkMS1mYzYxNjc0Zjg2ZmQiIHZhbHVlPSIiIHhtbG5zPSJodHRwOi8vd3d3LmJvbGRvbmphbWVzLmNvbS8yMDA4LzAxL3NpZS9pbnRlcm5hbC9sYWJlbCIgLz48ZWxlbWVudCB1aWQ9IjkyZTk5M2EzLWFmMzItNGFmYi1hYTE5LTNhNDljZGI4MmM3YSIgdmFsdWU9IiIgeG1sbnM9Imh0dHA6Ly93d3cuYm9sZG9uamFtZXMuY29tLzIwMDgvMDEvc2llL2ludGVybmFsL2xhYmVsIiAvPjwvc2lzbD48VXNlck5hbWU+VVNcbnJwMDI0MTU4MjwvVXNlck5hbWU+PERhdGVUaW1lPjIvMTgvMjAyMCA0OjU4OjI4IFBNPC9EYXRlVGltZT48TGFiZWxTdHJpbmc+T3JpZ2luIEp1cmlzZGljdGlvbjogVVMgIHwgUmF5dGhlb24gUHJvcHJpZXRhcnkgfCBQZXIgQ3VycmVudCBSYXl0aGVvbiBQb2xpY3kgKFJQLU9HQy0wMzUpIHwgT3RoZXIgSW5mb3JtYXRpb24gKE5vdCBSZXF1aXJpbmcgYW4gRXhwb3J0IENvbnRyb2wgTWFya2luZykgfCBObyBtYXJraW5nIGFwcGxpZWQgYnkgdGhlIHRvb2w8L0xhYmVsU3RyaW5nPjwvaXRlbT48aXRlbT48c2lzbCBzaXNsVmVyc2lvbj0iMCIgcG9saWN5PSJjZGU1M2FjMS1iZjVmLTRhYWUtOWNmMS0wNzUwOWUyM2E0YjAiIG9yaWdpbj0idXNlclNlbGVjdGVkIj48ZWxlbWVudCB1aWQ9ImJiYTk0YzY1LWFjM2QtNGYzNC1iMmUxLThkZTExZWY2ZjAxYyIgdmFsdWU9IiIgeG1sbnM9Imh0dHA6Ly93d3cuYm9sZG9uamFtZXMuY29tLzIwMDgvMDEvc2llL2ludGVybmFsL2xhYmVsIiAvPjxlbGVtZW50IHVpZD0iMDEyZWIyMmMtNzZjYS00ZTRmLThhYjktZmFiYjA1NGFlMTQwIiB2YWx1ZT0iIiB4bWxucz0iaHR0cDovL3d3dy5ib2xkb25qYW1lcy5jb20vMjAwOC8wMS9zaWUvaW50ZXJuYWwvbGFiZWwiIC8+PGVsZW1lbnQgdWlkPSJhYWZjOWE5NS1lZTVkLTQ4N2MtOWM0ZS02N2E1MzgwZjI5OTEiIHZhbHVlPSIiIHhtbG5zPSJodHRwOi8vd3d3LmJvbGRvbmphbWVzLmNvbS8yMDA4LzAxL3NpZS9pbnRlcm5hbC9sYWJlbCIgLz48ZWxlbWVudCB1aWQ9ImZiOTkxMzA4LWEzZGUtNDBhOC05NjdiLTA5MjIzMzQyNDFiYSIgdmFsdWU9IiIgeG1sbnM9Imh0dHA6Ly93d3cuYm9sZG9uamFtZXMuY29tLzIwMDgvMDEvc2llL2ludGVybmFsL2xhYmVsIiAvPjxlbGVtZW50IHVpZD0iYzIwNmQ1ZmEtYWVlMS00ZjY0LTg5ZDktZjgxZTRkN2IzYWNjIiB2YWx1ZT0iIiB4bWxucz0iaHR0cDovL3d3dy5ib2xkb25qYW1lcy5jb20vMjAwOC8wMS9zaWUvaW50ZXJuYWwvbGFiZWwiIC8+PC9zaXNsPjxVc2VyTmFtZT5VU1xucnAwMjQxNTgyPC9Vc2VyTmFtZT48RGF0ZVRpbWU+Mi8xOC8yMDIwIDU6MDA6MTYgUE08L0RhdGVUaW1lPjxMYWJlbFN0cmluZz5PcmlnaW4gSnVyaXNkaWN0aW9uOiBVUyAgfCBSYXl0aGVvbiBNb3N0IFByaXZhdGUgfCBQZXIgQ3VycmVudCBSYXl0aGVvbiBQb2xpY3kgKFJQLU9HQy0wMzUpIHwgVVMtRXhwb3J0IENvbnRyb2xsZWQgSnVyaXNkaWN0aW9uIFVuZGV0ZXJtaW5lZCB8IFBlciBDdXJyZW50IFJheXRoZW9uIFBvbGljeSAoUEktT0dDLUdUQy01MDA0KTwvTGFiZWxTdHJpbmc+PC9pdGVtPjxpdGVtPjxzaXNsIHNpc2xWZXJzaW9uPSIwIiBwb2xpY3k9ImNkZTUzYWMxLWJmNWYtNGFhZS05Y2YxLTA3NTA5ZTIzYTRiMCIgb3JpZ2luPSJ1c2VyU2VsZWN0ZWQiPjxlbGVtZW50IHVpZD0iYmJhOTRjNjUtYWMzZC00ZjM0LWIyZTEtOGRlMTFlZjZmMDFjIiB2YWx1ZT0iIiB4bWxucz0iaHR0cDovL3d3dy5ib2xkb25qYW1lcy5jb20vMjAwOC8wMS9zaWUvaW50ZXJuYWwvbGFiZWwiIC8+PGVsZW1lbnQgdWlkPSJhY2Y5ZWNjMy0wZjQ1LTQyMzQtYTkwZC1lNDM2OGZhY2Q5ODEiIHZhbHVlPSIiIHhtbG5zPSJodHRwOi8vd3d3LmJvbGRvbmphbWVzLmNvbS8yMDA4LzAxL3NpZS9pbnRlcm5hbC9sYWJlbCIgLz48ZWxlbWVudCB1aWQ9ImFhZmM5YTk1LWVlNWQtNDg3Yy05YzRlLTY3YTUzODBmMjk5MSIgdmFsdWU9IiIgeG1sbnM9Imh0dHA6Ly93d3cuYm9sZG9uamFtZXMuY29tLzIwMDgvMDEvc2llL2ludGVybmFsL2xhYmVsIiAvPjxlbGVtZW50IHVpZD0iYmMyYjdjMDEtNmRiMS00ZTdkLTg4ZDEtZmM2MTY3NGY4NmZkIiB2YWx1ZT0iIiB4bWxucz0iaHR0cDovL3d3dy5ib2xkb25qYW1lcy5jb20vMjAwOC8wMS9zaWUvaW50ZXJuYWwvbGFiZWwiIC8+PGVsZW1lbnQgdWlkPSI5MmU5OTNhMy1hZjMyLTRhZmItYWExOS0zYTQ5Y2RiODJjN2EiIHZhbHVlPSIiIHhtbG5zPSJodHRwOi8vd3d3LmJvbGRvbmphbWVzLmNvbS8yMDA4LzAxL3NpZS9pbnRlcm5hbC9sYWJlbCIgLz48L3Npc2w+PFVzZXJOYW1lPlVTXG5ycDAyNDE1ODI8L1VzZXJOYW1lPjxEYXRlVGltZT4zLzcvMjAyMCA4OjIzOjM2IFBNPC9EYXRlVGltZT48TGFiZWxTdHJpbmc+T3JpZ2luIEp1cmlzZGljdGlvbjogVVMgIHwgSW50ZXJuYWwgVXNlIE9ubHkgfCBQZXIgQ3VycmVudCBSYXl0aGVvbiBQb2xpY3kgKFJQLU9HQy0wMzUpIHwgT3RoZXIgSW5mb3JtYXRpb24gKE5vdCBSZXF1aXJpbmcgYW4gRXhwb3J0IENvbnRyb2wgTWFya2luZykgfCBObyBtYXJraW5nIGFwcGxpZWQgYnkgdGhlIHRvb2w8L0xhYmVsU3RyaW5nPjwvaXRlbT48aXRlbT48c2lzbCBzaXNsVmVyc2lvbj0iMCIgcG9saWN5PSJjZGU1M2FjMS1iZjVmLTRhYWUtOWNmMS0wNzUwOWUyM2E0YjAiIG9yaWdpbj0idXNlclNlbGVjdGVkIj48ZWxlbWVudCB1aWQ9ImJiYTk0YzY1LWFjM2QtNGYzNC1iMmUxLThkZTExZWY2ZjAxYyIgdmFsdWU9IiIgeG1sbnM9Imh0dHA6Ly93d3cuYm9sZG9uamFtZXMuY29tLzIwMDgvMDEvc2llL2ludGVybmFsL2xhYmVsIiAvPjxlbGVtZW50IHVpZD0iOTk3YTcxNmUtYzAzZi00M2IxLWE1YjAtZDZjZDA0ZTliYTQwIiB2YWx1ZT0iIiB4bWxucz0iaHR0cDovL3d3dy5ib2xkb25qYW1lcy5jb20vMjAwOC8wMS9zaWUvaW50ZXJuYWwvbGFiZWwiIC8+PGVsZW1lbnQgdWlkPSJhYWZjOWE5NS1lZTVkLTQ4N2MtOWM0ZS02N2E1MzgwZjI5OTEiIHZhbHVlPSIiIHhtbG5zPSJodHRwOi8vd3d3LmJvbGRvbmphbWVzLmNvbS8yMDA4LzAxL3NpZS9pbnRlcm5hbC9sYWJlbCIgLz48ZWxlbWVudCB1aWQ9ImZiOTkxMzA4LWEzZGUtNDBhOC05NjdiLTA5MjIzMzQyNDFiYSIgdmFsdWU9IiIgeG1sbnM9Imh0dHA6Ly93d3cuYm9sZG9uamFtZXMuY29tLzIwMDgvMDEvc2llL2ludGVybmFsL2xhYmVsIiAvPjxlbGVtZW50IHVpZD0iYzIwNmQ1ZmEtYWVlMS00ZjY0LTg5ZDktZjgxZTRkN2IzYWNjIiB2YWx1ZT0iIiB4bWxucz0iaHR0cDovL3d3dy5ib2xkb25qYW1lcy5jb20vMjAwOC8wMS9zaWUvaW50ZXJuYWwvbGFiZWwiIC8+PC9zaXNsPjxVc2VyTmFtZT5VU1xucnAwMjQxNTgyPC9Vc2VyTmFtZT48RGF0ZVRpbWU+My83LzIwMjAgODoyNDo0OSBQTTwvRGF0ZVRpbWU+PExhYmVsU3RyaW5nPk9yaWdpbiBKdXJpc2RpY3Rpb246IFVTICB8IFJheXRoZW9uIFByb3ByaWV0YXJ5IHwgUGVyIEN1cnJlbnQgUmF5dGhlb24gUG9saWN5IChSUC1PR0MtMDM1KSB8IFVTLUV4cG9ydCBDb250cm9sbGVkIEp1cmlzZGljdGlvbiBVbmRldGVybWluZWQgfCBQZXIgQ3VycmVudCBSYXl0aGVvbiBQb2xpY3kgKFBJLU9HQy1HVEMtNTAwNCk8L0xhYmVsU3RyaW5nPjwvaXRlbT48aXRlbT48c2lzbCBzaXNsVmVyc2lvbj0iMCIgcG9saWN5PSJjZGU1M2FjMS1iZjVmLTRhYWUtOWNmMS0wNzUwOWUyM2E0YjAiIG9yaWdpbj0idXNlclNlbGVjdGVkIj48ZWxlbWVudCB1aWQ9ImJiYTk0YzY1LWFjM2QtNGYzNC1iMmUxLThkZTExZWY2ZjAxYyIgdmFsdWU9IiIgeG1sbnM9Imh0dHA6Ly93d3cuYm9sZG9uamFtZXMuY29tLzIwMDgvMDEvc2llL2ludGVybmFsL2xhYmVsIiAvPjxlbGVtZW50IHVpZD0iZmI5OTEzMDgtYTNkZS00MGE4LTk2N2ItMDkyMjMzNDI0MWJhIiB2YWx1ZT0iIiB4bWxucz0iaHR0cDovL3d3dy5ib2xkb25qYW1lcy5jb20vMjAwOC8wMS9zaWUvaW50ZXJuYWwvbGFiZWwiIC8+PGVsZW1lbnQgdWlkPSJjMjA2ZDVmYS1hZWUxLTRmNjQtODlkOS1mODFlNGQ3YjNhY2MiIHZhbHVlPSIiIHhtbG5zPSJodHRwOi8vd3d3LmJvbGRvbmphbWVzLmNvbS8yMDA4LzAxL3NpZS9pbnRlcm5hbC9sYWJlbCIgLz48ZWxlbWVudCB1aWQ9ImFjZjllY2MzLTBmNDUtNDIzNC1hOTBkLWU0MzY4ZmFjZDk4MSIgdmFsdWU9IiIgeG1sbnM9Imh0dHA6Ly93d3cuYm9sZG9uamFtZXMuY29tLzIwMDgvMDEvc2llL2ludGVybmFsL2xhYmVsIiAvPjxlbGVtZW50IHVpZD0iYWFmYzlhOTUtZWU1ZC00ODdjLTljNGUtNjdhNTM4MGYyOTkxIiB2YWx1ZT0iIiB4bWxucz0iaHR0cDovL3d3dy5ib2xkb25qYW1lcy5jb20vMjAwOC8wMS9zaWUvaW50ZXJuYWwvbGFiZWwiIC8+PC9zaXNsPjxVc2VyTmFtZT5VU1wxMTAzMDg1PC9Vc2VyTmFtZT48RGF0ZVRpbWU+My8xMi8yMDIwIDY6MjM6MjMgUE08L0RhdGVUaW1lPjxMYWJlbFN0cmluZz5PcmlnaW4gSnVyaXNkaWN0aW9uOiBVUyAgfCBJbnRlcm5hbCBVc2UgT25seSB8IFBlciBDdXJyZW50IFJheXRoZW9uIFBvbGljeSAoUlAtT0dDLTAzNSkgfCBVUy1FeHBvcnQgQ29udHJvbGxlZCBKdXJpc2RpY3Rpb24gVW5kZXRlcm1pbmVkIHwgUGVyIEN1cnJlbnQgUmF5dGhlb24gUG9saWN5IChQSS1PR0MtR1RDLTUwMDQpPC9MYWJlbFN0cmluZz48L2l0ZW0+PGl0ZW0+PHNpc2wgc2lzbFZlcnNpb249IjAiIHBvbGljeT0iY2RlNTNhYzEtYmY1Zi00YWFlLTljZjEtMDc1MDllMjNhNGIwIiBvcmlnaW49InVzZXJTZWxlY3RlZCIgLz48VXNlck5hbWU+VVNcMTEwMzA4NTwvVXNlck5hbWU+PERhdGVUaW1lPjMvMTMvMjAyMCAxMDowMjo0NCBQTTwvRGF0ZVRpbWU+PExhYmVsU3RyaW5nPlRoaXMgYXJ0aWZhY3QgaGFzIG5vIGNsYXNzaWZpY2F0aW9uLjwvTGFiZWxTdHJpbmc+PC9pdGVtPjxpdGVtPjxzaXNsIHNpc2xWZXJzaW9uPSIwIiBwb2xpY3k9ImNkZTUzYWMxLWJmNWYtNGFhZS05Y2YxLTA3NTA5ZTIzYTRiMCIgb3JpZ2luPSJ1c2VyU2VsZWN0ZWQiPjxlbGVtZW50IHVpZD0iMTVmZWZhMWMtYWY2Ny00ZWJmLWE3MWQtZjAxNjIxMTY4OTYyIiB2YWx1ZT0iIiB4bWxucz0iaHR0cDovL3d3dy5ib2xkb25qYW1lcy5jb20vMjAwOC8wMS9zaWUvaW50ZXJuYWwvbGFiZWwiIC8+PGVsZW1lbnQgdWlkPSJhYWZjOWE5NS1lZTVkLTQ4N2MtOWM0ZS02N2E1MzgwZjI5OTEiIHZhbHVlPSIiIHhtbG5zPSJodHRwOi8vd3d3LmJvbGRvbmphbWVzLmNvbS8yMDA4LzAxL3NpZS9pbnRlcm5hbC9sYWJlbCIgLz48ZWxlbWVudCB1aWQ9ImJiYTk0YzY1LWFjM2QtNGYzNC1iMmUxLThkZTExZWY2ZjAxYyIgdmFsdWU9IiIgeG1sbnM9Imh0dHA6Ly93d3cuYm9sZG9uamFtZXMuY29tLzIwMDgvMDEvc2llL2ludGVybmFsL2xhYmVsIiAvPjxlbGVtZW50IHVpZD0iYmMyYjdjMDEtNmRiMS00ZTdkLTg4ZDEtZmM2MTY3NGY4NmZkIiB2YWx1ZT0iIiB4bWxucz0iaHR0cDovL3d3dy5ib2xkb25qYW1lcy5jb20vMjAwOC8wMS9zaWUvaW50ZXJuYWwvbGFiZWwiIC8+PGVsZW1lbnQgdWlkPSI5MmU5OTNhMy1hZjMyLTRhZmItYWExOS0zYTQ5Y2RiODJjN2EiIHZhbHVlPSIiIHhtbG5zPSJodHRwOi8vd3d3LmJvbGRvbmphbWVzLmNvbS8yMDA4LzAxL3NpZS9pbnRlcm5hbC9sYWJlbCIgLz48L3Npc2w+PFVzZXJOYW1lPlVTXDExMDMwODU8L1VzZXJOYW1lPjxEYXRlVGltZT4zLzEzLzIwMjAgMTA6MDU6NDQgUE08L0RhdGVUaW1lPjxMYWJlbFN0cmluZz5PcmlnaW4gSnVyaXNkaWN0aW9uOiBVUyAgfCBUaGlyZCBQYXJ0eSBQcm9wcmlldGFyeSAtIE5lZWQgdG8gS25vdyB8IFBlciBDdXJyZW50IFJheXRoZW9uIFBvbGljeSAoUlAtT0dDLTAzNSkgfCBPdGhlciBJbmZvcm1hdGlvbiAoTm90IFJlcXVpcmluZyBhbiBFeHBvcnQgQ29udHJvbCBNYXJraW5nKSB8IE5vIG1hcmtpbmcgYXBwbGllZCBieSB0aGUgdG9vbDwvTGFiZWxTdHJpbmc+PC9pdGVtPjxpdGVtPjxzaXNsIHNpc2xWZXJzaW9uPSIwIiBwb2xpY3k9ImNkZTUzYWMxLWJmNWYtNGFhZS05Y2YxLTA3NTA5ZTIzYTRiMCIgb3JpZ2luPSJ1c2VyU2VsZWN0ZWQiPjxlbGVtZW50IHVpZD0iYmJhOTRjNjUtYWMzZC00ZjM0LWIyZTEtOGRlMTFlZjZmMDFjIiB2YWx1ZT0iIiB4bWxucz0iaHR0cDovL3d3dy5ib2xkb25qYW1lcy5jb20vMjAwOC8wMS9zaWUvaW50ZXJuYWwvbGFiZWwiIC8+PGVsZW1lbnQgdWlkPSJiYzJiN2MwMS02ZGIxLTRlN2QtODhkMS1mYzYxNjc0Zjg2ZmQiIHZhbHVlPSIiIHhtbG5zPSJodHRwOi8vd3d3LmJvbGRvbmphbWVzLmNvbS8yMDA4LzAxL3NpZS9pbnRlcm5hbC9sYWJlbCIgLz48ZWxlbWVudCB1aWQ9IjkyZTk5M2EzLWFmMzItNGFmYi1hYTE5LTNhNDljZGI4MmM3YSIgdmFsdWU9IiIgeG1sbnM9Imh0dHA6Ly93d3cuYm9sZG9uamFtZXMuY29tLzIwMDgvMDEvc2llL2ludGVybmFsL2xhYmVsIiAvPjxlbGVtZW50IHVpZD0iYWNmOWVjYzMtMGY0NS00MjM0LWE5MGQtZTQzNjhmYWNkOTgxIiB2YWx1ZT0iIiB4bWxucz0iaHR0cDovL3d3dy5ib2xkb25qYW1lcy5jb20vMjAwOC8wMS9zaWUvaW50ZXJuYWwvbGFiZWwiIC8+PGVsZW1lbnQgdWlkPSJhYWZjOWE5NS1lZTVkLTQ4N2MtOWM0ZS02N2E1MzgwZjI5OTEiIHZhbHVlPSIiIHhtbG5zPSJodHRwOi8vd3d3LmJvbGRvbmphbWVzLmNvbS8yMDA4LzAxL3NpZS9pbnRlcm5hbC9sYWJlbCIgLz48L3Npc2w+PFVzZXJOYW1lPlVTXG5ycDAyNDE1ODI8L1VzZXJOYW1lPjxEYXRlVGltZT4zLzIzLzIwMjAgNzo1ODoxOSBQTTwvRGF0ZVRpbWU+PExhYmVsU3RyaW5nPk9yaWdpbiBKdXJpc2RpY3Rpb246IFVTICB8IEludGVybmFsIFVzZSBPbmx5IHwgUGVyIEN1cnJlbnQgUmF5dGhlb24gUG9saWN5IChSUC1PR0MtMDM1KSB8IE90aGVyIEluZm9ybWF0aW9uIChOb3QgUmVxdWlyaW5nIGFuIEV4cG9ydCBDb250cm9sIE1hcmtpbmcpIHwgTm8gbWFya2luZyBhcHBsaWVkIGJ5IHRoZSB0b29sPC9MYWJlbFN0cmluZz48L2l0ZW0+PGl0ZW0+PHNpc2wgc2lzbFZlcnNpb249IjAiIHBvbGljeT0iY2RlNTNhYzEtYmY1Zi00YWFlLTljZjEtMDc1MDllMjNhNGIwIiBvcmlnaW49InVzZXJTZWxlY3RlZCI+PGVsZW1lbnQgdWlkPSJiYmE5NGM2NS1hYzNkLTRmMzQtYjJlMS04ZGUxMWVmNmYwMWMiIHZhbHVlPSIiIHhtbG5zPSJodHRwOi8vd3d3LmJvbGRvbmphbWVzLmNvbS8yMDA4LzAxL3NpZS9pbnRlcm5hbC9sYWJlbCIgLz48ZWxlbWVudCB1aWQ9ImJjMmI3YzAxLTZkYjEtNGU3ZC04OGQxLWZjNjE2NzRmODZmZCIgdmFsdWU9IiIgeG1sbnM9Imh0dHA6Ly93d3cuYm9sZG9uamFtZXMuY29tLzIwMDgvMDEvc2llL2ludGVybmFsL2xhYmVsIiAvPjxlbGVtZW50IHVpZD0iOTJlOTkzYTMtYWYzMi00YWZiLWFhMTktM2E0OWNkYjgyYzdhIiB2YWx1ZT0iIiB4bWxucz0iaHR0cDovL3d3dy5ib2xkb25qYW1lcy5jb20vMjAwOC8wMS9zaWUvaW50ZXJuYWwvbGFiZWwiIC8+PGVsZW1lbnQgdWlkPSIxNWZlZmExYy1hZjY3LTRlYmYtYTcxZC1mMDE2MjExNjg5NjIiIHZhbHVlPSIiIHhtbG5zPSJodHRwOi8vd3d3LmJvbGRvbmphbWVzLmNvbS8yMDA4LzAxL3NpZS9pbnRlcm5hbC9sYWJlbCIgLz48ZWxlbWVudCB1aWQ9ImFhZmM5YTk1LWVlNWQtNDg3Yy05YzRlLTY3YTUzODBmMjk5MSIgdmFsdWU9IiIgeG1sbnM9Imh0dHA6Ly93d3cuYm9sZG9uamFtZXMuY29tLzIwMDgvMDEvc2llL2ludGVybmFsL2xhYmVsIiAvPjwvc2lzbD48VXNlck5hbWU+VVNcbnJwMDI0MTU4MjwvVXNlck5hbWU+PERhdGVUaW1lPjMvMjMvMjAyMCA4OjQ4OjA4IFBNPC9EYXRlVGltZT48TGFiZWxTdHJpbmc+T3JpZ2luIEp1cmlzZGljdGlvbjogVVMgIHwgVGhpcmQgUGFydHkgUHJvcHJpZXRhcnkgLSBOZWVkIHRvIEtub3cgfCBQZXIgQ3VycmVudCBSYXl0aGVvbiBQb2xpY3kgKFJQLU9HQy0wMzUpIHwgT3RoZXIgSW5mb3JtYXRpb24gKE5vdCBSZXF1aXJpbmcgYW4gRXhwb3J0IENvbnRyb2wgTWFya2luZykgfCBObyBtYXJraW5nIGFwcGxpZWQgYnkgdGhlIHRvb2w8L0xhYmVsU3RyaW5nPjwvaXRlbT48aXRlbT48c2lzbCBzaXNsVmVyc2lvbj0iMCIgcG9saWN5PSJjZGU1M2FjMS1iZjVmLTRhYWUtOWNmMS0wNzUwOWUyM2E0YjAiIG9yaWdpbj0idXNlclNlbGVjdGVkIiAvPjxVc2VyTmFtZT5VU1wxMTAzMDg1PC9Vc2VyTmFtZT48RGF0ZVRpbWU+My8yMy8yMDIwIDEwOjE1OjQwIFBNPC9EYXRlVGltZT48TGFiZWxTdHJpbmc+VGhpcyBhcnRpZmFjdCBoYXMgbm8gY2xhc3NpZmljYXRpb24uPC9MYWJlbFN0cmluZz48L2l0ZW0+PGl0ZW0+PHNpc2wgc2lzbFZlcnNpb249IjAiIHBvbGljeT0iY2RlNTNhYzEtYmY1Zi00YWFlLTljZjEtMDc1MDllMjNhNGIwIiBvcmlnaW49ImRlZmF1bHRWYWx1ZSI+PGVsZW1lbnQgdWlkPSJiYmE5NGM2NS1hYzNkLTRmMzQtYjJlMS04ZGUxMWVmNmYwMWMiIHZhbHVlPSIiIHhtbG5zPSJodHRwOi8vd3d3LmJvbGRvbmphbWVzLmNvbS8yMDA4LzAxL3NpZS9pbnRlcm5hbC9sYWJlbCIgLz48L3Npc2w+PFVzZXJOYW1lPlVTXG5ycDAyNDE1ODI8L1VzZXJOYW1lPjxEYXRlVGltZT40LzIwLzIwMjAgNDoyOToyMyBQTTwvRGF0ZVRpbWU+PExhYmVsU3RyaW5nPk9yaWdpbiBKdXJpc2RpY3Rpb246IFVTIDwvTGFiZWxTdHJpbmc+PC9pdGVtPjxpdGVtPjxzaXNsIHNpc2xWZXJzaW9uPSIwIiBwb2xpY3k9ImNkZTUzYWMxLWJmNWYtNGFhZS05Y2YxLTA3NTA5ZTIzYTRiMCIgb3JpZ2luPSJ1c2VyU2VsZWN0ZWQiIC8+PFVzZXJOYW1lPlVTXDExMDMwODU8L1VzZXJOYW1lPjxEYXRlVGltZT40LzIwLzIwMjAgNjozMjo1MCBQTTwvRGF0ZVRpbWU+PExhYmVsU3RyaW5nPlRoaXMgYXJ0aWZhY3QgaGFzIG5vIGNsYXNzaWZpY2F0aW9uLjwvTGFiZWxTdHJpbmc+PC9pdGVtPjxpdGVtPjxzaXNsIHNpc2xWZXJzaW9uPSIwIiBwb2xpY3k9ImNkZTUzYWMxLWJmNWYtNGFhZS05Y2YxLTA3NTA5ZTIzYTRiMCIgb3JpZ2luPSJkZWZhdWx0VmFsdWUiPjxlbGVtZW50IHVpZD0iYmJhOTRjNjUtYWMzZC00ZjM0LWIyZTEtOGRlMTFlZjZmMDFjIiB2YWx1ZT0iIiB4bWxucz0iaHR0cDovL3d3dy5ib2xkb25qYW1lcy5jb20vMjAwOC8wMS9zaWUvaW50ZXJuYWwvbGFiZWwiIC8+PC9zaXNsPjxVc2VyTmFtZT5VU1x2YWExMDUwPC9Vc2VyTmFtZT48RGF0ZVRpbWU+MTIvMTYvMjAyMCA1OjIyOjIzIFBNPC9EYXRlVGltZT48TGFiZWxTdHJpbmc+T3JpZ2luIEp1cmlzZGljdGlvbjogVVMgPC9MYWJlbFN0cmluZz48L2l0ZW0+PGl0ZW0+PHNpc2wgc2lzbFZlcnNpb249IjAiIHBvbGljeT0iY2RlNTNhYzEtYmY1Zi00YWFlLTljZjEtMDc1MDllMjNhNGIwIiBvcmlnaW49InVzZXJTZWxlY3RlZCI+PGVsZW1lbnQgdWlkPSJiYmE5NGM2NS1hYzNkLTRmMzQtYjJlMS04ZGUxMWVmNmYwMWMiIHZhbHVlPSIiIHhtbG5zPSJodHRwOi8vd3d3LmJvbGRvbmphbWVzLmNvbS8yMDA4LzAxL3NpZS9pbnRlcm5hbC9sYWJlbCIgLz48ZWxlbWVudCB1aWQ9ImRlY2VjYmQ2LWRhM2ItNDZmZS04ZjAwLWY5ZDlkZWVhMmVlMSIgdmFsdWU9IiIgeG1sbnM9Imh0dHA6Ly93d3cuYm9sZG9uamFtZXMuY29tLzIwMDgvMDEvc2llL2ludGVybmFsL2xhYmVsIiAvPjxlbGVtZW50IHVpZD0iYmJiZjdiZjQtNGY0Zi00MTg5LTljNWUtNjUwMTVkZThhNmFkIiB2YWx1ZT0iIiB4bWxucz0iaHR0cDovL3d3dy5ib2xkb25qYW1lcy5jb20vMjAwOC8wMS9zaWUvaW50ZXJuYWwvbGFiZWwiIC8+PGVsZW1lbnQgdWlkPSJmYjk5MTMwOC1hM2RlLTQwYTgtOTY3Yi0wOTIyMzM0MjQxYmEiIHZhbHVlPSIiIHhtbG5zPSJodHRwOi8vd3d3LmJvbGRvbmphbWVzLmNvbS8yMDA4LzAxL3NpZS9pbnRlcm5hbC9sYWJlbCIgLz48ZWxlbWVudCB1aWQ9ImMyMDZkNWZhLWFlZTEtNGY2NC04OWQ5LWY4MWU0ZDdiM2FjYyIgdmFsdWU9IiIgeG1sbnM9Imh0dHA6Ly93d3cuYm9sZG9uamFtZXMuY29tLzIwMDgvMDEvc2llL2ludGVybmFsL2xhYmVsIiAvPjwvc2lzbD48VXNlck5hbWU+VVNcdmFhMTA1MDwvVXNlck5hbWU+PERhdGVUaW1lPjEyLzE3LzIwMjAgMTo1NDo0NiBQTTwvRGF0ZVRpbWU+PExhYmVsU3RyaW5nPk9yaWdpbiBKdXJpc2RpY3Rpb246IFVTICB8IFVucmVzdHJpY3RlZCBDb250ZW50IHwgTm8gbWFya2luZyBhcHBsaWVkIGJ5IHRoaXMgdG9vbCB8IFVTLUV4cG9ydCBDb250cm9sbGVkIEp1cmlzZGljdGlvbiBVbmRldGVybWluZWQgfCBQZXIgQ3VycmVudCBSYXl0aGVvbiBQb2xpY3kgKFBJLU9HQy1HVEMtNTAwNCk8L0xhYmVsU3RyaW5nPjwvaXRlbT48aXRlbT48c2lzbCBzaXNsVmVyc2lvbj0iMCIgcG9saWN5PSJjZGU1M2FjMS1iZjVmLTRhYWUtOWNmMS0wNzUwOWUyM2E0YjAiIG9yaWdpbj0idXNlclNlbGVjdGVkIiAvPjxVc2VyTmFtZT5VU1wxMTYxMTEzPC9Vc2VyTmFtZT48RGF0ZVRpbWU+Ni8xLzIwMjMgMjo0OTo1NCBQTTwvRGF0ZVRpbWU+PExhYmVsU3RyaW5nPlRoaXMgYXJ0aWZhY3QgaGFzIG5vIGNsYXNzaWZpY2F0aW9uLjwvTGFiZWxTdHJpbmc+PC9pdGVtPjxpdGVtPjxzaXNsIHNpc2xWZXJzaW9uPSIwIiBwb2xpY3k9ImNkZTUzYWMxLWJmNWYtNGFhZS05Y2YxLTA3NTA5ZTIzYTRiMCIgb3JpZ2luPSJ1c2VyU2VsZWN0ZWQiPjxlbGVtZW50IHVpZD0iZGVjZWNiZDYtZGEzYi00NmZlLThmMDAtZjlkOWRlZWEyZWUxIiB2YWx1ZT0iIiB4bWxucz0iaHR0cDovL3d3dy5ib2xkb25qYW1lcy5jb20vMjAwOC8wMS9zaWUvaW50ZXJuYWwvbGFiZWwiIC8+PGVsZW1lbnQgdWlkPSJhNGE5ZjM4Mi04Y2VjLTQwYmItYTljMy1jMTg3NmRlZDlkZWUiIHZhbHVlPSIiIHhtbG5zPSJodHRwOi8vd3d3LmJvbGRvbmphbWVzLmNvbS8yMDA4LzAxL3NpZS9pbnRlcm5hbC9sYWJlbCIgLz48ZWxlbWVudCB1aWQ9ImJiYTk0YzY1LWFjM2QtNGYzNC1iMmUxLThkZTExZWY2ZjAxYyIgdmFsdWU9IiIgeG1sbnM9Imh0dHA6Ly93d3cuYm9sZG9uamFtZXMuY29tLzIwMDgvMDEvc2llL2ludGVybmFsL2xhYmVsIiAvPjxlbGVtZW50IHVpZD0iZDc1OWNkN2EtYjU3Yy00MmU0LTlhNDktOWI4MmEyMzM3NTc5IiB2YWx1ZT0iIiB4bWxucz0iaHR0cDovL3d3dy5ib2xkb25qYW1lcy5jb20vMjAwOC8wMS9zaWUvaW50ZXJuYWwvbGFiZWwiIC8+PGVsZW1lbnQgdWlkPSI5MmU5OTNhMy1hZjMyLTRhZmItYWExOS0zYTQ5Y2RiODJjN2EiIHZhbHVlPSIiIHhtbG5zPSJodHRwOi8vd3d3LmJvbGRvbmphbWVzLmNvbS8yMDA4LzAxL3NpZS9pbnRlcm5hbC9sYWJlbCIgLz48L3Npc2w+PFVzZXJOYW1lPlVTXDExNjExMTM8L1VzZXJOYW1lPjxEYXRlVGltZT42LzYvMjAyMyA3OjEwOjE1IFBNPC9EYXRlVGltZT48TGFiZWxTdHJpbmc+T3JpZ2luIEp1cmlzZGljdGlvbjogVVMgfCBVbnJlc3RyaWN0ZWQgQ29udGVudCB8IFJheXRoZW9uIFRlY2hub2xvZ2llcyAoQ29ycG9yYXRlIE9ubHkpIHwgTm9uLUV4cG9ydCBDb250cm9sbGVkIFRlY2huaWNhbCBJbmZvcm1hdGlvbiAoRVhJTSBEZXRlcm1pbmVkIE9ubHkpIHwgTm8gbWFya2luZyBhcHBsaWVkIGJ5IHRoZSB0b29sPC9MYWJlbFN0cmluZz48L2l0ZW0+PGl0ZW0+PHNpc2wgc2lzbFZlcnNpb249IjAiIHBvbGljeT0iY2RlNTNhYzEtYmY1Zi00YWFlLTljZjEtMDc1MDllMjNhNGIwIiBvcmlnaW49InVzZXJTZWxlY3RlZCI+PGVsZW1lbnQgdWlkPSJiYmE5NGM2NS1hYzNkLTRmMzQtYjJlMS04ZGUxMWVmNmYwMWMiIHZhbHVlPSIiIHhtbG5zPSJodHRwOi8vd3d3LmJvbGRvbmphbWVzLmNvbS8yMDA4LzAxL3NpZS9pbnRlcm5hbC9sYWJlbCIgLz48ZWxlbWVudCB1aWQ9ImJjMmI3YzAxLTZkYjEtNGU3ZC04OGQxLWZjNjE2NzRmODZmZCIgdmFsdWU9IiIgeG1sbnM9Imh0dHA6Ly93d3cuYm9sZG9uamFtZXMuY29tLzIwMDgvMDEvc2llL2ludGVybmFsL2xhYmVsIiAvPjxlbGVtZW50IHVpZD0iOTJlOTkzYTMtYWYzMi00YWZiLWFhMTktM2E0OWNkYjgyYzdhIiB2YWx1ZT0iIiB4bWxucz0iaHR0cDovL3d3dy5ib2xkb25qYW1lcy5jb20vMjAwOC8wMS9zaWUvaW50ZXJuYWwvbGFiZWwiIC8+PGVsZW1lbnQgdWlkPSJhY2Y5ZWNjMy0wZjQ1LTQyMzQtYTkwZC1lNDM2OGZhY2Q5ODEiIHZhbHVlPSIiIHhtbG5zPSJodHRwOi8vd3d3LmJvbGRvbmphbWVzLmNvbS8yMDA4LzAxL3NpZS9pbnRlcm5hbC9sYWJlbCIgLz48ZWxlbWVudCB1aWQ9ImE0YTlmMzgyLThjZWMtNDBiYi1hOWMzLWMxODc2ZGVkOWRlZSIgdmFsdWU9IiIgeG1sbnM9Imh0dHA6Ly93d3cuYm9sZG9uamFtZXMuY29tLzIwMDgvMDEvc2llL2ludGVybmFsL2xhYmVsIiAvPjwvc2lzbD48VXNlck5hbWU+VVNcMTE2MTExMzwvVXNlck5hbWU+PERhdGVUaW1lPjYvNi8yMDIzIDc6MTA6MzIgUE08L0RhdGVUaW1lPjxMYWJlbFN0cmluZz5PcmlnaW4gSnVyaXNkaWN0aW9uOiBVUyB8IENvbXBhbnkgVXNlL0ludGVybmFsIFVzZSBPbmx5IHwgUmF5dGhlb24gVGVjaG5vbG9naWVzIChDb3Jwb3JhdGUgT25seSkgfCBPdGhlciBJbmZvcm1hdGlvbiAoTm90IFJlcXVpcmluZyBhbiBFeHBvcnQgQ29udHJvbCBNYXJraW5nKSB8IE5vIG1hcmtpbmcgYXBwbGllZCBieSB0aGUgdG9vbDwvTGFiZWxTdHJpbmc+PC9pdGVtPjxpdGVtPjxzaXNsIHNpc2xWZXJzaW9uPSIwIiBwb2xpY3k9ImNkZTUzYWMxLWJmNWYtNGFhZS05Y2YxLTA3NTA5ZTIzYTRiMCIgb3JpZ2luPSJ1c2VyU2VsZWN0ZWQiIC8+PFVzZXJOYW1lPlVTXDExNjExMTM8L1VzZXJOYW1lPjxEYXRlVGltZT42LzYvMjAyMyA4OjE3OjQwIFBNPC9EYXRlVGltZT48TGFiZWxTdHJpbmc+VGhpcyBhcnRpZmFjdCBoYXMgbm8gY2xhc3NpZmljYXRpb24uPC9MYWJlbFN0cmluZz48L2l0ZW0+PGl0ZW0+PHNpc2wgc2lzbFZlcnNpb249IjAiIHBvbGljeT0iY2RlNTNhYzEtYmY1Zi00YWFlLTljZjEtMDc1MDllMjNhNGIwIiBvcmlnaW49InVzZXJTZWxlY3RlZCI+PGVsZW1lbnQgdWlkPSJhY2Y5ZWNjMy0wZjQ1LTQyMzQtYTkwZC1lNDM2OGZhY2Q5ODEiIHZhbHVlPSIiIHhtbG5zPSJodHRwOi8vd3d3LmJvbGRvbmphbWVzLmNvbS8yMDA4LzAxL3NpZS9pbnRlcm5hbC9sYWJlbCIgLz48ZWxlbWVudCB1aWQ9IjY5ZDAwYWNkLTg5YzQtNDRlMC04NGFlLWU1OGRhMTdmNDg1YyIgdmFsdWU9IiIgeG1sbnM9Imh0dHA6Ly93d3cuYm9sZG9uamFtZXMuY29tLzIwMDgvMDEvc2llL2ludGVybmFsL2xhYmVsIiAvPjxlbGVtZW50IHVpZD0iYmJhOTRjNjUtYWMzZC00ZjM0LWIyZTEtOGRlMTFlZjZmMDFjIiB2YWx1ZT0iIiB4bWxucz0iaHR0cDovL3d3dy5ib2xkb25qYW1lcy5jb20vMjAwOC8wMS9zaWUvaW50ZXJuYWwvbGFiZWwiIC8+PGVsZW1lbnQgdWlkPSJiYzJiN2MwMS02ZGIxLTRlN2QtODhkMS1mYzYxNjc0Zjg2ZmQiIHZhbHVlPSIiIHhtbG5zPSJodHRwOi8vd3d3LmJvbGRvbmphbWVzLmNvbS8yMDA4LzAxL3NpZS9pbnRlcm5hbC9sYWJlbCIgLz48ZWxlbWVudCB1aWQ9IjkyZTk5M2EzLWFmMzItNGFmYi1hYTE5LTNhNDljZGI4MmM3YSIgdmFsdWU9IiIgeG1sbnM9Imh0dHA6Ly93d3cuYm9sZG9uamFtZXMuY29tLzIwMDgvMDEvc2llL2ludGVybmFsL2xhYmVsIiAvPjxlbGVtZW50IHVpZD0iYTI3ZjY3MWYtMDQ1YS00OWQyLWIyMzgtNGYzY2EyZTBiMGJiIiB2YWx1ZT0iIiB4bWxucz0iaHR0cDovL3d3dy5ib2xkb25qYW1lcy5jb20vMjAwOC8wMS9zaWUvaW50ZXJuYWwvbGFiZWwiIC8+PC9zaXNsPjxVc2VyTmFtZT5BRFhVXEUyMTE2MTExMzwvVXNlck5hbWU+PERhdGVUaW1lPjgvMTQvMjAyMyAxOjUwOjQ2IFBNPC9EYXRlVGltZT48TGFiZWxTdHJpbmc+RXhwb3J0IENvbnRyb2wgQ291bnRyeTogVVMgIHwgQ29tcGFueSBVc2UgfCBSYXl0aGVvbiBUZWNobm9sb2dpZXMgfCBPdGhlciBJbmZvcm1hdGlvbiAoTm90IFJlcXVpcmluZyBhbiBFeHBvcnQgQ29udHJvbCBNYXJraW5nKSB8IE5vIHZpc3VhbCBtYXJraW5nIGFwcGxpZWQgYnkgdGhlIHRvb2wgfCBObyBUZWNoIERhdGE8L0xhYmVsU3RyaW5nPjwvaXRlbT48aXRlbT48c2lzbCBzaXNsVmVyc2lvbj0iMCIgcG9saWN5PSJjZGU1M2FjMS1iZjVmLTRhYWUtOWNmMS0wNzUwOWUyM2E0YjAiIG9yaWdpbj0idXNlclNlbGVjdGVkIj48ZWxlbWVudCB1aWQ9ImFjZjllY2MzLTBmNDUtNDIzNC1hOTBkLWU0MzY4ZmFjZDk4MSIgdmFsdWU9IiIgeG1sbnM9Imh0dHA6Ly93d3cuYm9sZG9uamFtZXMuY29tLzIwMDgvMDEvc2llL2ludGVybmFsL2xhYmVsIiAvPjxlbGVtZW50IHVpZD0iNjlkMDBhY2QtODljNC00NGUwLTg0YWUtZTU4ZGExN2Y0ODVjIiB2YWx1ZT0iIiB4bWxucz0iaHR0cDovL3d3dy5ib2xkb25qYW1lcy5jb20vMjAwOC8wMS9zaWUvaW50ZXJuYWwvbGFiZWwiIC8+PGVsZW1lbnQgdWlkPSJiYmE5NGM2NS1hYzNkLTRmMzQtYjJlMS04ZGUxMWVmNmYwMWMiIHZhbHVlPSIiIHhtbG5zPSJodHRwOi8vd3d3LmJvbGRvbmphbWVzLmNvbS8yMDA4LzAxL3NpZS9pbnRlcm5hbC9sYWJlbCIgLz48ZWxlbWVudCB1aWQ9ImJjMmI3YzAxLTZkYjEtNGU3ZC04OGQxLWZjNjE2NzRmODZmZCIgdmFsdWU9IiIgeG1sbnM9Imh0dHA6Ly93d3cuYm9sZG9uamFtZXMuY29tLzIwMDgvMDEvc2llL2ludGVybmFsL2xhYmVsIiAvPjxlbGVtZW50IHVpZD0iOTJlOTkzYTMtYWYzMi00YWZiLWFhMTktM2E0OWNkYjgyYzdhIiB2YWx1ZT0iIiB4bWxucz0iaHR0cDovL3d3dy5ib2xkb25qYW1lcy5jb20vMjAwOC8wMS9zaWUvaW50ZXJuYWwvbGFiZWwiIC8+PC9zaXNsPjxVc2VyTmFtZT5BRFhVXEUyMTE2MTExMzwvVXNlck5hbWU+PERhdGVUaW1lPjgvMTcvMjAyMyAyOjI2OjI5IFBNPC9EYXRlVGltZT48TGFiZWxTdHJpbmc+RXhwb3J0IENvbnRyb2wgQ291bnRyeTogVVMgIHwgQ29tcGFueSBVc2UvSW50ZXJuYWwgVXNlIE9ubHkgfCBSVFggQ29ycG9yYXRpb24gKENvcnBvcmF0ZSkgfCBPdGhlciBJbmZvcm1hdGlvbiAoTm90IFJlcXVpcmluZyBhbiBFeHBvcnQgQ29udHJvbCBNYXJraW5nKSB8IE5vIHZpc3VhbCBtYXJraW5nIGFwcGxpZWQgYnkgdGhlIHRvb2w8L0xhYmVsU3RyaW5nPjwvaXRlbT48aXRlbT48c2lzbCBzaXNsVmVyc2lvbj0iMCIgcG9saWN5PSJjZGU1M2FjMS1iZjVmLTRhYWUtOWNmMS0wNzUwOWUyM2E0YjAiIG9yaWdpbj0idXNlclNlbGVjdGVkIj48ZWxlbWVudCB1aWQ9ImFjZjllY2MzLTBmNDUtNDIzNC1hOTBkLWU0MzY4ZmFjZDk4MSIgdmFsdWU9IiIgeG1sbnM9Imh0dHA6Ly93d3cuYm9sZG9uamFtZXMuY29tLzIwMDgvMDEvc2llL2ludGVybmFsL2xhYmVsIiAvPjxlbGVtZW50IHVpZD0iNjlkMDBhY2QtODljNC00NGUwLTg0YWUtZTU4ZGExN2Y0ODVjIiB2YWx1ZT0iIiB4bWxucz0iaHR0cDovL3d3dy5ib2xkb25qYW1lcy5jb20vMjAwOC8wMS9zaWUvaW50ZXJuYWwvbGFiZWwiIC8+PGVsZW1lbnQgdWlkPSJiYmE5NGM2NS1hYzNkLTRmMzQtYjJlMS04ZGUxMWVmNmYwMWMiIHZhbHVlPSIiIHhtbG5zPSJodHRwOi8vd3d3LmJvbGRvbmphbWVzLmNvbS8yMDA4LzAxL3NpZS9pbnRlcm5hbC9sYWJlbCIgLz48ZWxlbWVudCB1aWQ9ImJjMmI3YzAxLTZkYjEtNGU3ZC04OGQxLWZjNjE2NzRmODZmZCIgdmFsdWU9IiIgeG1sbnM9Imh0dHA6Ly93d3cuYm9sZG9uamFtZXMuY29tLzIwMDgvMDEvc2llL2ludGVybmFsL2xhYmVsIiAvPjxlbGVtZW50IHVpZD0iNzFmNGYyY2EtOTMzNi00OTcwLWEwMDYtMTkyZDdhODA1MTY0IiB2YWx1ZT0iIiB4bWxucz0iaHR0cDovL3d3dy5ib2xkb25qYW1lcy5jb20vMjAwOC8wMS9zaWUvaW50ZXJuYWwvbGFiZWwiIC8+PC9zaXNsPjxVc2VyTmFtZT5BRFhVXEUyMTAwNTMyOTwvVXNlck5hbWU+PERhdGVUaW1lPjkvMTgvMjAyNCAyOjQxOjIxIFBNPC9EYXRlVGltZT48TGFiZWxTdHJpbmc+RXhwb3J0IENvbnRyb2wgQ291bnRyeTogVVMgIHwgQ29tcGFueSBVc2UvSW50ZXJuYWwgVXNlIE9ubHkgfCBSVFggQ29ycG9yYXRpb24gKENvcnBvcmF0ZSkgfCBPdGhlciBJbmZvcm1hdGlvbiAoTm90IFJlcXVpcmluZyBhbiBFeHBvcnQgQ29udHJvbCBNYXJraW5nKSB8IFBlciBSVFggUG9saWN5IChHQ1AtMTQpPC9MYWJlbFN0cmluZz48L2l0ZW0+PC9sYWJlbEhpc3Rvcnk+</Value>
+</WrappedLabelHistory>
+</file>
+
+<file path=customXml/item4.xml><?xml version="1.0" encoding="utf-8"?>
 <ct:contentTypeSchema xmlns:ct="http://schemas.microsoft.com/office/2006/metadata/contentType" xmlns:ma="http://schemas.microsoft.com/office/2006/metadata/properties/metaAttributes" ct:_="" ma:_="" ma:contentTypeName="Document" ma:contentTypeID="0x010100C87D7F34B6C448409F577B2BDC68794E" ma:contentTypeVersion="12" ma:contentTypeDescription="Create a new document." ma:contentTypeScope="" ma:versionID="acab2e71560898bd9832be5e959d1ddb">
   <xsd:schema xmlns:xsd="http://www.w3.org/2001/XMLSchema" xmlns:xs="http://www.w3.org/2001/XMLSchema" xmlns:p="http://schemas.microsoft.com/office/2006/metadata/properties" xmlns:ns2="49c55c8f-d4a7-4d90-98a8-51726318adfd" xmlns:ns3="017de5b2-5821-42d6-bcda-bb599a7893fb" targetNamespace="http://schemas.microsoft.com/office/2006/metadata/properties" ma:root="true" ma:fieldsID="fd4b4bd5a0ff2217ba2798cc0f7d43a3" ns2:_="" ns3:_="">
     <xsd:import namespace="49c55c8f-d4a7-4d90-98a8-51726318adfd"/>
@@ -17754,20 +20757,13 @@
 </ct:contentTypeSchema>
 </file>
 
-<file path=customXml/item4.xml><?xml version="1.0" encoding="utf-8"?>
-<WrappedLabelHistory xmlns:xsi="http://www.w3.org/2001/XMLSchema-instance" xmlns:xsd="http://www.w3.org/2001/XMLSchema" xmlns="http://www.boldonjames.com/2016/02/Classifier/internal/wrappedLabelHistory">
-  <Value>PD94bWwgdmVyc2lvbj0iMS4wIiBlbmNvZGluZz0idXMtYXNjaWkiPz48bGFiZWxIaXN0b3J5IHhtbG5zOnhzaT0iaHR0cDovL3d3dy53My5vcmcvMjAwMS9YTUxTY2hlbWEtaW5zdGFuY2UiIHhtbG5zOnhzZD0iaHR0cDovL3d3dy53My5vcmcvMjAwMS9YTUxTY2hlbWEiIHhtbG5zPSJodHRwOi8vd3d3LmJvbGRvbmphbWVzLmNvbS8yMDE2LzAyL0NsYXNzaWZpZXIvaW50ZXJuYWwvbGFiZWxIaXN0b3J5Ij48aXRlbT48c2lzbCBzaXNsVmVyc2lvbj0iMCIgcG9saWN5PSJjZGU1M2FjMS1iZjVmLTRhYWUtOWNmMS0wNzUwOWUyM2E0YjAiIG9yaWdpbj0iZGVmYXVsdFZhbHVlIj48ZWxlbWVudCB1aWQ9ImJiYTk0YzY1LWFjM2QtNGYzNC1iMmUxLThkZTExZWY2ZjAxYyIgdmFsdWU9IiIgeG1sbnM9Imh0dHA6Ly93d3cuYm9sZG9uamFtZXMuY29tLzIwMDgvMDEvc2llL2ludGVybmFsL2xhYmVsIiAvPjwvc2lzbD48VXNlck5hbWU+VVNcbnJwMDI0MTU4MjwvVXNlck5hbWU+PERhdGVUaW1lPjIvMTIvMjAyMCAyOjQ5OjE3IFBNPC9EYXRlVGltZT48TGFiZWxTdHJpbmc+T3JpZ2luIEp1cmlzZGljdGlvbjogVVMgPC9MYWJlbFN0cmluZz48L2l0ZW0+PGl0ZW0+PHNpc2wgc2lzbFZlcnNpb249IjAiIHBvbGljeT0iY2RlNTNhYzEtYmY1Zi00YWFlLTljZjEtMDc1MDllMjNhNGIwIiBvcmlnaW49InVzZXJTZWxlY3RlZCI+PGVsZW1lbnQgdWlkPSJiYmE5NGM2NS1hYzNkLTRmMzQtYjJlMS04ZGUxMWVmNmYwMWMiIHZhbHVlPSIiIHhtbG5zPSJodHRwOi8vd3d3LmJvbGRvbmphbWVzLmNvbS8yMDA4LzAxL3NpZS9pbnRlcm5hbC9sYWJlbCIgLz48ZWxlbWVudCB1aWQ9IjU5OGNmYzI4LTVkZmQtNGYwNi04YzAxLWM3NTg4ZmQzOTRmMCIgdmFsdWU9IiIgeG1sbnM9Imh0dHA6Ly93d3cuYm9sZG9uamFtZXMuY29tLzIwMDgvMDEvc2llL2ludGVybmFsL2xhYmVsIiAvPjxlbGVtZW50IHVpZD0iYWFmYzlhOTUtZWU1ZC00ODdjLTljNGUtNjdhNTM4MGYyOTkxIiB2YWx1ZT0iIiB4bWxucz0iaHR0cDovL3d3dy5ib2xkb25qYW1lcy5jb20vMjAwOC8wMS9zaWUvaW50ZXJuYWwvbGFiZWwiIC8+PGVsZW1lbnQgdWlkPSJkNzU5Y2Q3YS1iNTdjLTQyZTQtOWE0OS05YjgyYTIzMzc1NzkiIHZhbHVlPSIiIHhtbG5zPSJodHRwOi8vd3d3LmJvbGRvbmphbWVzLmNvbS8yMDA4LzAxL3NpZS9pbnRlcm5hbC9sYWJlbCIgLz48ZWxlbWVudCB1aWQ9ImMyMDZkNWZhLWFlZTEtNGY2NC04OWQ5LWY4MWU0ZDdiM2FjYyIgdmFsdWU9IiIgeG1sbnM9Imh0dHA6Ly93d3cuYm9sZG9uamFtZXMuY29tLzIwMDgvMDEvc2llL2ludGVybmFsL2xhYmVsIiAvPjwvc2lzbD48VXNlck5hbWU+VVNcbnJwMDI0MTU4MjwvVXNlck5hbWU+PERhdGVUaW1lPjIvMTIvMjAyMCAzOjAzOjA5IFBNPC9EYXRlVGltZT48TGFiZWxTdHJpbmc+T3JpZ2luIEp1cmlzZGljdGlvbjogVVMgIHwgUmF5dGhlb24gQ29tcGV0aXRpb24gU2Vuc2l0aXZlIHwgUGVyIEN1cnJlbnQgUmF5dGhlb24gUG9saWN5IChSUC1PR0MtMDM1KSB8IE5vbi1FeHBvcnQgQ29udHJvbGxlZCBUZWNobmljYWwgSW5mb3JtYXRpb24gKEVYSU0gRGV0ZXJtaW5lZCBPbmx5KSB8IFBlciBDdXJyZW50IFJheXRoZW9uIFBvbGljeSAoUEktT0dDLUdUQy01MDA0KTwvTGFiZWxTdHJpbmc+PC9pdGVtPjxpdGVtPjxzaXNsIHNpc2xWZXJzaW9uPSIwIiBwb2xpY3k9ImNkZTUzYWMxLWJmNWYtNGFhZS05Y2YxLTA3NTA5ZTIzYTRiMCIgb3JpZ2luPSJ1c2VyU2VsZWN0ZWQiPjxlbGVtZW50IHVpZD0iYmJhOTRjNjUtYWMzZC00ZjM0LWIyZTEtOGRlMTFlZjZmMDFjIiB2YWx1ZT0iIiB4bWxucz0iaHR0cDovL3d3dy5ib2xkb25qYW1lcy5jb20vMjAwOC8wMS9zaWUvaW50ZXJuYWwvbGFiZWwiIC8+PGVsZW1lbnQgdWlkPSI5OTdhNzE2ZS1jMDNmLTQzYjEtYTViMC1kNmNkMDRlOWJhNDAiIHZhbHVlPSIiIHhtbG5zPSJodHRwOi8vd3d3LmJvbGRvbmphbWVzLmNvbS8yMDA4LzAxL3NpZS9pbnRlcm5hbC9sYWJlbCIgLz48ZWxlbWVudCB1aWQ9ImFhZmM5YTk1LWVlNWQtNDg3Yy05YzRlLTY3YTUzODBmMjk5MSIgdmFsdWU9IiIgeG1sbnM9Imh0dHA6Ly93d3cuYm9sZG9uamFtZXMuY29tLzIwMDgvMDEvc2llL2ludGVybmFsL2xhYmVsIiAvPjxlbGVtZW50IHVpZD0iY2FlMTFhNmItMjFiMS00OWQ4LTk5ZDgtZWQzMDY4NTEzODRhIiB2YWx1ZT0iIiB4bWxucz0iaHR0cDovL3d3dy5ib2xkb25qYW1lcy5jb20vMjAwOC8wMS9zaWUvaW50ZXJuYWwvbGFiZWwiIC8+PGVsZW1lbnQgdWlkPSJjMjA2ZDVmYS1hZWUxLTRmNjQtODlkOS1mODFlNGQ3YjNhY2MiIHZhbHVlPSIiIHhtbG5zPSJodHRwOi8vd3d3LmJvbGRvbmphbWVzLmNvbS8yMDA4LzAxL3NpZS9pbnRlcm5hbC9sYWJlbCIgLz48L3Npc2w+PFVzZXJOYW1lPlVTXG5ycDAyNDE1ODI8L1VzZXJOYW1lPjxEYXRlVGltZT4yLzEyLzIwMjAgMzoyODo1NyBQTTwvRGF0ZVRpbWU+PExhYmVsU3RyaW5nPk9yaWdpbiBKdXJpc2RpY3Rpb246IFVTICB8IFJheXRoZW9uIFByb3ByaWV0YXJ5IHwgUGVyIEN1cnJlbnQgUmF5dGhlb24gUG9saWN5IChSUC1PR0MtMDM1KSB8IFVTLUlUQVIgQ29udHJvbGxlZCB8IFBlciBDdXJyZW50IFJheXRoZW9uIFBvbGljeSAoUEktT0dDLUdUQy01MDA0KTwvTGFiZWxTdHJpbmc+PC9pdGVtPjxpdGVtPjxzaXNsIHNpc2xWZXJzaW9uPSIwIiBwb2xpY3k9ImNkZTUzYWMxLWJmNWYtNGFhZS05Y2YxLTA3NTA5ZTIzYTRiMCIgb3JpZ2luPSJ1c2VyU2VsZWN0ZWQiPjxlbGVtZW50IHVpZD0iYmJhOTRjNjUtYWMzZC00ZjM0LWIyZTEtOGRlMTFlZjZmMDFjIiB2YWx1ZT0iIiB4bWxucz0iaHR0cDovL3d3dy5ib2xkb25qYW1lcy5jb20vMjAwOC8wMS9zaWUvaW50ZXJuYWwvbGFiZWwiIC8+PGVsZW1lbnQgdWlkPSIwMTJlYjIyYy03NmNhLTRlNGYtOGFiOS1mYWJiMDU0YWUxNDAiIHZhbHVlPSIiIHhtbG5zPSJodHRwOi8vd3d3LmJvbGRvbmphbWVzLmNvbS8yMDA4LzAxL3NpZS9pbnRlcm5hbC9sYWJlbCIgLz48ZWxlbWVudCB1aWQ9ImFhZmM5YTk1LWVlNWQtNDg3Yy05YzRlLTY3YTUzODBmMjk5MSIgdmFsdWU9IiIgeG1sbnM9Imh0dHA6Ly93d3cuYm9sZG9uamFtZXMuY29tLzIwMDgvMDEvc2llL2ludGVybmFsL2xhYmVsIiAvPjxlbGVtZW50IHVpZD0iYmMyYjdjMDEtNmRiMS00ZTdkLTg4ZDEtZmM2MTY3NGY4NmZkIiB2YWx1ZT0iIiB4bWxucz0iaHR0cDovL3d3dy5ib2xkb25qYW1lcy5jb20vMjAwOC8wMS9zaWUvaW50ZXJuYWwvbGFiZWwiIC8+PGVsZW1lbnQgdWlkPSI5MmU5OTNhMy1hZjMyLTRhZmItYWExOS0zYTQ5Y2RiODJjN2EiIHZhbHVlPSIiIHhtbG5zPSJodHRwOi8vd3d3LmJvbGRvbmphbWVzLmNvbS8yMDA4LzAxL3NpZS9pbnRlcm5hbC9sYWJlbCIgLz48L3Npc2w+PFVzZXJOYW1lPlVTXG5ycDAyNDE1ODI8L1VzZXJOYW1lPjxEYXRlVGltZT4yLzE0LzIwMjAgNDo0Mjo0NCBQTTwvRGF0ZVRpbWU+PExhYmVsU3RyaW5nPk9yaWdpbiBKdXJpc2RpY3Rpb246IFVTICB8IFJheXRoZW9uIE1vc3QgUHJpdmF0ZSB8IFBlciBDdXJyZW50IFJheXRoZW9uIFBvbGljeSAoUlAtT0dDLTAzNSkgfCBPdGhlciBJbmZvcm1hdGlvbiAoTm90IFJlcXVpcmluZyBhbiBFeHBvcnQgQ29udHJvbCBNYXJraW5nKSB8IE5vIG1hcmtpbmcgYXBwbGllZCBieSB0aGUgdG9vbDwvTGFiZWxTdHJpbmc+PC9pdGVtPjxpdGVtPjxzaXNsIHNpc2xWZXJzaW9uPSIwIiBwb2xpY3k9ImNkZTUzYWMxLWJmNWYtNGFhZS05Y2YxLTA3NTA5ZTIzYTRiMCIgb3JpZ2luPSJ1c2VyU2VsZWN0ZWQiPjxlbGVtZW50IHVpZD0iYmJhOTRjNjUtYWMzZC00ZjM0LWIyZTEtOGRlMTFlZjZmMDFjIiB2YWx1ZT0iIiB4bWxucz0iaHR0cDovL3d3dy5ib2xkb25qYW1lcy5jb20vMjAwOC8wMS9zaWUvaW50ZXJuYWwvbGFiZWwiIC8+PGVsZW1lbnQgdWlkPSI5OTdhNzE2ZS1jMDNmLTQzYjEtYTViMC1kNmNkMDRlOWJhNDAiIHZhbHVlPSIiIHhtbG5zPSJodHRwOi8vd3d3LmJvbGRvbmphbWVzLmNvbS8yMDA4LzAxL3NpZS9pbnRlcm5hbC9sYWJlbCIgLz48ZWxlbWVudCB1aWQ9ImFhZmM5YTk1LWVlNWQtNDg3Yy05YzRlLTY3YTUzODBmMjk5MSIgdmFsdWU9IiIgeG1sbnM9Imh0dHA6Ly93d3cuYm9sZG9uamFtZXMuY29tLzIwMDgvMDEvc2llL2ludGVybmFsL2xhYmVsIiAvPjxlbGVtZW50IHVpZD0iZmI5OTEzMDgtYTNkZS00MGE4LTk2N2ItMDkyMjMzNDI0MWJhIiB2YWx1ZT0iIiB4bWxucz0iaHR0cDovL3d3dy5ib2xkb25qYW1lcy5jb20vMjAwOC8wMS9zaWUvaW50ZXJuYWwvbGFiZWwiIC8+PGVsZW1lbnQgdWlkPSJjMjA2ZDVmYS1hZWUxLTRmNjQtODlkOS1mODFlNGQ3YjNhY2MiIHZhbHVlPSIiIHhtbG5zPSJodHRwOi8vd3d3LmJvbGRvbmphbWVzLmNvbS8yMDA4LzAxL3NpZS9pbnRlcm5hbC9sYWJlbCIgLz48L3Npc2w+PFVzZXJOYW1lPlVTXG5ycDAyNDE1ODI8L1VzZXJOYW1lPjxEYXRlVGltZT4yLzE0LzIwMjAgNjoyOTozNCBQTTwvRGF0ZVRpbWU+PExhYmVsU3RyaW5nPk9yaWdpbiBKdXJpc2RpY3Rpb246IFVTICB8IFJheXRoZW9uIFByb3ByaWV0YXJ5IHwgUGVyIEN1cnJlbnQgUmF5dGhlb24gUG9saWN5IChSUC1PR0MtMDM1KSB8IFVTLUV4cG9ydCBDb250cm9sbGVkIEp1cmlzZGljdGlvbiBVbmRldGVybWluZWQgfCBQZXIgQ3VycmVudCBSYXl0aGVvbiBQb2xpY3kgKFBJLU9HQy1HVEMtNTAwNCk8L0xhYmVsU3RyaW5nPjwvaXRlbT48aXRlbT48c2lzbCBzaXNsVmVyc2lvbj0iMCIgcG9saWN5PSJjZGU1M2FjMS1iZjVmLTRhYWUtOWNmMS0wNzUwOWUyM2E0YjAiIG9yaWdpbj0idXNlclNlbGVjdGVkIj48ZWxlbWVudCB1aWQ9ImJiYTk0YzY1LWFjM2QtNGYzNC1iMmUxLThkZTExZWY2ZjAxYyIgdmFsdWU9IiIgeG1sbnM9Imh0dHA6Ly93d3cuYm9sZG9uamFtZXMuY29tLzIwMDgvMDEvc2llL2ludGVybmFsL2xhYmVsIiAvPjxlbGVtZW50IHVpZD0iYWNmOWVjYzMtMGY0NS00MjM0LWE5MGQtZTQzNjhmYWNkOTgxIiB2YWx1ZT0iIiB4bWxucz0iaHR0cDovL3d3dy5ib2xkb25qYW1lcy5jb20vMjAwOC8wMS9zaWUvaW50ZXJuYWwvbGFiZWwiIC8+PGVsZW1lbnQgdWlkPSJhYWZjOWE5NS1lZTVkLTQ4N2MtOWM0ZS02N2E1MzgwZjI5OTEiIHZhbHVlPSIiIHhtbG5zPSJodHRwOi8vd3d3LmJvbGRvbmphbWVzLmNvbS8yMDA4LzAxL3NpZS9pbnRlcm5hbC9sYWJlbCIgLz48ZWxlbWVudCB1aWQ9ImZiOTkxMzA4LWEzZGUtNDBhOC05NjdiLTA5MjIzMzQyNDFiYSIgdmFsdWU9IiIgeG1sbnM9Imh0dHA6Ly93d3cuYm9sZG9uamFtZXMuY29tLzIwMDgvMDEvc2llL2ludGVybmFsL2xhYmVsIiAvPjxlbGVtZW50IHVpZD0iYzIwNmQ1ZmEtYWVlMS00ZjY0LTg5ZDktZjgxZTRkN2IzYWNjIiB2YWx1ZT0iIiB4bWxucz0iaHR0cDovL3d3dy5ib2xkb25qYW1lcy5jb20vMjAwOC8wMS9zaWUvaW50ZXJuYWwvbGFiZWwiIC8+PC9zaXNsPjxVc2VyTmFtZT5VU1xucnAwMjQxNTgyPC9Vc2VyTmFtZT48RGF0ZVRpbWU+Mi8xNy8yMDIwIDg6Mjg6MzEgUE08L0RhdGVUaW1lPjxMYWJlbFN0cmluZz5PcmlnaW4gSnVyaXNkaWN0aW9uOiBVUyAgfCBJbnRlcm5hbCBVc2UgT25seSB8IFBlciBDdXJyZW50IFJheXRoZW9uIFBvbGljeSAoUlAtT0dDLTAzNSkgfCBVUy1FeHBvcnQgQ29udHJvbGxlZCBKdXJpc2RpY3Rpb24gVW5kZXRlcm1pbmVkIHwgUGVyIEN1cnJlbnQgUmF5dGhlb24gUG9saWN5IChQSS1PR0MtR1RDLTUwMDQpPC9MYWJlbFN0cmluZz48L2l0ZW0+PGl0ZW0+PHNpc2wgc2lzbFZlcnNpb249IjAiIHBvbGljeT0iY2RlNTNhYzEtYmY1Zi00YWFlLTljZjEtMDc1MDllMjNhNGIwIiBvcmlnaW49InVzZXJTZWxlY3RlZCI+PGVsZW1lbnQgdWlkPSJiYmE5NGM2NS1hYzNkLTRmMzQtYjJlMS04ZGUxMWVmNmYwMWMiIHZhbHVlPSIiIHhtbG5zPSJodHRwOi8vd3d3LmJvbGRvbmphbWVzLmNvbS8yMDA4LzAxL3NpZS9pbnRlcm5hbC9sYWJlbCIgLz48ZWxlbWVudCB1aWQ9Ijk5N2E3MTZlLWMwM2YtNDNiMS1hNWIwLWQ2Y2QwNGU5YmE0MCIgdmFsdWU9IiIgeG1sbnM9Imh0dHA6Ly93d3cuYm9sZG9uamFtZXMuY29tLzIwMDgvMDEvc2llL2ludGVybmFsL2xhYmVsIiAvPjxlbGVtZW50IHVpZD0iYWFmYzlhOTUtZWU1ZC00ODdjLTljNGUtNjdhNTM4MGYyOTkxIiB2YWx1ZT0iIiB4bWxucz0iaHR0cDovL3d3dy5ib2xkb25qYW1lcy5jb20vMjAwOC8wMS9zaWUvaW50ZXJuYWwvbGFiZWwiIC8+PGVsZW1lbnQgdWlkPSJiYzJiN2MwMS02ZGIxLTRlN2QtODhkMS1mYzYxNjc0Zjg2ZmQiIHZhbHVlPSIiIHhtbG5zPSJodHRwOi8vd3d3LmJvbGRvbmphbWVzLmNvbS8yMDA4LzAxL3NpZS9pbnRlcm5hbC9sYWJlbCIgLz48ZWxlbWVudCB1aWQ9IjkyZTk5M2EzLWFmMzItNGFmYi1hYTE5LTNhNDljZGI4MmM3YSIgdmFsdWU9IiIgeG1sbnM9Imh0dHA6Ly93d3cuYm9sZG9uamFtZXMuY29tLzIwMDgvMDEvc2llL2ludGVybmFsL2xhYmVsIiAvPjwvc2lzbD48VXNlck5hbWU+VVNcbnJwMDI0MTU4MjwvVXNlck5hbWU+PERhdGVUaW1lPjIvMTgvMjAyMCA0OjU4OjI4IFBNPC9EYXRlVGltZT48TGFiZWxTdHJpbmc+T3JpZ2luIEp1cmlzZGljdGlvbjogVVMgIHwgUmF5dGhlb24gUHJvcHJpZXRhcnkgfCBQZXIgQ3VycmVudCBSYXl0aGVvbiBQb2xpY3kgKFJQLU9HQy0wMzUpIHwgT3RoZXIgSW5mb3JtYXRpb24gKE5vdCBSZXF1aXJpbmcgYW4gRXhwb3J0IENvbnRyb2wgTWFya2luZykgfCBObyBtYXJraW5nIGFwcGxpZWQgYnkgdGhlIHRvb2w8L0xhYmVsU3RyaW5nPjwvaXRlbT48aXRlbT48c2lzbCBzaXNsVmVyc2lvbj0iMCIgcG9saWN5PSJjZGU1M2FjMS1iZjVmLTRhYWUtOWNmMS0wNzUwOWUyM2E0YjAiIG9yaWdpbj0idXNlclNlbGVjdGVkIj48ZWxlbWVudCB1aWQ9ImJiYTk0YzY1LWFjM2QtNGYzNC1iMmUxLThkZTExZWY2ZjAxYyIgdmFsdWU9IiIgeG1sbnM9Imh0dHA6Ly93d3cuYm9sZG9uamFtZXMuY29tLzIwMDgvMDEvc2llL2ludGVybmFsL2xhYmVsIiAvPjxlbGVtZW50IHVpZD0iMDEyZWIyMmMtNzZjYS00ZTRmLThhYjktZmFiYjA1NGFlMTQwIiB2YWx1ZT0iIiB4bWxucz0iaHR0cDovL3d3dy5ib2xkb25qYW1lcy5jb20vMjAwOC8wMS9zaWUvaW50ZXJuYWwvbGFiZWwiIC8+PGVsZW1lbnQgdWlkPSJhYWZjOWE5NS1lZTVkLTQ4N2MtOWM0ZS02N2E1MzgwZjI5OTEiIHZhbHVlPSIiIHhtbG5zPSJodHRwOi8vd3d3LmJvbGRvbmphbWVzLmNvbS8yMDA4LzAxL3NpZS9pbnRlcm5hbC9sYWJlbCIgLz48ZWxlbWVudCB1aWQ9ImZiOTkxMzA4LWEzZGUtNDBhOC05NjdiLTA5MjIzMzQyNDFiYSIgdmFsdWU9IiIgeG1sbnM9Imh0dHA6Ly93d3cuYm9sZG9uamFtZXMuY29tLzIwMDgvMDEvc2llL2ludGVybmFsL2xhYmVsIiAvPjxlbGVtZW50IHVpZD0iYzIwNmQ1ZmEtYWVlMS00ZjY0LTg5ZDktZjgxZTRkN2IzYWNjIiB2YWx1ZT0iIiB4bWxucz0iaHR0cDovL3d3dy5ib2xkb25qYW1lcy5jb20vMjAwOC8wMS9zaWUvaW50ZXJuYWwvbGFiZWwiIC8+PC9zaXNsPjxVc2VyTmFtZT5VU1xucnAwMjQxNTgyPC9Vc2VyTmFtZT48RGF0ZVRpbWU+Mi8xOC8yMDIwIDU6MDA6MTYgUE08L0RhdGVUaW1lPjxMYWJlbFN0cmluZz5PcmlnaW4gSnVyaXNkaWN0aW9uOiBVUyAgfCBSYXl0aGVvbiBNb3N0IFByaXZhdGUgfCBQZXIgQ3VycmVudCBSYXl0aGVvbiBQb2xpY3kgKFJQLU9HQy0wMzUpIHwgVVMtRXhwb3J0IENvbnRyb2xsZWQgSnVyaXNkaWN0aW9uIFVuZGV0ZXJtaW5lZCB8IFBlciBDdXJyZW50IFJheXRoZW9uIFBvbGljeSAoUEktT0dDLUdUQy01MDA0KTwvTGFiZWxTdHJpbmc+PC9pdGVtPjxpdGVtPjxzaXNsIHNpc2xWZXJzaW9uPSIwIiBwb2xpY3k9ImNkZTUzYWMxLWJmNWYtNGFhZS05Y2YxLTA3NTA5ZTIzYTRiMCIgb3JpZ2luPSJ1c2VyU2VsZWN0ZWQiPjxlbGVtZW50IHVpZD0iYmJhOTRjNjUtYWMzZC00ZjM0LWIyZTEtOGRlMTFlZjZmMDFjIiB2YWx1ZT0iIiB4bWxucz0iaHR0cDovL3d3dy5ib2xkb25qYW1lcy5jb20vMjAwOC8wMS9zaWUvaW50ZXJuYWwvbGFiZWwiIC8+PGVsZW1lbnQgdWlkPSJhY2Y5ZWNjMy0wZjQ1LTQyMzQtYTkwZC1lNDM2OGZhY2Q5ODEiIHZhbHVlPSIiIHhtbG5zPSJodHRwOi8vd3d3LmJvbGRvbmphbWVzLmNvbS8yMDA4LzAxL3NpZS9pbnRlcm5hbC9sYWJlbCIgLz48ZWxlbWVudCB1aWQ9ImFhZmM5YTk1LWVlNWQtNDg3Yy05YzRlLTY3YTUzODBmMjk5MSIgdmFsdWU9IiIgeG1sbnM9Imh0dHA6Ly93d3cuYm9sZG9uamFtZXMuY29tLzIwMDgvMDEvc2llL2ludGVybmFsL2xhYmVsIiAvPjxlbGVtZW50IHVpZD0iYmMyYjdjMDEtNmRiMS00ZTdkLTg4ZDEtZmM2MTY3NGY4NmZkIiB2YWx1ZT0iIiB4bWxucz0iaHR0cDovL3d3dy5ib2xkb25qYW1lcy5jb20vMjAwOC8wMS9zaWUvaW50ZXJuYWwvbGFiZWwiIC8+PGVsZW1lbnQgdWlkPSI5MmU5OTNhMy1hZjMyLTRhZmItYWExOS0zYTQ5Y2RiODJjN2EiIHZhbHVlPSIiIHhtbG5zPSJodHRwOi8vd3d3LmJvbGRvbmphbWVzLmNvbS8yMDA4LzAxL3NpZS9pbnRlcm5hbC9sYWJlbCIgLz48L3Npc2w+PFVzZXJOYW1lPlVTXG5ycDAyNDE1ODI8L1VzZXJOYW1lPjxEYXRlVGltZT4zLzcvMjAyMCA4OjIzOjM2IFBNPC9EYXRlVGltZT48TGFiZWxTdHJpbmc+T3JpZ2luIEp1cmlzZGljdGlvbjogVVMgIHwgSW50ZXJuYWwgVXNlIE9ubHkgfCBQZXIgQ3VycmVudCBSYXl0aGVvbiBQb2xpY3kgKFJQLU9HQy0wMzUpIHwgT3RoZXIgSW5mb3JtYXRpb24gKE5vdCBSZXF1aXJpbmcgYW4gRXhwb3J0IENvbnRyb2wgTWFya2luZykgfCBObyBtYXJraW5nIGFwcGxpZWQgYnkgdGhlIHRvb2w8L0xhYmVsU3RyaW5nPjwvaXRlbT48aXRlbT48c2lzbCBzaXNsVmVyc2lvbj0iMCIgcG9saWN5PSJjZGU1M2FjMS1iZjVmLTRhYWUtOWNmMS0wNzUwOWUyM2E0YjAiIG9yaWdpbj0idXNlclNlbGVjdGVkIj48ZWxlbWVudCB1aWQ9ImJiYTk0YzY1LWFjM2QtNGYzNC1iMmUxLThkZTExZWY2ZjAxYyIgdmFsdWU9IiIgeG1sbnM9Imh0dHA6Ly93d3cuYm9sZG9uamFtZXMuY29tLzIwMDgvMDEvc2llL2ludGVybmFsL2xhYmVsIiAvPjxlbGVtZW50IHVpZD0iOTk3YTcxNmUtYzAzZi00M2IxLWE1YjAtZDZjZDA0ZTliYTQwIiB2YWx1ZT0iIiB4bWxucz0iaHR0cDovL3d3dy5ib2xkb25qYW1lcy5jb20vMjAwOC8wMS9zaWUvaW50ZXJuYWwvbGFiZWwiIC8+PGVsZW1lbnQgdWlkPSJhYWZjOWE5NS1lZTVkLTQ4N2MtOWM0ZS02N2E1MzgwZjI5OTEiIHZhbHVlPSIiIHhtbG5zPSJodHRwOi8vd3d3LmJvbGRvbmphbWVzLmNvbS8yMDA4LzAxL3NpZS9pbnRlcm5hbC9sYWJlbCIgLz48ZWxlbWVudCB1aWQ9ImZiOTkxMzA4LWEzZGUtNDBhOC05NjdiLTA5MjIzMzQyNDFiYSIgdmFsdWU9IiIgeG1sbnM9Imh0dHA6Ly93d3cuYm9sZG9uamFtZXMuY29tLzIwMDgvMDEvc2llL2ludGVybmFsL2xhYmVsIiAvPjxlbGVtZW50IHVpZD0iYzIwNmQ1ZmEtYWVlMS00ZjY0LTg5ZDktZjgxZTRkN2IzYWNjIiB2YWx1ZT0iIiB4bWxucz0iaHR0cDovL3d3dy5ib2xkb25qYW1lcy5jb20vMjAwOC8wMS9zaWUvaW50ZXJuYWwvbGFiZWwiIC8+PC9zaXNsPjxVc2VyTmFtZT5VU1xucnAwMjQxNTgyPC9Vc2VyTmFtZT48RGF0ZVRpbWU+My83LzIwMjAgODoyNDo0OSBQTTwvRGF0ZVRpbWU+PExhYmVsU3RyaW5nPk9yaWdpbiBKdXJpc2RpY3Rpb246IFVTICB8IFJheXRoZW9uIFByb3ByaWV0YXJ5IHwgUGVyIEN1cnJlbnQgUmF5dGhlb24gUG9saWN5IChSUC1PR0MtMDM1KSB8IFVTLUV4cG9ydCBDb250cm9sbGVkIEp1cmlzZGljdGlvbiBVbmRldGVybWluZWQgfCBQZXIgQ3VycmVudCBSYXl0aGVvbiBQb2xpY3kgKFBJLU9HQy1HVEMtNTAwNCk8L0xhYmVsU3RyaW5nPjwvaXRlbT48aXRlbT48c2lzbCBzaXNsVmVyc2lvbj0iMCIgcG9saWN5PSJjZGU1M2FjMS1iZjVmLTRhYWUtOWNmMS0wNzUwOWUyM2E0YjAiIG9yaWdpbj0idXNlclNlbGVjdGVkIj48ZWxlbWVudCB1aWQ9ImJiYTk0YzY1LWFjM2QtNGYzNC1iMmUxLThkZTExZWY2ZjAxYyIgdmFsdWU9IiIgeG1sbnM9Imh0dHA6Ly93d3cuYm9sZG9uamFtZXMuY29tLzIwMDgvMDEvc2llL2ludGVybmFsL2xhYmVsIiAvPjxlbGVtZW50IHVpZD0iZmI5OTEzMDgtYTNkZS00MGE4LTk2N2ItMDkyMjMzNDI0MWJhIiB2YWx1ZT0iIiB4bWxucz0iaHR0cDovL3d3dy5ib2xkb25qYW1lcy5jb20vMjAwOC8wMS9zaWUvaW50ZXJuYWwvbGFiZWwiIC8+PGVsZW1lbnQgdWlkPSJjMjA2ZDVmYS1hZWUxLTRmNjQtODlkOS1mODFlNGQ3YjNhY2MiIHZhbHVlPSIiIHhtbG5zPSJodHRwOi8vd3d3LmJvbGRvbmphbWVzLmNvbS8yMDA4LzAxL3NpZS9pbnRlcm5hbC9sYWJlbCIgLz48ZWxlbWVudCB1aWQ9ImFjZjllY2MzLTBmNDUtNDIzNC1hOTBkLWU0MzY4ZmFjZDk4MSIgdmFsdWU9IiIgeG1sbnM9Imh0dHA6Ly93d3cuYm9sZG9uamFtZXMuY29tLzIwMDgvMDEvc2llL2ludGVybmFsL2xhYmVsIiAvPjxlbGVtZW50IHVpZD0iYWFmYzlhOTUtZWU1ZC00ODdjLTljNGUtNjdhNTM4MGYyOTkxIiB2YWx1ZT0iIiB4bWxucz0iaHR0cDovL3d3dy5ib2xkb25qYW1lcy5jb20vMjAwOC8wMS9zaWUvaW50ZXJuYWwvbGFiZWwiIC8+PC9zaXNsPjxVc2VyTmFtZT5VU1wxMTAzMDg1PC9Vc2VyTmFtZT48RGF0ZVRpbWU+My8xMi8yMDIwIDY6MjM6MjMgUE08L0RhdGVUaW1lPjxMYWJlbFN0cmluZz5PcmlnaW4gSnVyaXNkaWN0aW9uOiBVUyAgfCBJbnRlcm5hbCBVc2UgT25seSB8IFBlciBDdXJyZW50IFJheXRoZW9uIFBvbGljeSAoUlAtT0dDLTAzNSkgfCBVUy1FeHBvcnQgQ29udHJvbGxlZCBKdXJpc2RpY3Rpb24gVW5kZXRlcm1pbmVkIHwgUGVyIEN1cnJlbnQgUmF5dGhlb24gUG9saWN5IChQSS1PR0MtR1RDLTUwMDQpPC9MYWJlbFN0cmluZz48L2l0ZW0+PGl0ZW0+PHNpc2wgc2lzbFZlcnNpb249IjAiIHBvbGljeT0iY2RlNTNhYzEtYmY1Zi00YWFlLTljZjEtMDc1MDllMjNhNGIwIiBvcmlnaW49InVzZXJTZWxlY3RlZCIgLz48VXNlck5hbWU+VVNcMTEwMzA4NTwvVXNlck5hbWU+PERhdGVUaW1lPjMvMTMvMjAyMCAxMDowMjo0NCBQTTwvRGF0ZVRpbWU+PExhYmVsU3RyaW5nPlRoaXMgYXJ0aWZhY3QgaGFzIG5vIGNsYXNzaWZpY2F0aW9uLjwvTGFiZWxTdHJpbmc+PC9pdGVtPjxpdGVtPjxzaXNsIHNpc2xWZXJzaW9uPSIwIiBwb2xpY3k9ImNkZTUzYWMxLWJmNWYtNGFhZS05Y2YxLTA3NTA5ZTIzYTRiMCIgb3JpZ2luPSJ1c2VyU2VsZWN0ZWQiPjxlbGVtZW50IHVpZD0iMTVmZWZhMWMtYWY2Ny00ZWJmLWE3MWQtZjAxNjIxMTY4OTYyIiB2YWx1ZT0iIiB4bWxucz0iaHR0cDovL3d3dy5ib2xkb25qYW1lcy5jb20vMjAwOC8wMS9zaWUvaW50ZXJuYWwvbGFiZWwiIC8+PGVsZW1lbnQgdWlkPSJhYWZjOWE5NS1lZTVkLTQ4N2MtOWM0ZS02N2E1MzgwZjI5OTEiIHZhbHVlPSIiIHhtbG5zPSJodHRwOi8vd3d3LmJvbGRvbmphbWVzLmNvbS8yMDA4LzAxL3NpZS9pbnRlcm5hbC9sYWJlbCIgLz48ZWxlbWVudCB1aWQ9ImJiYTk0YzY1LWFjM2QtNGYzNC1iMmUxLThkZTExZWY2ZjAxYyIgdmFsdWU9IiIgeG1sbnM9Imh0dHA6Ly93d3cuYm9sZG9uamFtZXMuY29tLzIwMDgvMDEvc2llL2ludGVybmFsL2xhYmVsIiAvPjxlbGVtZW50IHVpZD0iYmMyYjdjMDEtNmRiMS00ZTdkLTg4ZDEtZmM2MTY3NGY4NmZkIiB2YWx1ZT0iIiB4bWxucz0iaHR0cDovL3d3dy5ib2xkb25qYW1lcy5jb20vMjAwOC8wMS9zaWUvaW50ZXJuYWwvbGFiZWwiIC8+PGVsZW1lbnQgdWlkPSI5MmU5OTNhMy1hZjMyLTRhZmItYWExOS0zYTQ5Y2RiODJjN2EiIHZhbHVlPSIiIHhtbG5zPSJodHRwOi8vd3d3LmJvbGRvbmphbWVzLmNvbS8yMDA4LzAxL3NpZS9pbnRlcm5hbC9sYWJlbCIgLz48L3Npc2w+PFVzZXJOYW1lPlVTXDExMDMwODU8L1VzZXJOYW1lPjxEYXRlVGltZT4zLzEzLzIwMjAgMTA6MDU6NDQgUE08L0RhdGVUaW1lPjxMYWJlbFN0cmluZz5PcmlnaW4gSnVyaXNkaWN0aW9uOiBVUyAgfCBUaGlyZCBQYXJ0eSBQcm9wcmlldGFyeSAtIE5lZWQgdG8gS25vdyB8IFBlciBDdXJyZW50IFJheXRoZW9uIFBvbGljeSAoUlAtT0dDLTAzNSkgfCBPdGhlciBJbmZvcm1hdGlvbiAoTm90IFJlcXVpcmluZyBhbiBFeHBvcnQgQ29udHJvbCBNYXJraW5nKSB8IE5vIG1hcmtpbmcgYXBwbGllZCBieSB0aGUgdG9vbDwvTGFiZWxTdHJpbmc+PC9pdGVtPjxpdGVtPjxzaXNsIHNpc2xWZXJzaW9uPSIwIiBwb2xpY3k9ImNkZTUzYWMxLWJmNWYtNGFhZS05Y2YxLTA3NTA5ZTIzYTRiMCIgb3JpZ2luPSJ1c2VyU2VsZWN0ZWQiPjxlbGVtZW50IHVpZD0iYmJhOTRjNjUtYWMzZC00ZjM0LWIyZTEtOGRlMTFlZjZmMDFjIiB2YWx1ZT0iIiB4bWxucz0iaHR0cDovL3d3dy5ib2xkb25qYW1lcy5jb20vMjAwOC8wMS9zaWUvaW50ZXJuYWwvbGFiZWwiIC8+PGVsZW1lbnQgdWlkPSJiYzJiN2MwMS02ZGIxLTRlN2QtODhkMS1mYzYxNjc0Zjg2ZmQiIHZhbHVlPSIiIHhtbG5zPSJodHRwOi8vd3d3LmJvbGRvbmphbWVzLmNvbS8yMDA4LzAxL3NpZS9pbnRlcm5hbC9sYWJlbCIgLz48ZWxlbWVudCB1aWQ9IjkyZTk5M2EzLWFmMzItNGFmYi1hYTE5LTNhNDljZGI4MmM3YSIgdmFsdWU9IiIgeG1sbnM9Imh0dHA6Ly93d3cuYm9sZG9uamFtZXMuY29tLzIwMDgvMDEvc2llL2ludGVybmFsL2xhYmVsIiAvPjxlbGVtZW50IHVpZD0iYWNmOWVjYzMtMGY0NS00MjM0LWE5MGQtZTQzNjhmYWNkOTgxIiB2YWx1ZT0iIiB4bWxucz0iaHR0cDovL3d3dy5ib2xkb25qYW1lcy5jb20vMjAwOC8wMS9zaWUvaW50ZXJuYWwvbGFiZWwiIC8+PGVsZW1lbnQgdWlkPSJhYWZjOWE5NS1lZTVkLTQ4N2MtOWM0ZS02N2E1MzgwZjI5OTEiIHZhbHVlPSIiIHhtbG5zPSJodHRwOi8vd3d3LmJvbGRvbmphbWVzLmNvbS8yMDA4LzAxL3NpZS9pbnRlcm5hbC9sYWJlbCIgLz48L3Npc2w+PFVzZXJOYW1lPlVTXG5ycDAyNDE1ODI8L1VzZXJOYW1lPjxEYXRlVGltZT4zLzIzLzIwMjAgNzo1ODoxOSBQTTwvRGF0ZVRpbWU+PExhYmVsU3RyaW5nPk9yaWdpbiBKdXJpc2RpY3Rpb246IFVTICB8IEludGVybmFsIFVzZSBPbmx5IHwgUGVyIEN1cnJlbnQgUmF5dGhlb24gUG9saWN5IChSUC1PR0MtMDM1KSB8IE90aGVyIEluZm9ybWF0aW9uIChOb3QgUmVxdWlyaW5nIGFuIEV4cG9ydCBDb250cm9sIE1hcmtpbmcpIHwgTm8gbWFya2luZyBhcHBsaWVkIGJ5IHRoZSB0b29sPC9MYWJlbFN0cmluZz48L2l0ZW0+PGl0ZW0+PHNpc2wgc2lzbFZlcnNpb249IjAiIHBvbGljeT0iY2RlNTNhYzEtYmY1Zi00YWFlLTljZjEtMDc1MDllMjNhNGIwIiBvcmlnaW49InVzZXJTZWxlY3RlZCI+PGVsZW1lbnQgdWlkPSJiYmE5NGM2NS1hYzNkLTRmMzQtYjJlMS04ZGUxMWVmNmYwMWMiIHZhbHVlPSIiIHhtbG5zPSJodHRwOi8vd3d3LmJvbGRvbmphbWVzLmNvbS8yMDA4LzAxL3NpZS9pbnRlcm5hbC9sYWJlbCIgLz48ZWxlbWVudCB1aWQ9ImJjMmI3YzAxLTZkYjEtNGU3ZC04OGQxLWZjNjE2NzRmODZmZCIgdmFsdWU9IiIgeG1sbnM9Imh0dHA6Ly93d3cuYm9sZG9uamFtZXMuY29tLzIwMDgvMDEvc2llL2ludGVybmFsL2xhYmVsIiAvPjxlbGVtZW50IHVpZD0iOTJlOTkzYTMtYWYzMi00YWZiLWFhMTktM2E0OWNkYjgyYzdhIiB2YWx1ZT0iIiB4bWxucz0iaHR0cDovL3d3dy5ib2xkb25qYW1lcy5jb20vMjAwOC8wMS9zaWUvaW50ZXJuYWwvbGFiZWwiIC8+PGVsZW1lbnQgdWlkPSIxNWZlZmExYy1hZjY3LTRlYmYtYTcxZC1mMDE2MjExNjg5NjIiIHZhbHVlPSIiIHhtbG5zPSJodHRwOi8vd3d3LmJvbGRvbmphbWVzLmNvbS8yMDA4LzAxL3NpZS9pbnRlcm5hbC9sYWJlbCIgLz48ZWxlbWVudCB1aWQ9ImFhZmM5YTk1LWVlNWQtNDg3Yy05YzRlLTY3YTUzODBmMjk5MSIgdmFsdWU9IiIgeG1sbnM9Imh0dHA6Ly93d3cuYm9sZG9uamFtZXMuY29tLzIwMDgvMDEvc2llL2ludGVybmFsL2xhYmVsIiAvPjwvc2lzbD48VXNlck5hbWU+VVNcbnJwMDI0MTU4MjwvVXNlck5hbWU+PERhdGVUaW1lPjMvMjMvMjAyMCA4OjQ4OjA4IFBNPC9EYXRlVGltZT48TGFiZWxTdHJpbmc+T3JpZ2luIEp1cmlzZGljdGlvbjogVVMgIHwgVGhpcmQgUGFydHkgUHJvcHJpZXRhcnkgLSBOZWVkIHRvIEtub3cgfCBQZXIgQ3VycmVudCBSYXl0aGVvbiBQb2xpY3kgKFJQLU9HQy0wMzUpIHwgT3RoZXIgSW5mb3JtYXRpb24gKE5vdCBSZXF1aXJpbmcgYW4gRXhwb3J0IENvbnRyb2wgTWFya2luZykgfCBObyBtYXJraW5nIGFwcGxpZWQgYnkgdGhlIHRvb2w8L0xhYmVsU3RyaW5nPjwvaXRlbT48aXRlbT48c2lzbCBzaXNsVmVyc2lvbj0iMCIgcG9saWN5PSJjZGU1M2FjMS1iZjVmLTRhYWUtOWNmMS0wNzUwOWUyM2E0YjAiIG9yaWdpbj0idXNlclNlbGVjdGVkIiAvPjxVc2VyTmFtZT5VU1wxMTAzMDg1PC9Vc2VyTmFtZT48RGF0ZVRpbWU+My8yMy8yMDIwIDEwOjE1OjQwIFBNPC9EYXRlVGltZT48TGFiZWxTdHJpbmc+VGhpcyBhcnRpZmFjdCBoYXMgbm8gY2xhc3NpZmljYXRpb24uPC9MYWJlbFN0cmluZz48L2l0ZW0+PGl0ZW0+PHNpc2wgc2lzbFZlcnNpb249IjAiIHBvbGljeT0iY2RlNTNhYzEtYmY1Zi00YWFlLTljZjEtMDc1MDllMjNhNGIwIiBvcmlnaW49ImRlZmF1bHRWYWx1ZSI+PGVsZW1lbnQgdWlkPSJiYmE5NGM2NS1hYzNkLTRmMzQtYjJlMS04ZGUxMWVmNmYwMWMiIHZhbHVlPSIiIHhtbG5zPSJodHRwOi8vd3d3LmJvbGRvbmphbWVzLmNvbS8yMDA4LzAxL3NpZS9pbnRlcm5hbC9sYWJlbCIgLz48L3Npc2w+PFVzZXJOYW1lPlVTXG5ycDAyNDE1ODI8L1VzZXJOYW1lPjxEYXRlVGltZT40LzIwLzIwMjAgNDoyOToyMyBQTTwvRGF0ZVRpbWU+PExhYmVsU3RyaW5nPk9yaWdpbiBKdXJpc2RpY3Rpb246IFVTIDwvTGFiZWxTdHJpbmc+PC9pdGVtPjxpdGVtPjxzaXNsIHNpc2xWZXJzaW9uPSIwIiBwb2xpY3k9ImNkZTUzYWMxLWJmNWYtNGFhZS05Y2YxLTA3NTA5ZTIzYTRiMCIgb3JpZ2luPSJ1c2VyU2VsZWN0ZWQiIC8+PFVzZXJOYW1lPlVTXDExMDMwODU8L1VzZXJOYW1lPjxEYXRlVGltZT40LzIwLzIwMjAgNjozMjo1MCBQTTwvRGF0ZVRpbWU+PExhYmVsU3RyaW5nPlRoaXMgYXJ0aWZhY3QgaGFzIG5vIGNsYXNzaWZpY2F0aW9uLjwvTGFiZWxTdHJpbmc+PC9pdGVtPjxpdGVtPjxzaXNsIHNpc2xWZXJzaW9uPSIwIiBwb2xpY3k9ImNkZTUzYWMxLWJmNWYtNGFhZS05Y2YxLTA3NTA5ZTIzYTRiMCIgb3JpZ2luPSJkZWZhdWx0VmFsdWUiPjxlbGVtZW50IHVpZD0iYmJhOTRjNjUtYWMzZC00ZjM0LWIyZTEtOGRlMTFlZjZmMDFjIiB2YWx1ZT0iIiB4bWxucz0iaHR0cDovL3d3dy5ib2xkb25qYW1lcy5jb20vMjAwOC8wMS9zaWUvaW50ZXJuYWwvbGFiZWwiIC8+PC9zaXNsPjxVc2VyTmFtZT5VU1x2YWExMDUwPC9Vc2VyTmFtZT48RGF0ZVRpbWU+MTIvMTYvMjAyMCA1OjIyOjIzIFBNPC9EYXRlVGltZT48TGFiZWxTdHJpbmc+T3JpZ2luIEp1cmlzZGljdGlvbjogVVMgPC9MYWJlbFN0cmluZz48L2l0ZW0+PGl0ZW0+PHNpc2wgc2lzbFZlcnNpb249IjAiIHBvbGljeT0iY2RlNTNhYzEtYmY1Zi00YWFlLTljZjEtMDc1MDllMjNhNGIwIiBvcmlnaW49InVzZXJTZWxlY3RlZCI+PGVsZW1lbnQgdWlkPSJiYmE5NGM2NS1hYzNkLTRmMzQtYjJlMS04ZGUxMWVmNmYwMWMiIHZhbHVlPSIiIHhtbG5zPSJodHRwOi8vd3d3LmJvbGRvbmphbWVzLmNvbS8yMDA4LzAxL3NpZS9pbnRlcm5hbC9sYWJlbCIgLz48ZWxlbWVudCB1aWQ9ImRlY2VjYmQ2LWRhM2ItNDZmZS04ZjAwLWY5ZDlkZWVhMmVlMSIgdmFsdWU9IiIgeG1sbnM9Imh0dHA6Ly93d3cuYm9sZG9uamFtZXMuY29tLzIwMDgvMDEvc2llL2ludGVybmFsL2xhYmVsIiAvPjxlbGVtZW50IHVpZD0iYmJiZjdiZjQtNGY0Zi00MTg5LTljNWUtNjUwMTVkZThhNmFkIiB2YWx1ZT0iIiB4bWxucz0iaHR0cDovL3d3dy5ib2xkb25qYW1lcy5jb20vMjAwOC8wMS9zaWUvaW50ZXJuYWwvbGFiZWwiIC8+PGVsZW1lbnQgdWlkPSJmYjk5MTMwOC1hM2RlLTQwYTgtOTY3Yi0wOTIyMzM0MjQxYmEiIHZhbHVlPSIiIHhtbG5zPSJodHRwOi8vd3d3LmJvbGRvbmphbWVzLmNvbS8yMDA4LzAxL3NpZS9pbnRlcm5hbC9sYWJlbCIgLz48ZWxlbWVudCB1aWQ9ImMyMDZkNWZhLWFlZTEtNGY2NC04OWQ5LWY4MWU0ZDdiM2FjYyIgdmFsdWU9IiIgeG1sbnM9Imh0dHA6Ly93d3cuYm9sZG9uamFtZXMuY29tLzIwMDgvMDEvc2llL2ludGVybmFsL2xhYmVsIiAvPjwvc2lzbD48VXNlck5hbWU+VVNcdmFhMTA1MDwvVXNlck5hbWU+PERhdGVUaW1lPjEyLzE3LzIwMjAgMTo1NDo0NiBQTTwvRGF0ZVRpbWU+PExhYmVsU3RyaW5nPk9yaWdpbiBKdXJpc2RpY3Rpb246IFVTICB8IFVucmVzdHJpY3RlZCBDb250ZW50IHwgTm8gbWFya2luZyBhcHBsaWVkIGJ5IHRoaXMgdG9vbCB8IFVTLUV4cG9ydCBDb250cm9sbGVkIEp1cmlzZGljdGlvbiBVbmRldGVybWluZWQgfCBQZXIgQ3VycmVudCBSYXl0aGVvbiBQb2xpY3kgKFBJLU9HQy1HVEMtNTAwNCk8L0xhYmVsU3RyaW5nPjwvaXRlbT48aXRlbT48c2lzbCBzaXNsVmVyc2lvbj0iMCIgcG9saWN5PSJjZGU1M2FjMS1iZjVmLTRhYWUtOWNmMS0wNzUwOWUyM2E0YjAiIG9yaWdpbj0idXNlclNlbGVjdGVkIiAvPjxVc2VyTmFtZT5VU1wxMTYxMTEzPC9Vc2VyTmFtZT48RGF0ZVRpbWU+Ni8xLzIwMjMgMjo0OTo1NCBQTTwvRGF0ZVRpbWU+PExhYmVsU3RyaW5nPlRoaXMgYXJ0aWZhY3QgaGFzIG5vIGNsYXNzaWZpY2F0aW9uLjwvTGFiZWxTdHJpbmc+PC9pdGVtPjxpdGVtPjxzaXNsIHNpc2xWZXJzaW9uPSIwIiBwb2xpY3k9ImNkZTUzYWMxLWJmNWYtNGFhZS05Y2YxLTA3NTA5ZTIzYTRiMCIgb3JpZ2luPSJ1c2VyU2VsZWN0ZWQiPjxlbGVtZW50IHVpZD0iZGVjZWNiZDYtZGEzYi00NmZlLThmMDAtZjlkOWRlZWEyZWUxIiB2YWx1ZT0iIiB4bWxucz0iaHR0cDovL3d3dy5ib2xkb25qYW1lcy5jb20vMjAwOC8wMS9zaWUvaW50ZXJuYWwvbGFiZWwiIC8+PGVsZW1lbnQgdWlkPSJhNGE5ZjM4Mi04Y2VjLTQwYmItYTljMy1jMTg3NmRlZDlkZWUiIHZhbHVlPSIiIHhtbG5zPSJodHRwOi8vd3d3LmJvbGRvbmphbWVzLmNvbS8yMDA4LzAxL3NpZS9pbnRlcm5hbC9sYWJlbCIgLz48ZWxlbWVudCB1aWQ9ImJiYTk0YzY1LWFjM2QtNGYzNC1iMmUxLThkZTExZWY2ZjAxYyIgdmFsdWU9IiIgeG1sbnM9Imh0dHA6Ly93d3cuYm9sZG9uamFtZXMuY29tLzIwMDgvMDEvc2llL2ludGVybmFsL2xhYmVsIiAvPjxlbGVtZW50IHVpZD0iZDc1OWNkN2EtYjU3Yy00MmU0LTlhNDktOWI4MmEyMzM3NTc5IiB2YWx1ZT0iIiB4bWxucz0iaHR0cDovL3d3dy5ib2xkb25qYW1lcy5jb20vMjAwOC8wMS9zaWUvaW50ZXJuYWwvbGFiZWwiIC8+PGVsZW1lbnQgdWlkPSI5MmU5OTNhMy1hZjMyLTRhZmItYWExOS0zYTQ5Y2RiODJjN2EiIHZhbHVlPSIiIHhtbG5zPSJodHRwOi8vd3d3LmJvbGRvbmphbWVzLmNvbS8yMDA4LzAxL3NpZS9pbnRlcm5hbC9sYWJlbCIgLz48L3Npc2w+PFVzZXJOYW1lPlVTXDExNjExMTM8L1VzZXJOYW1lPjxEYXRlVGltZT42LzYvMjAyMyA3OjEwOjE1IFBNPC9EYXRlVGltZT48TGFiZWxTdHJpbmc+T3JpZ2luIEp1cmlzZGljdGlvbjogVVMgfCBVbnJlc3RyaWN0ZWQgQ29udGVudCB8IFJheXRoZW9uIFRlY2hub2xvZ2llcyAoQ29ycG9yYXRlIE9ubHkpIHwgTm9uLUV4cG9ydCBDb250cm9sbGVkIFRlY2huaWNhbCBJbmZvcm1hdGlvbiAoRVhJTSBEZXRlcm1pbmVkIE9ubHkpIHwgTm8gbWFya2luZyBhcHBsaWVkIGJ5IHRoZSB0b29sPC9MYWJlbFN0cmluZz48L2l0ZW0+PGl0ZW0+PHNpc2wgc2lzbFZlcnNpb249IjAiIHBvbGljeT0iY2RlNTNhYzEtYmY1Zi00YWFlLTljZjEtMDc1MDllMjNhNGIwIiBvcmlnaW49InVzZXJTZWxlY3RlZCI+PGVsZW1lbnQgdWlkPSJiYmE5NGM2NS1hYzNkLTRmMzQtYjJlMS04ZGUxMWVmNmYwMWMiIHZhbHVlPSIiIHhtbG5zPSJodHRwOi8vd3d3LmJvbGRvbmphbWVzLmNvbS8yMDA4LzAxL3NpZS9pbnRlcm5hbC9sYWJlbCIgLz48ZWxlbWVudCB1aWQ9ImJjMmI3YzAxLTZkYjEtNGU3ZC04OGQxLWZjNjE2NzRmODZmZCIgdmFsdWU9IiIgeG1sbnM9Imh0dHA6Ly93d3cuYm9sZG9uamFtZXMuY29tLzIwMDgvMDEvc2llL2ludGVybmFsL2xhYmVsIiAvPjxlbGVtZW50IHVpZD0iOTJlOTkzYTMtYWYzMi00YWZiLWFhMTktM2E0OWNkYjgyYzdhIiB2YWx1ZT0iIiB4bWxucz0iaHR0cDovL3d3dy5ib2xkb25qYW1lcy5jb20vMjAwOC8wMS9zaWUvaW50ZXJuYWwvbGFiZWwiIC8+PGVsZW1lbnQgdWlkPSJhY2Y5ZWNjMy0wZjQ1LTQyMzQtYTkwZC1lNDM2OGZhY2Q5ODEiIHZhbHVlPSIiIHhtbG5zPSJodHRwOi8vd3d3LmJvbGRvbmphbWVzLmNvbS8yMDA4LzAxL3NpZS9pbnRlcm5hbC9sYWJlbCIgLz48ZWxlbWVudCB1aWQ9ImE0YTlmMzgyLThjZWMtNDBiYi1hOWMzLWMxODc2ZGVkOWRlZSIgdmFsdWU9IiIgeG1sbnM9Imh0dHA6Ly93d3cuYm9sZG9uamFtZXMuY29tLzIwMDgvMDEvc2llL2ludGVybmFsL2xhYmVsIiAvPjwvc2lzbD48VXNlck5hbWU+VVNcMTE2MTExMzwvVXNlck5hbWU+PERhdGVUaW1lPjYvNi8yMDIzIDc6MTA6MzIgUE08L0RhdGVUaW1lPjxMYWJlbFN0cmluZz5PcmlnaW4gSnVyaXNkaWN0aW9uOiBVUyB8IENvbXBhbnkgVXNlL0ludGVybmFsIFVzZSBPbmx5IHwgUmF5dGhlb24gVGVjaG5vbG9naWVzIChDb3Jwb3JhdGUgT25seSkgfCBPdGhlciBJbmZvcm1hdGlvbiAoTm90IFJlcXVpcmluZyBhbiBFeHBvcnQgQ29udHJvbCBNYXJraW5nKSB8IE5vIG1hcmtpbmcgYXBwbGllZCBieSB0aGUgdG9vbDwvTGFiZWxTdHJpbmc+PC9pdGVtPjxpdGVtPjxzaXNsIHNpc2xWZXJzaW9uPSIwIiBwb2xpY3k9ImNkZTUzYWMxLWJmNWYtNGFhZS05Y2YxLTA3NTA5ZTIzYTRiMCIgb3JpZ2luPSJ1c2VyU2VsZWN0ZWQiIC8+PFVzZXJOYW1lPlVTXDExNjExMTM8L1VzZXJOYW1lPjxEYXRlVGltZT42LzYvMjAyMyA4OjE3OjQwIFBNPC9EYXRlVGltZT48TGFiZWxTdHJpbmc+VGhpcyBhcnRpZmFjdCBoYXMgbm8gY2xhc3NpZmljYXRpb24uPC9MYWJlbFN0cmluZz48L2l0ZW0+PGl0ZW0+PHNpc2wgc2lzbFZlcnNpb249IjAiIHBvbGljeT0iY2RlNTNhYzEtYmY1Zi00YWFlLTljZjEtMDc1MDllMjNhNGIwIiBvcmlnaW49InVzZXJTZWxlY3RlZCI+PGVsZW1lbnQgdWlkPSJhY2Y5ZWNjMy0wZjQ1LTQyMzQtYTkwZC1lNDM2OGZhY2Q5ODEiIHZhbHVlPSIiIHhtbG5zPSJodHRwOi8vd3d3LmJvbGRvbmphbWVzLmNvbS8yMDA4LzAxL3NpZS9pbnRlcm5hbC9sYWJlbCIgLz48ZWxlbWVudCB1aWQ9IjY5ZDAwYWNkLTg5YzQtNDRlMC04NGFlLWU1OGRhMTdmNDg1YyIgdmFsdWU9IiIgeG1sbnM9Imh0dHA6Ly93d3cuYm9sZG9uamFtZXMuY29tLzIwMDgvMDEvc2llL2ludGVybmFsL2xhYmVsIiAvPjxlbGVtZW50IHVpZD0iYmJhOTRjNjUtYWMzZC00ZjM0LWIyZTEtOGRlMTFlZjZmMDFjIiB2YWx1ZT0iIiB4bWxucz0iaHR0cDovL3d3dy5ib2xkb25qYW1lcy5jb20vMjAwOC8wMS9zaWUvaW50ZXJuYWwvbGFiZWwiIC8+PGVsZW1lbnQgdWlkPSJiYzJiN2MwMS02ZGIxLTRlN2QtODhkMS1mYzYxNjc0Zjg2ZmQiIHZhbHVlPSIiIHhtbG5zPSJodHRwOi8vd3d3LmJvbGRvbmphbWVzLmNvbS8yMDA4LzAxL3NpZS9pbnRlcm5hbC9sYWJlbCIgLz48ZWxlbWVudCB1aWQ9IjkyZTk5M2EzLWFmMzItNGFmYi1hYTE5LTNhNDljZGI4MmM3YSIgdmFsdWU9IiIgeG1sbnM9Imh0dHA6Ly93d3cuYm9sZG9uamFtZXMuY29tLzIwMDgvMDEvc2llL2ludGVybmFsL2xhYmVsIiAvPjxlbGVtZW50IHVpZD0iYTI3ZjY3MWYtMDQ1YS00OWQyLWIyMzgtNGYzY2EyZTBiMGJiIiB2YWx1ZT0iIiB4bWxucz0iaHR0cDovL3d3dy5ib2xkb25qYW1lcy5jb20vMjAwOC8wMS9zaWUvaW50ZXJuYWwvbGFiZWwiIC8+PC9zaXNsPjxVc2VyTmFtZT5BRFhVXEUyMTE2MTExMzwvVXNlck5hbWU+PERhdGVUaW1lPjgvMTQvMjAyMyAxOjUwOjQ2IFBNPC9EYXRlVGltZT48TGFiZWxTdHJpbmc+RXhwb3J0IENvbnRyb2wgQ291bnRyeTogVVMgIHwgQ29tcGFueSBVc2UgfCBSYXl0aGVvbiBUZWNobm9sb2dpZXMgfCBPdGhlciBJbmZvcm1hdGlvbiAoTm90IFJlcXVpcmluZyBhbiBFeHBvcnQgQ29udHJvbCBNYXJraW5nKSB8IE5vIHZpc3VhbCBtYXJraW5nIGFwcGxpZWQgYnkgdGhlIHRvb2wgfCBObyBUZWNoIERhdGE8L0xhYmVsU3RyaW5nPjwvaXRlbT48aXRlbT48c2lzbCBzaXNsVmVyc2lvbj0iMCIgcG9saWN5PSJjZGU1M2FjMS1iZjVmLTRhYWUtOWNmMS0wNzUwOWUyM2E0YjAiIG9yaWdpbj0idXNlclNlbGVjdGVkIj48ZWxlbWVudCB1aWQ9ImFjZjllY2MzLTBmNDUtNDIzNC1hOTBkLWU0MzY4ZmFjZDk4MSIgdmFsdWU9IiIgeG1sbnM9Imh0dHA6Ly93d3cuYm9sZG9uamFtZXMuY29tLzIwMDgvMDEvc2llL2ludGVybmFsL2xhYmVsIiAvPjxlbGVtZW50IHVpZD0iNjlkMDBhY2QtODljNC00NGUwLTg0YWUtZTU4ZGExN2Y0ODVjIiB2YWx1ZT0iIiB4bWxucz0iaHR0cDovL3d3dy5ib2xkb25qYW1lcy5jb20vMjAwOC8wMS9zaWUvaW50ZXJuYWwvbGFiZWwiIC8+PGVsZW1lbnQgdWlkPSJiYmE5NGM2NS1hYzNkLTRmMzQtYjJlMS04ZGUxMWVmNmYwMWMiIHZhbHVlPSIiIHhtbG5zPSJodHRwOi8vd3d3LmJvbGRvbmphbWVzLmNvbS8yMDA4LzAxL3NpZS9pbnRlcm5hbC9sYWJlbCIgLz48ZWxlbWVudCB1aWQ9ImJjMmI3YzAxLTZkYjEtNGU3ZC04OGQxLWZjNjE2NzRmODZmZCIgdmFsdWU9IiIgeG1sbnM9Imh0dHA6Ly93d3cuYm9sZG9uamFtZXMuY29tLzIwMDgvMDEvc2llL2ludGVybmFsL2xhYmVsIiAvPjxlbGVtZW50IHVpZD0iOTJlOTkzYTMtYWYzMi00YWZiLWFhMTktM2E0OWNkYjgyYzdhIiB2YWx1ZT0iIiB4bWxucz0iaHR0cDovL3d3dy5ib2xkb25qYW1lcy5jb20vMjAwOC8wMS9zaWUvaW50ZXJuYWwvbGFiZWwiIC8+PC9zaXNsPjxVc2VyTmFtZT5BRFhVXEUyMTE2MTExMzwvVXNlck5hbWU+PERhdGVUaW1lPjgvMTcvMjAyMyAyOjI2OjI5IFBNPC9EYXRlVGltZT48TGFiZWxTdHJpbmc+RXhwb3J0IENvbnRyb2wgQ291bnRyeTogVVMgIHwgQ29tcGFueSBVc2UvSW50ZXJuYWwgVXNlIE9ubHkgfCBSVFggQ29ycG9yYXRpb24gKENvcnBvcmF0ZSkgfCBPdGhlciBJbmZvcm1hdGlvbiAoTm90IFJlcXVpcmluZyBhbiBFeHBvcnQgQ29udHJvbCBNYXJraW5nKSB8IE5vIHZpc3VhbCBtYXJraW5nIGFwcGxpZWQgYnkgdGhlIHRvb2w8L0xhYmVsU3RyaW5nPjwvaXRlbT48aXRlbT48c2lzbCBzaXNsVmVyc2lvbj0iMCIgcG9saWN5PSJjZGU1M2FjMS1iZjVmLTRhYWUtOWNmMS0wNzUwOWUyM2E0YjAiIG9yaWdpbj0idXNlclNlbGVjdGVkIj48ZWxlbWVudCB1aWQ9ImFjZjllY2MzLTBmNDUtNDIzNC1hOTBkLWU0MzY4ZmFjZDk4MSIgdmFsdWU9IiIgeG1sbnM9Imh0dHA6Ly93d3cuYm9sZG9uamFtZXMuY29tLzIwMDgvMDEvc2llL2ludGVybmFsL2xhYmVsIiAvPjxlbGVtZW50IHVpZD0iNjlkMDBhY2QtODljNC00NGUwLTg0YWUtZTU4ZGExN2Y0ODVjIiB2YWx1ZT0iIiB4bWxucz0iaHR0cDovL3d3dy5ib2xkb25qYW1lcy5jb20vMjAwOC8wMS9zaWUvaW50ZXJuYWwvbGFiZWwiIC8+PGVsZW1lbnQgdWlkPSJiYmE5NGM2NS1hYzNkLTRmMzQtYjJlMS04ZGUxMWVmNmYwMWMiIHZhbHVlPSIiIHhtbG5zPSJodHRwOi8vd3d3LmJvbGRvbmphbWVzLmNvbS8yMDA4LzAxL3NpZS9pbnRlcm5hbC9sYWJlbCIgLz48ZWxlbWVudCB1aWQ9ImJjMmI3YzAxLTZkYjEtNGU3ZC04OGQxLWZjNjE2NzRmODZmZCIgdmFsdWU9IiIgeG1sbnM9Imh0dHA6Ly93d3cuYm9sZG9uamFtZXMuY29tLzIwMDgvMDEvc2llL2ludGVybmFsL2xhYmVsIiAvPjxlbGVtZW50IHVpZD0iNzFmNGYyY2EtOTMzNi00OTcwLWEwMDYtMTkyZDdhODA1MTY0IiB2YWx1ZT0iIiB4bWxucz0iaHR0cDovL3d3dy5ib2xkb25qYW1lcy5jb20vMjAwOC8wMS9zaWUvaW50ZXJuYWwvbGFiZWwiIC8+PC9zaXNsPjxVc2VyTmFtZT5BRFhVXEUyMTAwNTMyOTwvVXNlck5hbWU+PERhdGVUaW1lPjkvMTgvMjAyNCAyOjQxOjIxIFBNPC9EYXRlVGltZT48TGFiZWxTdHJpbmc+RXhwb3J0IENvbnRyb2wgQ291bnRyeTogVVMgIHwgQ29tcGFueSBVc2UvSW50ZXJuYWwgVXNlIE9ubHkgfCBSVFggQ29ycG9yYXRpb24gKENvcnBvcmF0ZSkgfCBPdGhlciBJbmZvcm1hdGlvbiAoTm90IFJlcXVpcmluZyBhbiBFeHBvcnQgQ29udHJvbCBNYXJraW5nKSB8IFBlciBSVFggUG9saWN5IChHQ1AtMTQpPC9MYWJlbFN0cmluZz48L2l0ZW0+PC9sYWJlbEhpc3Rvcnk+</Value>
-</WrappedLabelHistory>
-</file>
-
 <file path=customXml/item5.xml><?xml version="1.0" encoding="utf-8"?>
-<sisl xmlns:xsi="http://www.w3.org/2001/XMLSchema-instance" xmlns:xsd="http://www.w3.org/2001/XMLSchema" xmlns="http://www.boldonjames.com/2008/01/sie/internal/label" sislVersion="0" policy="cde53ac1-bf5f-4aae-9cf1-07509e23a4b0" origin="userSelected">
-  <element uid="acf9ecc3-0f45-4234-a90d-e4368facd981" value=""/>
-  <element uid="69d00acd-89c4-44e0-84ae-e58da17f485c" value=""/>
-  <element uid="bba94c65-ac3d-4f34-b2e1-8de11ef6f01c" value=""/>
-  <element uid="bc2b7c01-6db1-4e7d-88d1-fc61674f86fd" value=""/>
-  <element uid="71f4f2ca-9336-4970-a006-192d7a805164" value=""/>
-</sisl>
+<?mso-contentType ?>
+<FormTemplates xmlns="http://schemas.microsoft.com/sharepoint/v3/contenttype/forms">
+  <Display>DocumentLibraryForm</Display>
+  <Edit>DocumentLibraryForm</Edit>
+  <New>DocumentLibraryForm</New>
+</FormTemplates>
 </file>
 
 <file path=customXml/itemProps1.xml><?xml version="1.0" encoding="utf-8"?>
@@ -17784,23 +20780,22 @@
     <ds:schemaRef ds:uri="http://schemas.microsoft.com/office/infopath/2007/PartnerControls"/>
     <ds:schemaRef ds:uri="http://schemas.openxmlformats.org/package/2006/metadata/core-properties"/>
     <ds:schemaRef ds:uri="516fe794-3974-4276-9310-4faae2c923a6"/>
+    <ds:schemaRef ds:uri="49c55c8f-d4a7-4d90-98a8-51726318adfd"/>
+    <ds:schemaRef ds:uri="017de5b2-5821-42d6-bcda-bb599a7893fb"/>
   </ds:schemaRefs>
 </ds:datastoreItem>
 </file>
 
 <file path=customXml/itemProps2.xml><?xml version="1.0" encoding="utf-8"?>
-<ds:datastoreItem xmlns:ds="http://schemas.openxmlformats.org/officeDocument/2006/customXml" ds:itemID="{4F85E5AD-1BCC-408B-B532-7B415316D2C0}">
+<ds:datastoreItem xmlns:ds="http://schemas.openxmlformats.org/officeDocument/2006/customXml" ds:itemID="{C43A2654-375D-42F3-8F6D-017597A10C14}">
   <ds:schemaRefs>
-    <ds:schemaRef ds:uri="http://schemas.microsoft.com/sharepoint/v3/contenttype/forms"/>
+    <ds:schemaRef ds:uri="http://www.w3.org/2001/XMLSchema"/>
+    <ds:schemaRef ds:uri="http://www.boldonjames.com/2008/01/sie/internal/label"/>
   </ds:schemaRefs>
 </ds:datastoreItem>
 </file>
 
 <file path=customXml/itemProps3.xml><?xml version="1.0" encoding="utf-8"?>
-<ds:datastoreItem xmlns:ds="http://schemas.openxmlformats.org/officeDocument/2006/customXml" ds:itemID="{04582D57-39D7-4F76-A86B-C4C78D506662}"/>
-</file>
-
-<file path=customXml/itemProps4.xml><?xml version="1.0" encoding="utf-8"?>
 <ds:datastoreItem xmlns:ds="http://schemas.openxmlformats.org/officeDocument/2006/customXml" ds:itemID="{C15C3F79-C153-451E-A245-3447252CD3FC}">
   <ds:schemaRefs>
     <ds:schemaRef ds:uri="http://www.boldonjames.com/2016/02/Classifier/internal/wrappedLabelHistory"/>
@@ -17809,11 +20804,29 @@
 </ds:datastoreItem>
 </file>
 
+<file path=customXml/itemProps4.xml><?xml version="1.0" encoding="utf-8"?>
+<ds:datastoreItem xmlns:ds="http://schemas.openxmlformats.org/officeDocument/2006/customXml" ds:itemID="{04582D57-39D7-4F76-A86B-C4C78D506662}">
+  <ds:schemaRefs>
+    <ds:schemaRef ds:uri="http://schemas.microsoft.com/office/2006/metadata/contentType"/>
+    <ds:schemaRef ds:uri="http://schemas.microsoft.com/office/2006/metadata/properties/metaAttributes"/>
+    <ds:schemaRef ds:uri="http://www.w3.org/2001/XMLSchema"/>
+    <ds:schemaRef ds:uri="http://schemas.microsoft.com/office/2006/metadata/properties"/>
+    <ds:schemaRef ds:uri="49c55c8f-d4a7-4d90-98a8-51726318adfd"/>
+    <ds:schemaRef ds:uri="017de5b2-5821-42d6-bcda-bb599a7893fb"/>
+    <ds:schemaRef ds:uri="http://schemas.microsoft.com/office/2006/documentManagement/types"/>
+    <ds:schemaRef ds:uri="http://schemas.microsoft.com/office/infopath/2007/PartnerControls"/>
+    <ds:schemaRef ds:uri="http://schemas.openxmlformats.org/package/2006/metadata/core-properties"/>
+    <ds:schemaRef ds:uri="http://purl.org/dc/elements/1.1/"/>
+    <ds:schemaRef ds:uri="http://purl.org/dc/terms/"/>
+    <ds:schemaRef ds:uri="http://schemas.microsoft.com/internal/obd"/>
+  </ds:schemaRefs>
+</ds:datastoreItem>
+</file>
+
 <file path=customXml/itemProps5.xml><?xml version="1.0" encoding="utf-8"?>
-<ds:datastoreItem xmlns:ds="http://schemas.openxmlformats.org/officeDocument/2006/customXml" ds:itemID="{C43A2654-375D-42F3-8F6D-017597A10C14}">
+<ds:datastoreItem xmlns:ds="http://schemas.openxmlformats.org/officeDocument/2006/customXml" ds:itemID="{4F85E5AD-1BCC-408B-B532-7B415316D2C0}">
   <ds:schemaRefs>
-    <ds:schemaRef ds:uri="http://www.w3.org/2001/XMLSchema"/>
-    <ds:schemaRef ds:uri="http://www.boldonjames.com/2008/01/sie/internal/label"/>
+    <ds:schemaRef ds:uri="http://schemas.microsoft.com/sharepoint/v3/contenttype/forms"/>
   </ds:schemaRefs>
 </ds:datastoreItem>
 </file>
